--- a/docs/RuriSkry-Exec-Deck.pptx
+++ b/docs/RuriSkry-Exec-Deck.pptx
@@ -2369,7 +2369,7 @@
                 <a:ea typeface="Georgia" pitchFamily="34" charset="-122"/>
                 <a:cs typeface="Georgia" pitchFamily="34" charset="-120"/>
               </a:rPr>
-              <a:t>Where it fits in an enterprise stack</a:t>
+              <a:t>Architecturally different</a:t>
             </a:r>
             <a:endParaRPr lang="en-US" sz="3600" dirty="0"/>
           </a:p>
@@ -2461,8 +2461,8 @@
         </p:nvSpPr>
         <p:spPr>
           <a:xfrm>
-            <a:off x="952348" y="2011680"/>
-            <a:ext cx="2194560" cy="1097280"/>
+            <a:off x="548640" y="1828800"/>
+            <a:ext cx="3515258" cy="4114800"/>
           </a:xfrm>
           <a:prstGeom prst="rect">
             <a:avLst/>
@@ -2480,42 +2480,28 @@
       </p:sp>
       <p:sp>
         <p:nvSpPr>
-          <p:cNvPr id="7" name="Text 5"/>
-          <p:cNvSpPr/>
-          <p:nvPr/>
-        </p:nvSpPr>
-        <p:spPr>
-          <a:xfrm>
-            <a:off x="952348" y="2011680"/>
-            <a:ext cx="2194560" cy="1097280"/>
-          </a:xfrm>
-          <a:prstGeom prst="rect">
-            <a:avLst/>
-          </a:prstGeom>
-          <a:noFill/>
-          <a:ln/>
-        </p:spPr>
-        <p:txBody>
-          <a:bodyPr wrap="square" lIns="0" tIns="0" rIns="0" bIns="0" rtlCol="0" anchor="ctr"/>
-          <a:lstStyle/>
-          <a:p>
-            <a:pPr algn="ctr" indent="0" marL="0">
-              <a:buNone/>
-            </a:pPr>
-            <a:r>
-              <a:rPr lang="en-US" sz="1600" dirty="0">
-                <a:solidFill>
-                  <a:srgbClr val="1F2937"/>
-                </a:solidFill>
-                <a:latin typeface="Georgia" pitchFamily="34" charset="0"/>
-                <a:ea typeface="Georgia" pitchFamily="34" charset="-122"/>
-                <a:cs typeface="Georgia" pitchFamily="34" charset="-120"/>
-              </a:rPr>
-              <a:t>Ops Agent</a:t>
-            </a:r>
-            <a:endParaRPr lang="en-US" sz="1600" dirty="0"/>
-          </a:p>
-        </p:txBody>
+          <p:cNvPr id="7" name="Shape 5"/>
+          <p:cNvSpPr/>
+          <p:nvPr/>
+        </p:nvSpPr>
+        <p:spPr>
+          <a:xfrm>
+            <a:off x="548640" y="1828800"/>
+            <a:ext cx="3515258" cy="91440"/>
+          </a:xfrm>
+          <a:prstGeom prst="rect">
+            <a:avLst/>
+          </a:prstGeom>
+          <a:solidFill>
+            <a:srgbClr val="F59E0B"/>
+          </a:solidFill>
+          <a:ln w="12700">
+            <a:solidFill>
+              <a:srgbClr val="F59E0B"/>
+            </a:solidFill>
+            <a:prstDash val="solid"/>
+          </a:ln>
+        </p:spPr>
       </p:sp>
       <p:pic>
         <p:nvPicPr>
@@ -2533,8 +2519,8 @@
         </p:blipFill>
         <p:spPr>
           <a:xfrm>
-            <a:off x="3238348" y="2400300"/>
-            <a:ext cx="320040" cy="320040"/>
+            <a:off x="914400" y="2240280"/>
+            <a:ext cx="640080" cy="640080"/>
           </a:xfrm>
           <a:prstGeom prst="rect">
             <a:avLst/>
@@ -2543,119 +2529,92 @@
       </p:pic>
       <p:sp>
         <p:nvSpPr>
-          <p:cNvPr id="9" name="Shape 6"/>
-          <p:cNvSpPr/>
-          <p:nvPr/>
-        </p:nvSpPr>
-        <p:spPr>
-          <a:xfrm>
-            <a:off x="3649828" y="2011680"/>
-            <a:ext cx="2194560" cy="1097280"/>
-          </a:xfrm>
-          <a:prstGeom prst="rect">
-            <a:avLst/>
-          </a:prstGeom>
-          <a:solidFill>
-            <a:srgbClr val="2F3E46"/>
-          </a:solidFill>
-          <a:ln w="12700">
-            <a:solidFill>
-              <a:srgbClr val="2F3E46"/>
-            </a:solidFill>
-            <a:prstDash val="solid"/>
-          </a:ln>
-        </p:spPr>
-      </p:sp>
-      <p:sp>
-        <p:nvSpPr>
-          <p:cNvPr id="10" name="Text 7"/>
-          <p:cNvSpPr/>
-          <p:nvPr/>
-        </p:nvSpPr>
-        <p:spPr>
-          <a:xfrm>
-            <a:off x="3649828" y="2011680"/>
-            <a:ext cx="2194560" cy="1097280"/>
-          </a:xfrm>
-          <a:prstGeom prst="rect">
-            <a:avLst/>
-          </a:prstGeom>
-          <a:noFill/>
-          <a:ln/>
-        </p:spPr>
-        <p:txBody>
-          <a:bodyPr wrap="square" lIns="0" tIns="0" rIns="0" bIns="0" rtlCol="0" anchor="ctr"/>
-          <a:lstStyle/>
-          <a:p>
-            <a:pPr algn="ctr" indent="0" marL="0">
-              <a:buNone/>
-            </a:pPr>
-            <a:r>
-              <a:rPr lang="en-US" sz="1800" b="1" dirty="0">
-                <a:solidFill>
-                  <a:srgbClr val="FFFFFF"/>
+          <p:cNvPr id="9" name="Text 6"/>
+          <p:cNvSpPr/>
+          <p:nvPr/>
+        </p:nvSpPr>
+        <p:spPr>
+          <a:xfrm>
+            <a:off x="914400" y="3017520"/>
+            <a:ext cx="2783738" cy="822960"/>
+          </a:xfrm>
+          <a:prstGeom prst="rect">
+            <a:avLst/>
+          </a:prstGeom>
+          <a:noFill/>
+          <a:ln/>
+        </p:spPr>
+        <p:txBody>
+          <a:bodyPr wrap="square" lIns="0" tIns="0" rIns="0" bIns="0" rtlCol="0" anchor="t"/>
+          <a:lstStyle/>
+          <a:p>
+            <a:pPr algn="l" indent="0" marL="0">
+              <a:buNone/>
+            </a:pPr>
+            <a:r>
+              <a:rPr lang="en-US" sz="2000" b="1" dirty="0">
+                <a:solidFill>
+                  <a:srgbClr val="2F3E46"/>
                 </a:solidFill>
                 <a:latin typeface="Georgia" pitchFamily="34" charset="0"/>
                 <a:ea typeface="Georgia" pitchFamily="34" charset="-122"/>
                 <a:cs typeface="Georgia" pitchFamily="34" charset="-120"/>
               </a:rPr>
-              <a:t>RuriSkry</a:t>
-            </a:r>
-            <a:endParaRPr lang="en-US" sz="1800" dirty="0"/>
-          </a:p>
-          <a:p>
-            <a:pPr algn="ctr" indent="0" marL="0">
-              <a:buNone/>
-            </a:pPr>
-            <a:r>
-              <a:rPr lang="en-US" sz="1800" b="1" dirty="0">
-                <a:solidFill>
-                  <a:srgbClr val="FFFFFF"/>
-                </a:solidFill>
-                <a:latin typeface="Georgia" pitchFamily="34" charset="0"/>
-                <a:ea typeface="Georgia" pitchFamily="34" charset="-122"/>
-                <a:cs typeface="Georgia" pitchFamily="34" charset="-120"/>
-              </a:rPr>
-              <a:t>governance</a:t>
-            </a:r>
-            <a:endParaRPr lang="en-US" sz="1800" dirty="0"/>
-          </a:p>
-        </p:txBody>
-      </p:sp>
-      <p:pic>
-        <p:nvPicPr>
-          <p:cNvPr id="11" name="Image 1" descr="preencoded.png">    </p:cNvPr>
-          <p:cNvPicPr>
-            <a:picLocks noChangeAspect="1"/>
-          </p:cNvPicPr>
-          <p:nvPr/>
-        </p:nvPicPr>
-        <p:blipFill>
-          <a:blip r:embed="rId2"/>
-          <a:stretch>
-            <a:fillRect/>
-          </a:stretch>
-        </p:blipFill>
-        <p:spPr>
-          <a:xfrm>
-            <a:off x="5935828" y="2400300"/>
-            <a:ext cx="320040" cy="320040"/>
-          </a:xfrm>
-          <a:prstGeom prst="rect">
-            <a:avLst/>
-          </a:prstGeom>
-        </p:spPr>
-      </p:pic>
-      <p:sp>
-        <p:nvSpPr>
-          <p:cNvPr id="12" name="Shape 8"/>
-          <p:cNvSpPr/>
-          <p:nvPr/>
-        </p:nvSpPr>
-        <p:spPr>
-          <a:xfrm>
-            <a:off x="6347308" y="2011680"/>
-            <a:ext cx="2194560" cy="1097280"/>
+              <a:t>LLM as decision-maker</a:t>
+            </a:r>
+            <a:endParaRPr lang="en-US" sz="2000" dirty="0"/>
+          </a:p>
+        </p:txBody>
+      </p:sp>
+      <p:sp>
+        <p:nvSpPr>
+          <p:cNvPr id="10" name="Text 7"/>
+          <p:cNvSpPr/>
+          <p:nvPr/>
+        </p:nvSpPr>
+        <p:spPr>
+          <a:xfrm>
+            <a:off x="914400" y="3886200"/>
+            <a:ext cx="2783738" cy="1920240"/>
+          </a:xfrm>
+          <a:prstGeom prst="rect">
+            <a:avLst/>
+          </a:prstGeom>
+          <a:noFill/>
+          <a:ln/>
+        </p:spPr>
+        <p:txBody>
+          <a:bodyPr wrap="square" lIns="0" tIns="0" rIns="0" bIns="0" rtlCol="0" anchor="t"/>
+          <a:lstStyle/>
+          <a:p>
+            <a:pPr algn="l" indent="0" marL="0">
+              <a:buNone/>
+            </a:pPr>
+            <a:r>
+              <a:rPr lang="en-US" sz="1400" dirty="0">
+                <a:solidFill>
+                  <a:srgbClr val="1F2937"/>
+                </a:solidFill>
+                <a:latin typeface="Calibri" pitchFamily="34" charset="0"/>
+                <a:ea typeface="Calibri" pitchFamily="34" charset="-122"/>
+                <a:cs typeface="Calibri" pitchFamily="34" charset="-120"/>
+              </a:rPr>
+              <a:t>Most tools use the LLM to explain a rule-based verdict. RuriSkry lets the LLM adjust the verdict within a bounded range — with a hard clamp that prevents hallucination from dominating.</a:t>
+            </a:r>
+            <a:endParaRPr lang="en-US" sz="1400" dirty="0"/>
+          </a:p>
+        </p:txBody>
+      </p:sp>
+      <p:sp>
+        <p:nvSpPr>
+          <p:cNvPr id="11" name="Shape 8"/>
+          <p:cNvSpPr/>
+          <p:nvPr/>
+        </p:nvSpPr>
+        <p:spPr>
+          <a:xfrm>
+            <a:off x="4338218" y="1828800"/>
+            <a:ext cx="3515258" cy="4114800"/>
           </a:xfrm>
           <a:prstGeom prst="rect">
             <a:avLst/>
@@ -2673,61 +2632,47 @@
       </p:sp>
       <p:sp>
         <p:nvSpPr>
-          <p:cNvPr id="13" name="Text 9"/>
-          <p:cNvSpPr/>
-          <p:nvPr/>
-        </p:nvSpPr>
-        <p:spPr>
-          <a:xfrm>
-            <a:off x="6347308" y="2011680"/>
-            <a:ext cx="2194560" cy="1097280"/>
-          </a:xfrm>
-          <a:prstGeom prst="rect">
-            <a:avLst/>
-          </a:prstGeom>
-          <a:noFill/>
-          <a:ln/>
-        </p:spPr>
-        <p:txBody>
-          <a:bodyPr wrap="square" lIns="0" tIns="0" rIns="0" bIns="0" rtlCol="0" anchor="ctr"/>
-          <a:lstStyle/>
-          <a:p>
-            <a:pPr algn="ctr" indent="0" marL="0">
-              <a:buNone/>
-            </a:pPr>
-            <a:r>
-              <a:rPr lang="en-US" sz="1600" dirty="0">
-                <a:solidFill>
-                  <a:srgbClr val="1F2937"/>
-                </a:solidFill>
-                <a:latin typeface="Georgia" pitchFamily="34" charset="0"/>
-                <a:ea typeface="Georgia" pitchFamily="34" charset="-122"/>
-                <a:cs typeface="Georgia" pitchFamily="34" charset="-120"/>
-              </a:rPr>
-              <a:t>IaC / Azure</a:t>
-            </a:r>
-            <a:endParaRPr lang="en-US" sz="1600" dirty="0"/>
-          </a:p>
-        </p:txBody>
+          <p:cNvPr id="12" name="Shape 9"/>
+          <p:cNvSpPr/>
+          <p:nvPr/>
+        </p:nvSpPr>
+        <p:spPr>
+          <a:xfrm>
+            <a:off x="4338218" y="1828800"/>
+            <a:ext cx="3515258" cy="91440"/>
+          </a:xfrm>
+          <a:prstGeom prst="rect">
+            <a:avLst/>
+          </a:prstGeom>
+          <a:solidFill>
+            <a:srgbClr val="F59E0B"/>
+          </a:solidFill>
+          <a:ln w="12700">
+            <a:solidFill>
+              <a:srgbClr val="F59E0B"/>
+            </a:solidFill>
+            <a:prstDash val="solid"/>
+          </a:ln>
+        </p:spPr>
       </p:sp>
       <p:pic>
         <p:nvPicPr>
-          <p:cNvPr id="14" name="Image 2" descr="preencoded.png">    </p:cNvPr>
+          <p:cNvPr id="13" name="Image 1" descr="preencoded.png">    </p:cNvPr>
           <p:cNvPicPr>
             <a:picLocks noChangeAspect="1"/>
           </p:cNvPicPr>
           <p:nvPr/>
         </p:nvPicPr>
         <p:blipFill>
-          <a:blip r:embed="rId3"/>
+          <a:blip r:embed="rId2"/>
           <a:stretch>
             <a:fillRect/>
           </a:stretch>
         </p:blipFill>
         <p:spPr>
           <a:xfrm>
-            <a:off x="8633308" y="2400300"/>
-            <a:ext cx="320040" cy="320040"/>
+            <a:off x="4703978" y="2240280"/>
+            <a:ext cx="640080" cy="640080"/>
           </a:xfrm>
           <a:prstGeom prst="rect">
             <a:avLst/>
@@ -2736,14 +2681,92 @@
       </p:pic>
       <p:sp>
         <p:nvSpPr>
-          <p:cNvPr id="15" name="Shape 10"/>
-          <p:cNvSpPr/>
-          <p:nvPr/>
-        </p:nvSpPr>
-        <p:spPr>
-          <a:xfrm>
-            <a:off x="9044788" y="2011680"/>
-            <a:ext cx="2194560" cy="1097280"/>
+          <p:cNvPr id="14" name="Text 10"/>
+          <p:cNvSpPr/>
+          <p:nvPr/>
+        </p:nvSpPr>
+        <p:spPr>
+          <a:xfrm>
+            <a:off x="4703978" y="3017520"/>
+            <a:ext cx="2783738" cy="822960"/>
+          </a:xfrm>
+          <a:prstGeom prst="rect">
+            <a:avLst/>
+          </a:prstGeom>
+          <a:noFill/>
+          <a:ln/>
+        </p:spPr>
+        <p:txBody>
+          <a:bodyPr wrap="square" lIns="0" tIns="0" rIns="0" bIns="0" rtlCol="0" anchor="t"/>
+          <a:lstStyle/>
+          <a:p>
+            <a:pPr algn="l" indent="0" marL="0">
+              <a:buNone/>
+            </a:pPr>
+            <a:r>
+              <a:rPr lang="en-US" sz="2000" b="1" dirty="0">
+                <a:solidFill>
+                  <a:srgbClr val="2F3E46"/>
+                </a:solidFill>
+                <a:latin typeface="Georgia" pitchFamily="34" charset="0"/>
+                <a:ea typeface="Georgia" pitchFamily="34" charset="-122"/>
+                <a:cs typeface="Georgia" pitchFamily="34" charset="-120"/>
+              </a:rPr>
+              <a:t>IaC-safe execution</a:t>
+            </a:r>
+            <a:endParaRPr lang="en-US" sz="2000" dirty="0"/>
+          </a:p>
+        </p:txBody>
+      </p:sp>
+      <p:sp>
+        <p:nvSpPr>
+          <p:cNvPr id="15" name="Text 11"/>
+          <p:cNvSpPr/>
+          <p:nvPr/>
+        </p:nvSpPr>
+        <p:spPr>
+          <a:xfrm>
+            <a:off x="4703978" y="3886200"/>
+            <a:ext cx="2783738" cy="1920240"/>
+          </a:xfrm>
+          <a:prstGeom prst="rect">
+            <a:avLst/>
+          </a:prstGeom>
+          <a:noFill/>
+          <a:ln/>
+        </p:spPr>
+        <p:txBody>
+          <a:bodyPr wrap="square" lIns="0" tIns="0" rIns="0" bIns="0" rtlCol="0" anchor="t"/>
+          <a:lstStyle/>
+          <a:p>
+            <a:pPr algn="l" indent="0" marL="0">
+              <a:buNone/>
+            </a:pPr>
+            <a:r>
+              <a:rPr lang="en-US" sz="1400" dirty="0">
+                <a:solidFill>
+                  <a:srgbClr val="1F2937"/>
+                </a:solidFill>
+                <a:latin typeface="Calibri" pitchFamily="34" charset="0"/>
+                <a:ea typeface="Calibri" pitchFamily="34" charset="-122"/>
+                <a:cs typeface="Calibri" pitchFamily="34" charset="-120"/>
+              </a:rPr>
+              <a:t>Approved changes do not execute directly on Azure — Terraform would revert them. They open a pull request against the IaC repo. Governance decides; Terraform executes; humans merge.</a:t>
+            </a:r>
+            <a:endParaRPr lang="en-US" sz="1400" dirty="0"/>
+          </a:p>
+        </p:txBody>
+      </p:sp>
+      <p:sp>
+        <p:nvSpPr>
+          <p:cNvPr id="16" name="Shape 12"/>
+          <p:cNvSpPr/>
+          <p:nvPr/>
+        </p:nvSpPr>
+        <p:spPr>
+          <a:xfrm>
+            <a:off x="8127797" y="1828800"/>
+            <a:ext cx="3515258" cy="4114800"/>
           </a:xfrm>
           <a:prstGeom prst="rect">
             <a:avLst/>
@@ -2761,92 +2784,102 @@
       </p:sp>
       <p:sp>
         <p:nvSpPr>
-          <p:cNvPr id="16" name="Text 11"/>
-          <p:cNvSpPr/>
-          <p:nvPr/>
-        </p:nvSpPr>
-        <p:spPr>
-          <a:xfrm>
-            <a:off x="9044788" y="2011680"/>
-            <a:ext cx="2194560" cy="1097280"/>
-          </a:xfrm>
-          <a:prstGeom prst="rect">
-            <a:avLst/>
-          </a:prstGeom>
-          <a:noFill/>
-          <a:ln/>
-        </p:spPr>
-        <p:txBody>
-          <a:bodyPr wrap="square" lIns="0" tIns="0" rIns="0" bIns="0" rtlCol="0" anchor="ctr"/>
-          <a:lstStyle/>
-          <a:p>
-            <a:pPr algn="ctr" indent="0" marL="0">
-              <a:buNone/>
-            </a:pPr>
-            <a:r>
-              <a:rPr lang="en-US" sz="1600" dirty="0">
-                <a:solidFill>
-                  <a:srgbClr val="1F2937"/>
+          <p:cNvPr id="17" name="Shape 13"/>
+          <p:cNvSpPr/>
+          <p:nvPr/>
+        </p:nvSpPr>
+        <p:spPr>
+          <a:xfrm>
+            <a:off x="8127797" y="1828800"/>
+            <a:ext cx="3515258" cy="91440"/>
+          </a:xfrm>
+          <a:prstGeom prst="rect">
+            <a:avLst/>
+          </a:prstGeom>
+          <a:solidFill>
+            <a:srgbClr val="F59E0B"/>
+          </a:solidFill>
+          <a:ln w="12700">
+            <a:solidFill>
+              <a:srgbClr val="F59E0B"/>
+            </a:solidFill>
+            <a:prstDash val="solid"/>
+          </a:ln>
+        </p:spPr>
+      </p:sp>
+      <p:pic>
+        <p:nvPicPr>
+          <p:cNvPr id="18" name="Image 2" descr="preencoded.png">    </p:cNvPr>
+          <p:cNvPicPr>
+            <a:picLocks noChangeAspect="1"/>
+          </p:cNvPicPr>
+          <p:nvPr/>
+        </p:nvPicPr>
+        <p:blipFill>
+          <a:blip r:embed="rId3"/>
+          <a:stretch>
+            <a:fillRect/>
+          </a:stretch>
+        </p:blipFill>
+        <p:spPr>
+          <a:xfrm>
+            <a:off x="8493557" y="2240280"/>
+            <a:ext cx="640080" cy="640080"/>
+          </a:xfrm>
+          <a:prstGeom prst="rect">
+            <a:avLst/>
+          </a:prstGeom>
+        </p:spPr>
+      </p:pic>
+      <p:sp>
+        <p:nvSpPr>
+          <p:cNvPr id="19" name="Text 14"/>
+          <p:cNvSpPr/>
+          <p:nvPr/>
+        </p:nvSpPr>
+        <p:spPr>
+          <a:xfrm>
+            <a:off x="8493557" y="3017520"/>
+            <a:ext cx="2783738" cy="822960"/>
+          </a:xfrm>
+          <a:prstGeom prst="rect">
+            <a:avLst/>
+          </a:prstGeom>
+          <a:noFill/>
+          <a:ln/>
+        </p:spPr>
+        <p:txBody>
+          <a:bodyPr wrap="square" lIns="0" tIns="0" rIns="0" bIns="0" rtlCol="0" anchor="t"/>
+          <a:lstStyle/>
+          <a:p>
+            <a:pPr algn="l" indent="0" marL="0">
+              <a:buNone/>
+            </a:pPr>
+            <a:r>
+              <a:rPr lang="en-US" sz="2000" b="1" dirty="0">
+                <a:solidFill>
+                  <a:srgbClr val="2F3E46"/>
                 </a:solidFill>
                 <a:latin typeface="Georgia" pitchFamily="34" charset="0"/>
                 <a:ea typeface="Georgia" pitchFamily="34" charset="-122"/>
                 <a:cs typeface="Georgia" pitchFamily="34" charset="-120"/>
               </a:rPr>
-              <a:t>Change applied</a:t>
-            </a:r>
-            <a:endParaRPr lang="en-US" sz="1600" dirty="0"/>
-          </a:p>
-        </p:txBody>
-      </p:sp>
-      <p:sp>
-        <p:nvSpPr>
-          <p:cNvPr id="17" name="Text 12"/>
-          <p:cNvSpPr/>
-          <p:nvPr/>
-        </p:nvSpPr>
-        <p:spPr>
-          <a:xfrm>
-            <a:off x="548640" y="3840480"/>
-            <a:ext cx="5364328" cy="365760"/>
-          </a:xfrm>
-          <a:prstGeom prst="rect">
-            <a:avLst/>
-          </a:prstGeom>
-          <a:noFill/>
-          <a:ln/>
-        </p:spPr>
-        <p:txBody>
-          <a:bodyPr wrap="square" lIns="0" tIns="0" rIns="0" bIns="0" rtlCol="0" anchor="ctr"/>
-          <a:lstStyle/>
-          <a:p>
-            <a:pPr indent="0" marL="0">
-              <a:buNone/>
-            </a:pPr>
-            <a:r>
-              <a:rPr lang="en-US" sz="1600" b="1" dirty="0">
-                <a:solidFill>
-                  <a:srgbClr val="2F3E46"/>
-                </a:solidFill>
-                <a:latin typeface="Georgia" pitchFamily="34" charset="0"/>
-                <a:ea typeface="Georgia" pitchFamily="34" charset="-122"/>
-                <a:cs typeface="Georgia" pitchFamily="34" charset="-120"/>
-              </a:rPr>
-              <a:t>Complements, does not replace</a:t>
-            </a:r>
-            <a:endParaRPr lang="en-US" sz="1600" dirty="0"/>
-          </a:p>
-        </p:txBody>
-      </p:sp>
-      <p:sp>
-        <p:nvSpPr>
-          <p:cNvPr id="18" name="Text 13"/>
-          <p:cNvSpPr/>
-          <p:nvPr/>
-        </p:nvSpPr>
-        <p:spPr>
-          <a:xfrm>
-            <a:off x="548640" y="4297680"/>
-            <a:ext cx="5364328" cy="1737360"/>
+              <a:t>Audit by default</a:t>
+            </a:r>
+            <a:endParaRPr lang="en-US" sz="2000" dirty="0"/>
+          </a:p>
+        </p:txBody>
+      </p:sp>
+      <p:sp>
+        <p:nvSpPr>
+          <p:cNvPr id="20" name="Text 15"/>
+          <p:cNvSpPr/>
+          <p:nvPr/>
+        </p:nvSpPr>
+        <p:spPr>
+          <a:xfrm>
+            <a:off x="8493557" y="3886200"/>
+            <a:ext cx="2783738" cy="1920240"/>
           </a:xfrm>
           <a:prstGeom prst="rect">
             <a:avLst/>
@@ -2859,13 +2892,10 @@
           <a:lstStyle/>
           <a:p>
             <a:pPr algn="l" indent="0" marL="0">
-              <a:spcAft>
-                <a:spcPts val="600"/>
-              </a:spcAft>
-              <a:buNone/>
-            </a:pPr>
-            <a:r>
-              <a:rPr lang="en-US" sz="1300" b="1" dirty="0">
+              <a:buNone/>
+            </a:pPr>
+            <a:r>
+              <a:rPr lang="en-US" sz="1400" dirty="0">
                 <a:solidFill>
                   <a:srgbClr val="1F2937"/>
                 </a:solidFill>
@@ -2873,261 +2903,9 @@
                 <a:ea typeface="Calibri" pitchFamily="34" charset="-122"/>
                 <a:cs typeface="Calibri" pitchFamily="34" charset="-120"/>
               </a:rPr>
-              <a:t>Azure Policy, Defender, Advisor </a:t>
-            </a:r>
-            <a:pPr algn="l" indent="0" marL="0">
-              <a:spcAft>
-                <a:spcPts val="600"/>
-              </a:spcAft>
-              <a:buNone/>
-            </a:pPr>
-            <a:r>
-              <a:rPr lang="en-US" sz="1300" dirty="0">
-                <a:solidFill>
-                  <a:srgbClr val="1F2937"/>
-                </a:solidFill>
-                <a:latin typeface="Calibri" pitchFamily="34" charset="0"/>
-                <a:ea typeface="Calibri" pitchFamily="34" charset="-122"/>
-                <a:cs typeface="Calibri" pitchFamily="34" charset="-120"/>
-              </a:rPr>
-              <a:t>— signal sources, not decision layers</a:t>
-            </a:r>
-            <a:endParaRPr lang="en-US" sz="1300" dirty="0"/>
-          </a:p>
-          <a:p>
-            <a:pPr algn="l" indent="0" marL="0">
-              <a:spcAft>
-                <a:spcPts val="600"/>
-              </a:spcAft>
-              <a:buNone/>
-            </a:pPr>
-            <a:r>
-              <a:rPr lang="en-US" sz="1300" b="1" dirty="0">
-                <a:solidFill>
-                  <a:srgbClr val="1F2937"/>
-                </a:solidFill>
-                <a:latin typeface="Calibri" pitchFamily="34" charset="0"/>
-                <a:ea typeface="Calibri" pitchFamily="34" charset="-122"/>
-                <a:cs typeface="Calibri" pitchFamily="34" charset="-120"/>
-              </a:rPr>
-              <a:t>CI / CD pipelines </a:t>
-            </a:r>
-            <a:pPr algn="l" indent="0" marL="0">
-              <a:spcAft>
-                <a:spcPts val="600"/>
-              </a:spcAft>
-              <a:buNone/>
-            </a:pPr>
-            <a:r>
-              <a:rPr lang="en-US" sz="1300" dirty="0">
-                <a:solidFill>
-                  <a:srgbClr val="1F2937"/>
-                </a:solidFill>
-                <a:latin typeface="Calibri" pitchFamily="34" charset="0"/>
-                <a:ea typeface="Calibri" pitchFamily="34" charset="-122"/>
-                <a:cs typeface="Calibri" pitchFamily="34" charset="-120"/>
-              </a:rPr>
-              <a:t>— RuriSkry triggers the PR, CI / CD runs it</a:t>
-            </a:r>
-            <a:endParaRPr lang="en-US" sz="1300" dirty="0"/>
-          </a:p>
-          <a:p>
-            <a:pPr algn="l" indent="0" marL="0">
-              <a:spcAft>
-                <a:spcPts val="600"/>
-              </a:spcAft>
-              <a:buNone/>
-            </a:pPr>
-            <a:r>
-              <a:rPr lang="en-US" sz="1300" b="1" dirty="0">
-                <a:solidFill>
-                  <a:srgbClr val="1F2937"/>
-                </a:solidFill>
-                <a:latin typeface="Calibri" pitchFamily="34" charset="0"/>
-                <a:ea typeface="Calibri" pitchFamily="34" charset="-122"/>
-                <a:cs typeface="Calibri" pitchFamily="34" charset="-120"/>
-              </a:rPr>
-              <a:t>Existing human CAB </a:t>
-            </a:r>
-            <a:pPr algn="l" indent="0" marL="0">
-              <a:spcAft>
-                <a:spcPts val="600"/>
-              </a:spcAft>
-              <a:buNone/>
-            </a:pPr>
-            <a:r>
-              <a:rPr lang="en-US" sz="1300" dirty="0">
-                <a:solidFill>
-                  <a:srgbClr val="1F2937"/>
-                </a:solidFill>
-                <a:latin typeface="Calibri" pitchFamily="34" charset="0"/>
-                <a:ea typeface="Calibri" pitchFamily="34" charset="-122"/>
-                <a:cs typeface="Calibri" pitchFamily="34" charset="-120"/>
-              </a:rPr>
-              <a:t>— handles the subset humans don't have bandwidth for</a:t>
-            </a:r>
-            <a:endParaRPr lang="en-US" sz="1300" dirty="0"/>
-          </a:p>
-        </p:txBody>
-      </p:sp>
-      <p:sp>
-        <p:nvSpPr>
-          <p:cNvPr id="19" name="Text 14"/>
-          <p:cNvSpPr/>
-          <p:nvPr/>
-        </p:nvSpPr>
-        <p:spPr>
-          <a:xfrm>
-            <a:off x="6278728" y="3840480"/>
-            <a:ext cx="5364328" cy="365760"/>
-          </a:xfrm>
-          <a:prstGeom prst="rect">
-            <a:avLst/>
-          </a:prstGeom>
-          <a:noFill/>
-          <a:ln/>
-        </p:spPr>
-        <p:txBody>
-          <a:bodyPr wrap="square" lIns="0" tIns="0" rIns="0" bIns="0" rtlCol="0" anchor="ctr"/>
-          <a:lstStyle/>
-          <a:p>
-            <a:pPr indent="0" marL="0">
-              <a:buNone/>
-            </a:pPr>
-            <a:r>
-              <a:rPr lang="en-US" sz="1600" b="1" dirty="0">
-                <a:solidFill>
-                  <a:srgbClr val="2F3E46"/>
-                </a:solidFill>
-                <a:latin typeface="Georgia" pitchFamily="34" charset="0"/>
-                <a:ea typeface="Georgia" pitchFamily="34" charset="-122"/>
-                <a:cs typeface="Georgia" pitchFamily="34" charset="-120"/>
-              </a:rPr>
-              <a:t>Does not replace</a:t>
-            </a:r>
-            <a:endParaRPr lang="en-US" sz="1600" dirty="0"/>
-          </a:p>
-        </p:txBody>
-      </p:sp>
-      <p:sp>
-        <p:nvSpPr>
-          <p:cNvPr id="20" name="Text 15"/>
-          <p:cNvSpPr/>
-          <p:nvPr/>
-        </p:nvSpPr>
-        <p:spPr>
-          <a:xfrm>
-            <a:off x="6278728" y="4297680"/>
-            <a:ext cx="5364328" cy="1737360"/>
-          </a:xfrm>
-          <a:prstGeom prst="rect">
-            <a:avLst/>
-          </a:prstGeom>
-          <a:noFill/>
-          <a:ln/>
-        </p:spPr>
-        <p:txBody>
-          <a:bodyPr wrap="square" lIns="0" tIns="0" rIns="0" bIns="0" rtlCol="0" anchor="t"/>
-          <a:lstStyle/>
-          <a:p>
-            <a:pPr algn="l" indent="0" marL="0">
-              <a:spcAft>
-                <a:spcPts val="600"/>
-              </a:spcAft>
-              <a:buNone/>
-            </a:pPr>
-            <a:r>
-              <a:rPr lang="en-US" sz="1300" dirty="0">
-                <a:solidFill>
-                  <a:srgbClr val="1F2937"/>
-                </a:solidFill>
-                <a:latin typeface="Calibri" pitchFamily="34" charset="0"/>
-                <a:ea typeface="Calibri" pitchFamily="34" charset="-122"/>
-                <a:cs typeface="Calibri" pitchFamily="34" charset="-120"/>
-              </a:rPr>
-              <a:t>Identity and access management (IAM)</a:t>
-            </a:r>
-            <a:endParaRPr lang="en-US" sz="1300" dirty="0"/>
-          </a:p>
-          <a:p>
-            <a:pPr algn="l" indent="0" marL="0">
-              <a:spcAft>
-                <a:spcPts val="600"/>
-              </a:spcAft>
-              <a:buNone/>
-            </a:pPr>
-            <a:r>
-              <a:rPr lang="en-US" sz="400" dirty="0">
-                <a:solidFill>
-                  <a:srgbClr val="1F2937"/>
-                </a:solidFill>
-                <a:latin typeface="Calibri" pitchFamily="34" charset="0"/>
-                <a:ea typeface="Calibri" pitchFamily="34" charset="-122"/>
-                <a:cs typeface="Calibri" pitchFamily="34" charset="-120"/>
-              </a:rPr>
-              <a:t> </a:t>
-            </a:r>
-            <a:endParaRPr lang="en-US" sz="1300" dirty="0"/>
-          </a:p>
-          <a:p>
-            <a:pPr algn="l" indent="0" marL="0">
-              <a:spcAft>
-                <a:spcPts val="600"/>
-              </a:spcAft>
-              <a:buNone/>
-            </a:pPr>
-            <a:r>
-              <a:rPr lang="en-US" sz="1300" dirty="0">
-                <a:solidFill>
-                  <a:srgbClr val="1F2937"/>
-                </a:solidFill>
-                <a:latin typeface="Calibri" pitchFamily="34" charset="0"/>
-                <a:ea typeface="Calibri" pitchFamily="34" charset="-122"/>
-                <a:cs typeface="Calibri" pitchFamily="34" charset="-120"/>
-              </a:rPr>
-              <a:t>Your IaC tool of choice (Terraform, Bicep)</a:t>
-            </a:r>
-            <a:endParaRPr lang="en-US" sz="1300" dirty="0"/>
-          </a:p>
-          <a:p>
-            <a:pPr algn="l" indent="0" marL="0">
-              <a:spcAft>
-                <a:spcPts val="600"/>
-              </a:spcAft>
-              <a:buNone/>
-            </a:pPr>
-            <a:r>
-              <a:rPr lang="en-US" sz="400" dirty="0">
-                <a:solidFill>
-                  <a:srgbClr val="1F2937"/>
-                </a:solidFill>
-                <a:latin typeface="Calibri" pitchFamily="34" charset="0"/>
-                <a:ea typeface="Calibri" pitchFamily="34" charset="-122"/>
-                <a:cs typeface="Calibri" pitchFamily="34" charset="-120"/>
-              </a:rPr>
-              <a:t> </a:t>
-            </a:r>
-            <a:endParaRPr lang="en-US" sz="1300" dirty="0"/>
-          </a:p>
-          <a:p>
-            <a:pPr algn="l" indent="0" marL="0">
-              <a:spcAft>
-                <a:spcPts val="600"/>
-              </a:spcAft>
-              <a:buNone/>
-            </a:pPr>
-            <a:r>
-              <a:rPr lang="en-US" sz="1300" dirty="0">
-                <a:solidFill>
-                  <a:srgbClr val="1F2937"/>
-                </a:solidFill>
-                <a:latin typeface="Calibri" pitchFamily="34" charset="0"/>
-                <a:ea typeface="Calibri" pitchFamily="34" charset="-122"/>
-                <a:cs typeface="Calibri" pitchFamily="34" charset="-120"/>
-              </a:rPr>
-              <a:t>Your existing change management process</a:t>
-            </a:r>
-            <a:endParaRPr lang="en-US" sz="1300" dirty="0"/>
+              <a:t>Every verdict, every score adjustment, every human approval — persisted to Cosmos DB. Counterfactual analysis on every decision: what would change this outcome?</a:t>
+            </a:r>
+            <a:endParaRPr lang="en-US" sz="1400" dirty="0"/>
           </a:p>
         </p:txBody>
       </p:sp>
@@ -3221,7 +2999,7 @@
                 <a:ea typeface="Georgia" pitchFamily="34" charset="-122"/>
                 <a:cs typeface="Georgia" pitchFamily="34" charset="-120"/>
               </a:rPr>
-              <a:t>Why this matters to the business</a:t>
+              <a:t>Where it fits in an enterprise stack</a:t>
             </a:r>
             <a:endParaRPr lang="en-US" sz="3600" dirty="0"/>
           </a:p>
@@ -3313,8 +3091,8 @@
         </p:nvSpPr>
         <p:spPr>
           <a:xfrm>
-            <a:off x="548640" y="1737360"/>
-            <a:ext cx="11094415" cy="822960"/>
+            <a:off x="952348" y="2011680"/>
+            <a:ext cx="2194560" cy="1097280"/>
           </a:xfrm>
           <a:prstGeom prst="rect">
             <a:avLst/>
@@ -3332,16 +3110,79 @@
       </p:sp>
       <p:sp>
         <p:nvSpPr>
-          <p:cNvPr id="7" name="Shape 5"/>
-          <p:cNvSpPr/>
-          <p:nvPr/>
-        </p:nvSpPr>
-        <p:spPr>
-          <a:xfrm>
-            <a:off x="731520" y="1874520"/>
-            <a:ext cx="548640" cy="548640"/>
-          </a:xfrm>
-          <a:prstGeom prst="ellipse">
+          <p:cNvPr id="7" name="Text 5"/>
+          <p:cNvSpPr/>
+          <p:nvPr/>
+        </p:nvSpPr>
+        <p:spPr>
+          <a:xfrm>
+            <a:off x="952348" y="2011680"/>
+            <a:ext cx="2194560" cy="1097280"/>
+          </a:xfrm>
+          <a:prstGeom prst="rect">
+            <a:avLst/>
+          </a:prstGeom>
+          <a:noFill/>
+          <a:ln/>
+        </p:spPr>
+        <p:txBody>
+          <a:bodyPr wrap="square" lIns="0" tIns="0" rIns="0" bIns="0" rtlCol="0" anchor="ctr"/>
+          <a:lstStyle/>
+          <a:p>
+            <a:pPr algn="ctr" indent="0" marL="0">
+              <a:buNone/>
+            </a:pPr>
+            <a:r>
+              <a:rPr lang="en-US" sz="1600" dirty="0">
+                <a:solidFill>
+                  <a:srgbClr val="1F2937"/>
+                </a:solidFill>
+                <a:latin typeface="Georgia" pitchFamily="34" charset="0"/>
+                <a:ea typeface="Georgia" pitchFamily="34" charset="-122"/>
+                <a:cs typeface="Georgia" pitchFamily="34" charset="-120"/>
+              </a:rPr>
+              <a:t>Ops Agent</a:t>
+            </a:r>
+            <a:endParaRPr lang="en-US" sz="1600" dirty="0"/>
+          </a:p>
+        </p:txBody>
+      </p:sp>
+      <p:pic>
+        <p:nvPicPr>
+          <p:cNvPr id="8" name="Image 0" descr="preencoded.png">    </p:cNvPr>
+          <p:cNvPicPr>
+            <a:picLocks noChangeAspect="1"/>
+          </p:cNvPicPr>
+          <p:nvPr/>
+        </p:nvPicPr>
+        <p:blipFill>
+          <a:blip r:embed="rId1"/>
+          <a:stretch>
+            <a:fillRect/>
+          </a:stretch>
+        </p:blipFill>
+        <p:spPr>
+          <a:xfrm>
+            <a:off x="3238348" y="2400300"/>
+            <a:ext cx="320040" cy="320040"/>
+          </a:xfrm>
+          <a:prstGeom prst="rect">
+            <a:avLst/>
+          </a:prstGeom>
+        </p:spPr>
+      </p:pic>
+      <p:sp>
+        <p:nvSpPr>
+          <p:cNvPr id="9" name="Shape 6"/>
+          <p:cNvSpPr/>
+          <p:nvPr/>
+        </p:nvSpPr>
+        <p:spPr>
+          <a:xfrm>
+            <a:off x="3649828" y="2011680"/>
+            <a:ext cx="2194560" cy="1097280"/>
+          </a:xfrm>
+          <a:prstGeom prst="rect">
             <a:avLst/>
           </a:prstGeom>
           <a:solidFill>
@@ -3355,40 +3196,16 @@
           </a:ln>
         </p:spPr>
       </p:sp>
-      <p:pic>
-        <p:nvPicPr>
-          <p:cNvPr id="8" name="Image 0" descr="preencoded.png">    </p:cNvPr>
-          <p:cNvPicPr>
-            <a:picLocks noChangeAspect="1"/>
-          </p:cNvPicPr>
-          <p:nvPr/>
-        </p:nvPicPr>
-        <p:blipFill>
-          <a:blip r:embed="rId1"/>
-          <a:stretch>
-            <a:fillRect/>
-          </a:stretch>
-        </p:blipFill>
-        <p:spPr>
-          <a:xfrm>
-            <a:off x="822960" y="1965960"/>
-            <a:ext cx="365760" cy="365760"/>
-          </a:xfrm>
-          <a:prstGeom prst="rect">
-            <a:avLst/>
-          </a:prstGeom>
-        </p:spPr>
-      </p:pic>
-      <p:sp>
-        <p:nvSpPr>
-          <p:cNvPr id="9" name="Text 6"/>
-          <p:cNvSpPr/>
-          <p:nvPr/>
-        </p:nvSpPr>
-        <p:spPr>
-          <a:xfrm>
-            <a:off x="1463040" y="1737360"/>
-            <a:ext cx="4389120" cy="822960"/>
+      <p:sp>
+        <p:nvSpPr>
+          <p:cNvPr id="10" name="Text 7"/>
+          <p:cNvSpPr/>
+          <p:nvPr/>
+        </p:nvSpPr>
+        <p:spPr>
+          <a:xfrm>
+            <a:off x="3649828" y="2011680"/>
+            <a:ext cx="2194560" cy="1097280"/>
           </a:xfrm>
           <a:prstGeom prst="rect">
             <a:avLst/>
@@ -3400,116 +3217,44 @@
           <a:bodyPr wrap="square" lIns="0" tIns="0" rIns="0" bIns="0" rtlCol="0" anchor="ctr"/>
           <a:lstStyle/>
           <a:p>
-            <a:pPr algn="l" indent="0" marL="0">
-              <a:buNone/>
-            </a:pPr>
-            <a:r>
-              <a:rPr lang="en-US" sz="1600" b="1" dirty="0">
-                <a:solidFill>
-                  <a:srgbClr val="2F3E46"/>
+            <a:pPr algn="ctr" indent="0" marL="0">
+              <a:buNone/>
+            </a:pPr>
+            <a:r>
+              <a:rPr lang="en-US" sz="1800" b="1" dirty="0">
+                <a:solidFill>
+                  <a:srgbClr val="FFFFFF"/>
                 </a:solidFill>
                 <a:latin typeface="Georgia" pitchFamily="34" charset="0"/>
                 <a:ea typeface="Georgia" pitchFamily="34" charset="-122"/>
                 <a:cs typeface="Georgia" pitchFamily="34" charset="-120"/>
               </a:rPr>
-              <a:t>Containment of AI-driven incidents</a:t>
-            </a:r>
-            <a:endParaRPr lang="en-US" sz="1600" dirty="0"/>
-          </a:p>
-        </p:txBody>
-      </p:sp>
-      <p:sp>
-        <p:nvSpPr>
-          <p:cNvPr id="10" name="Text 7"/>
-          <p:cNvSpPr/>
-          <p:nvPr/>
-        </p:nvSpPr>
-        <p:spPr>
-          <a:xfrm>
-            <a:off x="5943600" y="1737360"/>
-            <a:ext cx="5516575" cy="822960"/>
-          </a:xfrm>
-          <a:prstGeom prst="rect">
-            <a:avLst/>
-          </a:prstGeom>
-          <a:noFill/>
-          <a:ln/>
-        </p:spPr>
-        <p:txBody>
-          <a:bodyPr wrap="square" lIns="0" tIns="0" rIns="0" bIns="0" rtlCol="0" anchor="ctr"/>
-          <a:lstStyle/>
-          <a:p>
-            <a:pPr algn="l" indent="0" marL="0">
-              <a:buNone/>
-            </a:pPr>
-            <a:r>
-              <a:rPr lang="en-US" sz="1300" dirty="0">
-                <a:solidFill>
-                  <a:srgbClr val="1F2937"/>
-                </a:solidFill>
-                <a:latin typeface="Calibri" pitchFamily="34" charset="0"/>
-                <a:ea typeface="Calibri" pitchFamily="34" charset="-122"/>
-                <a:cs typeface="Calibri" pitchFamily="34" charset="-120"/>
-              </a:rPr>
-              <a:t>Every agent action pre-scored before it reaches Azure.</a:t>
-            </a:r>
-            <a:endParaRPr lang="en-US" sz="1300" dirty="0"/>
-          </a:p>
-        </p:txBody>
-      </p:sp>
-      <p:sp>
-        <p:nvSpPr>
-          <p:cNvPr id="11" name="Shape 8"/>
-          <p:cNvSpPr/>
-          <p:nvPr/>
-        </p:nvSpPr>
-        <p:spPr>
-          <a:xfrm>
-            <a:off x="548640" y="2651760"/>
-            <a:ext cx="11094415" cy="822960"/>
-          </a:xfrm>
-          <a:prstGeom prst="rect">
-            <a:avLst/>
-          </a:prstGeom>
-          <a:solidFill>
-            <a:srgbClr val="F7F7F5"/>
-          </a:solidFill>
-          <a:ln w="12700">
-            <a:solidFill>
-              <a:srgbClr val="E9E9E4"/>
-            </a:solidFill>
-            <a:prstDash val="solid"/>
-          </a:ln>
-        </p:spPr>
-      </p:sp>
-      <p:sp>
-        <p:nvSpPr>
-          <p:cNvPr id="12" name="Shape 9"/>
-          <p:cNvSpPr/>
-          <p:nvPr/>
-        </p:nvSpPr>
-        <p:spPr>
-          <a:xfrm>
-            <a:off x="731520" y="2788920"/>
-            <a:ext cx="548640" cy="548640"/>
-          </a:xfrm>
-          <a:prstGeom prst="ellipse">
-            <a:avLst/>
-          </a:prstGeom>
-          <a:solidFill>
-            <a:srgbClr val="2F3E46"/>
-          </a:solidFill>
-          <a:ln w="12700">
-            <a:solidFill>
-              <a:srgbClr val="2F3E46"/>
-            </a:solidFill>
-            <a:prstDash val="solid"/>
-          </a:ln>
-        </p:spPr>
+              <a:t>RuriSkry</a:t>
+            </a:r>
+            <a:endParaRPr lang="en-US" sz="1800" dirty="0"/>
+          </a:p>
+          <a:p>
+            <a:pPr algn="ctr" indent="0" marL="0">
+              <a:buNone/>
+            </a:pPr>
+            <a:r>
+              <a:rPr lang="en-US" sz="1800" b="1" dirty="0">
+                <a:solidFill>
+                  <a:srgbClr val="FFFFFF"/>
+                </a:solidFill>
+                <a:latin typeface="Georgia" pitchFamily="34" charset="0"/>
+                <a:ea typeface="Georgia" pitchFamily="34" charset="-122"/>
+                <a:cs typeface="Georgia" pitchFamily="34" charset="-120"/>
+              </a:rPr>
+              <a:t>governance</a:t>
+            </a:r>
+            <a:endParaRPr lang="en-US" sz="1800" dirty="0"/>
+          </a:p>
+        </p:txBody>
       </p:sp>
       <p:pic>
         <p:nvPicPr>
-          <p:cNvPr id="13" name="Image 1" descr="preencoded.png">    </p:cNvPr>
+          <p:cNvPr id="11" name="Image 1" descr="preencoded.png">    </p:cNvPr>
           <p:cNvPicPr>
             <a:picLocks noChangeAspect="1"/>
           </p:cNvPicPr>
@@ -3523,8 +3268,8 @@
         </p:blipFill>
         <p:spPr>
           <a:xfrm>
-            <a:off x="822960" y="2880360"/>
-            <a:ext cx="365760" cy="365760"/>
+            <a:off x="5935828" y="2400300"/>
+            <a:ext cx="320040" cy="320040"/>
           </a:xfrm>
           <a:prstGeom prst="rect">
             <a:avLst/>
@@ -3533,92 +3278,14 @@
       </p:pic>
       <p:sp>
         <p:nvSpPr>
-          <p:cNvPr id="14" name="Text 10"/>
-          <p:cNvSpPr/>
-          <p:nvPr/>
-        </p:nvSpPr>
-        <p:spPr>
-          <a:xfrm>
-            <a:off x="1463040" y="2651760"/>
-            <a:ext cx="4389120" cy="822960"/>
-          </a:xfrm>
-          <a:prstGeom prst="rect">
-            <a:avLst/>
-          </a:prstGeom>
-          <a:noFill/>
-          <a:ln/>
-        </p:spPr>
-        <p:txBody>
-          <a:bodyPr wrap="square" lIns="0" tIns="0" rIns="0" bIns="0" rtlCol="0" anchor="ctr"/>
-          <a:lstStyle/>
-          <a:p>
-            <a:pPr algn="l" indent="0" marL="0">
-              <a:buNone/>
-            </a:pPr>
-            <a:r>
-              <a:rPr lang="en-US" sz="1600" b="1" dirty="0">
-                <a:solidFill>
-                  <a:srgbClr val="2F3E46"/>
-                </a:solidFill>
-                <a:latin typeface="Georgia" pitchFamily="34" charset="0"/>
-                <a:ea typeface="Georgia" pitchFamily="34" charset="-122"/>
-                <a:cs typeface="Georgia" pitchFamily="34" charset="-120"/>
-              </a:rPr>
-              <a:t>Audit-ready on day one</a:t>
-            </a:r>
-            <a:endParaRPr lang="en-US" sz="1600" dirty="0"/>
-          </a:p>
-        </p:txBody>
-      </p:sp>
-      <p:sp>
-        <p:nvSpPr>
-          <p:cNvPr id="15" name="Text 11"/>
-          <p:cNvSpPr/>
-          <p:nvPr/>
-        </p:nvSpPr>
-        <p:spPr>
-          <a:xfrm>
-            <a:off x="5943600" y="2651760"/>
-            <a:ext cx="5516575" cy="822960"/>
-          </a:xfrm>
-          <a:prstGeom prst="rect">
-            <a:avLst/>
-          </a:prstGeom>
-          <a:noFill/>
-          <a:ln/>
-        </p:spPr>
-        <p:txBody>
-          <a:bodyPr wrap="square" lIns="0" tIns="0" rIns="0" bIns="0" rtlCol="0" anchor="ctr"/>
-          <a:lstStyle/>
-          <a:p>
-            <a:pPr algn="l" indent="0" marL="0">
-              <a:buNone/>
-            </a:pPr>
-            <a:r>
-              <a:rPr lang="en-US" sz="1300" dirty="0">
-                <a:solidFill>
-                  <a:srgbClr val="1F2937"/>
-                </a:solidFill>
-                <a:latin typeface="Calibri" pitchFamily="34" charset="0"/>
-                <a:ea typeface="Calibri" pitchFamily="34" charset="-122"/>
-                <a:cs typeface="Calibri" pitchFamily="34" charset="-120"/>
-              </a:rPr>
-              <a:t>Cosmos DB lineage — every decision reconstructable from inputs.</a:t>
-            </a:r>
-            <a:endParaRPr lang="en-US" sz="1300" dirty="0"/>
-          </a:p>
-        </p:txBody>
-      </p:sp>
-      <p:sp>
-        <p:nvSpPr>
-          <p:cNvPr id="16" name="Shape 12"/>
-          <p:cNvSpPr/>
-          <p:nvPr/>
-        </p:nvSpPr>
-        <p:spPr>
-          <a:xfrm>
-            <a:off x="548640" y="3566160"/>
-            <a:ext cx="11094415" cy="822960"/>
+          <p:cNvPr id="12" name="Shape 8"/>
+          <p:cNvSpPr/>
+          <p:nvPr/>
+        </p:nvSpPr>
+        <p:spPr>
+          <a:xfrm>
+            <a:off x="6347308" y="2011680"/>
+            <a:ext cx="2194560" cy="1097280"/>
           </a:xfrm>
           <a:prstGeom prst="rect">
             <a:avLst/>
@@ -3636,32 +3303,46 @@
       </p:sp>
       <p:sp>
         <p:nvSpPr>
-          <p:cNvPr id="17" name="Shape 13"/>
-          <p:cNvSpPr/>
-          <p:nvPr/>
-        </p:nvSpPr>
-        <p:spPr>
-          <a:xfrm>
-            <a:off x="731520" y="3703320"/>
-            <a:ext cx="548640" cy="548640"/>
-          </a:xfrm>
-          <a:prstGeom prst="ellipse">
-            <a:avLst/>
-          </a:prstGeom>
-          <a:solidFill>
-            <a:srgbClr val="2F3E46"/>
-          </a:solidFill>
-          <a:ln w="12700">
-            <a:solidFill>
-              <a:srgbClr val="2F3E46"/>
-            </a:solidFill>
-            <a:prstDash val="solid"/>
-          </a:ln>
-        </p:spPr>
+          <p:cNvPr id="13" name="Text 9"/>
+          <p:cNvSpPr/>
+          <p:nvPr/>
+        </p:nvSpPr>
+        <p:spPr>
+          <a:xfrm>
+            <a:off x="6347308" y="2011680"/>
+            <a:ext cx="2194560" cy="1097280"/>
+          </a:xfrm>
+          <a:prstGeom prst="rect">
+            <a:avLst/>
+          </a:prstGeom>
+          <a:noFill/>
+          <a:ln/>
+        </p:spPr>
+        <p:txBody>
+          <a:bodyPr wrap="square" lIns="0" tIns="0" rIns="0" bIns="0" rtlCol="0" anchor="ctr"/>
+          <a:lstStyle/>
+          <a:p>
+            <a:pPr algn="ctr" indent="0" marL="0">
+              <a:buNone/>
+            </a:pPr>
+            <a:r>
+              <a:rPr lang="en-US" sz="1600" dirty="0">
+                <a:solidFill>
+                  <a:srgbClr val="1F2937"/>
+                </a:solidFill>
+                <a:latin typeface="Georgia" pitchFamily="34" charset="0"/>
+                <a:ea typeface="Georgia" pitchFamily="34" charset="-122"/>
+                <a:cs typeface="Georgia" pitchFamily="34" charset="-120"/>
+              </a:rPr>
+              <a:t>IaC / Azure</a:t>
+            </a:r>
+            <a:endParaRPr lang="en-US" sz="1600" dirty="0"/>
+          </a:p>
+        </p:txBody>
       </p:sp>
       <p:pic>
         <p:nvPicPr>
-          <p:cNvPr id="18" name="Image 2" descr="preencoded.png">    </p:cNvPr>
+          <p:cNvPr id="14" name="Image 2" descr="preencoded.png">    </p:cNvPr>
           <p:cNvPicPr>
             <a:picLocks noChangeAspect="1"/>
           </p:cNvPicPr>
@@ -3675,8 +3356,8 @@
         </p:blipFill>
         <p:spPr>
           <a:xfrm>
-            <a:off x="822960" y="3794760"/>
-            <a:ext cx="365760" cy="365760"/>
+            <a:off x="8633308" y="2400300"/>
+            <a:ext cx="320040" cy="320040"/>
           </a:xfrm>
           <a:prstGeom prst="rect">
             <a:avLst/>
@@ -3685,244 +3366,14 @@
       </p:pic>
       <p:sp>
         <p:nvSpPr>
-          <p:cNvPr id="19" name="Text 14"/>
-          <p:cNvSpPr/>
-          <p:nvPr/>
-        </p:nvSpPr>
-        <p:spPr>
-          <a:xfrm>
-            <a:off x="1463040" y="3566160"/>
-            <a:ext cx="4389120" cy="822960"/>
-          </a:xfrm>
-          <a:prstGeom prst="rect">
-            <a:avLst/>
-          </a:prstGeom>
-          <a:noFill/>
-          <a:ln/>
-        </p:spPr>
-        <p:txBody>
-          <a:bodyPr wrap="square" lIns="0" tIns="0" rIns="0" bIns="0" rtlCol="0" anchor="ctr"/>
-          <a:lstStyle/>
-          <a:p>
-            <a:pPr algn="l" indent="0" marL="0">
-              <a:buNone/>
-            </a:pPr>
-            <a:r>
-              <a:rPr lang="en-US" sz="1600" b="1" dirty="0">
-                <a:solidFill>
-                  <a:srgbClr val="2F3E46"/>
-                </a:solidFill>
-                <a:latin typeface="Georgia" pitchFamily="34" charset="0"/>
-                <a:ea typeface="Georgia" pitchFamily="34" charset="-122"/>
-                <a:cs typeface="Georgia" pitchFamily="34" charset="-120"/>
-              </a:rPr>
-              <a:t>Faster incident response</a:t>
-            </a:r>
-            <a:endParaRPr lang="en-US" sz="1600" dirty="0"/>
-          </a:p>
-        </p:txBody>
-      </p:sp>
-      <p:sp>
-        <p:nvSpPr>
-          <p:cNvPr id="20" name="Text 15"/>
-          <p:cNvSpPr/>
-          <p:nvPr/>
-        </p:nvSpPr>
-        <p:spPr>
-          <a:xfrm>
-            <a:off x="5943600" y="3566160"/>
-            <a:ext cx="5516575" cy="822960"/>
-          </a:xfrm>
-          <a:prstGeom prst="rect">
-            <a:avLst/>
-          </a:prstGeom>
-          <a:noFill/>
-          <a:ln/>
-        </p:spPr>
-        <p:txBody>
-          <a:bodyPr wrap="square" lIns="0" tIns="0" rIns="0" bIns="0" rtlCol="0" anchor="ctr"/>
-          <a:lstStyle/>
-          <a:p>
-            <a:pPr algn="l" indent="0" marL="0">
-              <a:buNone/>
-            </a:pPr>
-            <a:r>
-              <a:rPr lang="en-US" sz="1300" dirty="0">
-                <a:solidFill>
-                  <a:srgbClr val="1F2937"/>
-                </a:solidFill>
-                <a:latin typeface="Calibri" pitchFamily="34" charset="0"/>
-                <a:ea typeface="Calibri" pitchFamily="34" charset="-122"/>
-                <a:cs typeface="Calibri" pitchFamily="34" charset="-120"/>
-              </a:rPr>
-              <a:t>Azure Monitor alerts route through the same pipeline; LLM-verified remediation plan in minutes, rollback pre-staged.</a:t>
-            </a:r>
-            <a:endParaRPr lang="en-US" sz="1300" dirty="0"/>
-          </a:p>
-        </p:txBody>
-      </p:sp>
-      <p:sp>
-        <p:nvSpPr>
-          <p:cNvPr id="21" name="Shape 16"/>
-          <p:cNvSpPr/>
-          <p:nvPr/>
-        </p:nvSpPr>
-        <p:spPr>
-          <a:xfrm>
-            <a:off x="548640" y="4480560"/>
-            <a:ext cx="11094415" cy="822960"/>
-          </a:xfrm>
-          <a:prstGeom prst="rect">
-            <a:avLst/>
-          </a:prstGeom>
-          <a:solidFill>
-            <a:srgbClr val="F7F7F5"/>
-          </a:solidFill>
-          <a:ln w="12700">
-            <a:solidFill>
-              <a:srgbClr val="E9E9E4"/>
-            </a:solidFill>
-            <a:prstDash val="solid"/>
-          </a:ln>
-        </p:spPr>
-      </p:sp>
-      <p:sp>
-        <p:nvSpPr>
-          <p:cNvPr id="22" name="Shape 17"/>
-          <p:cNvSpPr/>
-          <p:nvPr/>
-        </p:nvSpPr>
-        <p:spPr>
-          <a:xfrm>
-            <a:off x="731520" y="4617720"/>
-            <a:ext cx="548640" cy="548640"/>
-          </a:xfrm>
-          <a:prstGeom prst="ellipse">
-            <a:avLst/>
-          </a:prstGeom>
-          <a:solidFill>
-            <a:srgbClr val="2F3E46"/>
-          </a:solidFill>
-          <a:ln w="12700">
-            <a:solidFill>
-              <a:srgbClr val="2F3E46"/>
-            </a:solidFill>
-            <a:prstDash val="solid"/>
-          </a:ln>
-        </p:spPr>
-      </p:sp>
-      <p:pic>
-        <p:nvPicPr>
-          <p:cNvPr id="23" name="Image 3" descr="preencoded.png">    </p:cNvPr>
-          <p:cNvPicPr>
-            <a:picLocks noChangeAspect="1"/>
-          </p:cNvPicPr>
-          <p:nvPr/>
-        </p:nvPicPr>
-        <p:blipFill>
-          <a:blip r:embed="rId4"/>
-          <a:stretch>
-            <a:fillRect/>
-          </a:stretch>
-        </p:blipFill>
-        <p:spPr>
-          <a:xfrm>
-            <a:off x="822960" y="4709160"/>
-            <a:ext cx="365760" cy="365760"/>
-          </a:xfrm>
-          <a:prstGeom prst="rect">
-            <a:avLst/>
-          </a:prstGeom>
-        </p:spPr>
-      </p:pic>
-      <p:sp>
-        <p:nvSpPr>
-          <p:cNvPr id="24" name="Text 18"/>
-          <p:cNvSpPr/>
-          <p:nvPr/>
-        </p:nvSpPr>
-        <p:spPr>
-          <a:xfrm>
-            <a:off x="1463040" y="4480560"/>
-            <a:ext cx="4389120" cy="822960"/>
-          </a:xfrm>
-          <a:prstGeom prst="rect">
-            <a:avLst/>
-          </a:prstGeom>
-          <a:noFill/>
-          <a:ln/>
-        </p:spPr>
-        <p:txBody>
-          <a:bodyPr wrap="square" lIns="0" tIns="0" rIns="0" bIns="0" rtlCol="0" anchor="ctr"/>
-          <a:lstStyle/>
-          <a:p>
-            <a:pPr algn="l" indent="0" marL="0">
-              <a:buNone/>
-            </a:pPr>
-            <a:r>
-              <a:rPr lang="en-US" sz="1600" b="1" dirty="0">
-                <a:solidFill>
-                  <a:srgbClr val="2F3E46"/>
-                </a:solidFill>
-                <a:latin typeface="Georgia" pitchFamily="34" charset="0"/>
-                <a:ea typeface="Georgia" pitchFamily="34" charset="-122"/>
-                <a:cs typeface="Georgia" pitchFamily="34" charset="-120"/>
-              </a:rPr>
-              <a:t>Cost discipline</a:t>
-            </a:r>
-            <a:endParaRPr lang="en-US" sz="1600" dirty="0"/>
-          </a:p>
-        </p:txBody>
-      </p:sp>
-      <p:sp>
-        <p:nvSpPr>
-          <p:cNvPr id="25" name="Text 19"/>
-          <p:cNvSpPr/>
-          <p:nvPr/>
-        </p:nvSpPr>
-        <p:spPr>
-          <a:xfrm>
-            <a:off x="5943600" y="4480560"/>
-            <a:ext cx="5516575" cy="822960"/>
-          </a:xfrm>
-          <a:prstGeom prst="rect">
-            <a:avLst/>
-          </a:prstGeom>
-          <a:noFill/>
-          <a:ln/>
-        </p:spPr>
-        <p:txBody>
-          <a:bodyPr wrap="square" lIns="0" tIns="0" rIns="0" bIns="0" rtlCol="0" anchor="ctr"/>
-          <a:lstStyle/>
-          <a:p>
-            <a:pPr algn="l" indent="0" marL="0">
-              <a:buNone/>
-            </a:pPr>
-            <a:r>
-              <a:rPr lang="en-US" sz="1300" dirty="0">
-                <a:solidFill>
-                  <a:srgbClr val="1F2937"/>
-                </a:solidFill>
-                <a:latin typeface="Calibri" pitchFamily="34" charset="0"/>
-                <a:ea typeface="Calibri" pitchFamily="34" charset="-122"/>
-                <a:cs typeface="Calibri" pitchFamily="34" charset="-120"/>
-              </a:rPr>
-              <a:t>Cost agent surfaces waste; governance ensures DR and compliance tags aren't stripped by over-optimisation.</a:t>
-            </a:r>
-            <a:endParaRPr lang="en-US" sz="1300" dirty="0"/>
-          </a:p>
-        </p:txBody>
-      </p:sp>
-      <p:sp>
-        <p:nvSpPr>
-          <p:cNvPr id="26" name="Shape 20"/>
-          <p:cNvSpPr/>
-          <p:nvPr/>
-        </p:nvSpPr>
-        <p:spPr>
-          <a:xfrm>
-            <a:off x="548640" y="5394960"/>
-            <a:ext cx="11094415" cy="822960"/>
+          <p:cNvPr id="15" name="Shape 10"/>
+          <p:cNvSpPr/>
+          <p:nvPr/>
+        </p:nvSpPr>
+        <p:spPr>
+          <a:xfrm>
+            <a:off x="9044788" y="2011680"/>
+            <a:ext cx="2194560" cy="1097280"/>
           </a:xfrm>
           <a:prstGeom prst="rect">
             <a:avLst/>
@@ -3940,63 +3391,14 @@
       </p:sp>
       <p:sp>
         <p:nvSpPr>
-          <p:cNvPr id="27" name="Shape 21"/>
-          <p:cNvSpPr/>
-          <p:nvPr/>
-        </p:nvSpPr>
-        <p:spPr>
-          <a:xfrm>
-            <a:off x="731520" y="5532120"/>
-            <a:ext cx="548640" cy="548640"/>
-          </a:xfrm>
-          <a:prstGeom prst="ellipse">
-            <a:avLst/>
-          </a:prstGeom>
-          <a:solidFill>
-            <a:srgbClr val="2F3E46"/>
-          </a:solidFill>
-          <a:ln w="12700">
-            <a:solidFill>
-              <a:srgbClr val="2F3E46"/>
-            </a:solidFill>
-            <a:prstDash val="solid"/>
-          </a:ln>
-        </p:spPr>
-      </p:sp>
-      <p:pic>
-        <p:nvPicPr>
-          <p:cNvPr id="28" name="Image 4" descr="preencoded.png">    </p:cNvPr>
-          <p:cNvPicPr>
-            <a:picLocks noChangeAspect="1"/>
-          </p:cNvPicPr>
-          <p:nvPr/>
-        </p:nvPicPr>
-        <p:blipFill>
-          <a:blip r:embed="rId5"/>
-          <a:stretch>
-            <a:fillRect/>
-          </a:stretch>
-        </p:blipFill>
-        <p:spPr>
-          <a:xfrm>
-            <a:off x="822960" y="5623560"/>
-            <a:ext cx="365760" cy="365760"/>
-          </a:xfrm>
-          <a:prstGeom prst="rect">
-            <a:avLst/>
-          </a:prstGeom>
-        </p:spPr>
-      </p:pic>
-      <p:sp>
-        <p:nvSpPr>
-          <p:cNvPr id="29" name="Text 22"/>
-          <p:cNvSpPr/>
-          <p:nvPr/>
-        </p:nvSpPr>
-        <p:spPr>
-          <a:xfrm>
-            <a:off x="1463040" y="5394960"/>
-            <a:ext cx="4389120" cy="822960"/>
+          <p:cNvPr id="16" name="Text 11"/>
+          <p:cNvSpPr/>
+          <p:nvPr/>
+        </p:nvSpPr>
+        <p:spPr>
+          <a:xfrm>
+            <a:off x="9044788" y="2011680"/>
+            <a:ext cx="2194560" cy="1097280"/>
           </a:xfrm>
           <a:prstGeom prst="rect">
             <a:avLst/>
@@ -4008,19 +3410,19 @@
           <a:bodyPr wrap="square" lIns="0" tIns="0" rIns="0" bIns="0" rtlCol="0" anchor="ctr"/>
           <a:lstStyle/>
           <a:p>
-            <a:pPr algn="l" indent="0" marL="0">
-              <a:buNone/>
-            </a:pPr>
-            <a:r>
-              <a:rPr lang="en-US" sz="1600" b="1" dirty="0">
-                <a:solidFill>
-                  <a:srgbClr val="2F3E46"/>
+            <a:pPr algn="ctr" indent="0" marL="0">
+              <a:buNone/>
+            </a:pPr>
+            <a:r>
+              <a:rPr lang="en-US" sz="1600" dirty="0">
+                <a:solidFill>
+                  <a:srgbClr val="1F2937"/>
                 </a:solidFill>
                 <a:latin typeface="Georgia" pitchFamily="34" charset="0"/>
                 <a:ea typeface="Georgia" pitchFamily="34" charset="-122"/>
                 <a:cs typeface="Georgia" pitchFamily="34" charset="-120"/>
               </a:rPr>
-              <a:t>Compliance evidence</a:t>
+              <a:t>Change applied</a:t>
             </a:r>
             <a:endParaRPr lang="en-US" sz="1600" dirty="0"/>
           </a:p>
@@ -4028,14 +3430,14 @@
       </p:sp>
       <p:sp>
         <p:nvSpPr>
-          <p:cNvPr id="30" name="Text 23"/>
-          <p:cNvSpPr/>
-          <p:nvPr/>
-        </p:nvSpPr>
-        <p:spPr>
-          <a:xfrm>
-            <a:off x="5943600" y="5394960"/>
-            <a:ext cx="5516575" cy="822960"/>
+          <p:cNvPr id="17" name="Text 12"/>
+          <p:cNvSpPr/>
+          <p:nvPr/>
+        </p:nvSpPr>
+        <p:spPr>
+          <a:xfrm>
+            <a:off x="548640" y="3840480"/>
+            <a:ext cx="5364328" cy="365760"/>
           </a:xfrm>
           <a:prstGeom prst="rect">
             <a:avLst/>
@@ -4047,11 +3449,53 @@
           <a:bodyPr wrap="square" lIns="0" tIns="0" rIns="0" bIns="0" rtlCol="0" anchor="ctr"/>
           <a:lstStyle/>
           <a:p>
+            <a:pPr indent="0" marL="0">
+              <a:buNone/>
+            </a:pPr>
+            <a:r>
+              <a:rPr lang="en-US" sz="1600" b="1" dirty="0">
+                <a:solidFill>
+                  <a:srgbClr val="2F3E46"/>
+                </a:solidFill>
+                <a:latin typeface="Georgia" pitchFamily="34" charset="0"/>
+                <a:ea typeface="Georgia" pitchFamily="34" charset="-122"/>
+                <a:cs typeface="Georgia" pitchFamily="34" charset="-120"/>
+              </a:rPr>
+              <a:t>Complements, does not replace</a:t>
+            </a:r>
+            <a:endParaRPr lang="en-US" sz="1600" dirty="0"/>
+          </a:p>
+        </p:txBody>
+      </p:sp>
+      <p:sp>
+        <p:nvSpPr>
+          <p:cNvPr id="18" name="Text 13"/>
+          <p:cNvSpPr/>
+          <p:nvPr/>
+        </p:nvSpPr>
+        <p:spPr>
+          <a:xfrm>
+            <a:off x="548640" y="4297680"/>
+            <a:ext cx="5364328" cy="1737360"/>
+          </a:xfrm>
+          <a:prstGeom prst="rect">
+            <a:avLst/>
+          </a:prstGeom>
+          <a:noFill/>
+          <a:ln/>
+        </p:spPr>
+        <p:txBody>
+          <a:bodyPr wrap="square" lIns="0" tIns="0" rIns="0" bIns="0" rtlCol="0" anchor="t"/>
+          <a:lstStyle/>
+          <a:p>
             <a:pPr algn="l" indent="0" marL="0">
-              <a:buNone/>
-            </a:pPr>
-            <a:r>
-              <a:rPr lang="en-US" sz="1300" dirty="0">
+              <a:spcAft>
+                <a:spcPts val="600"/>
+              </a:spcAft>
+              <a:buNone/>
+            </a:pPr>
+            <a:r>
+              <a:rPr lang="en-US" sz="1300" b="1" dirty="0">
                 <a:solidFill>
                   <a:srgbClr val="1F2937"/>
                 </a:solidFill>
@@ -4059,7 +3503,259 @@
                 <a:ea typeface="Calibri" pitchFamily="34" charset="-122"/>
                 <a:cs typeface="Calibri" pitchFamily="34" charset="-120"/>
               </a:rPr>
-              <a:t>Policy engine + full lineage supports SOC 2, ISO 27001, and PCI change-control obligations.</a:t>
+              <a:t>Azure Policy, Defender, Advisor </a:t>
+            </a:r>
+            <a:pPr algn="l" indent="0" marL="0">
+              <a:spcAft>
+                <a:spcPts val="600"/>
+              </a:spcAft>
+              <a:buNone/>
+            </a:pPr>
+            <a:r>
+              <a:rPr lang="en-US" sz="1300" dirty="0">
+                <a:solidFill>
+                  <a:srgbClr val="1F2937"/>
+                </a:solidFill>
+                <a:latin typeface="Calibri" pitchFamily="34" charset="0"/>
+                <a:ea typeface="Calibri" pitchFamily="34" charset="-122"/>
+                <a:cs typeface="Calibri" pitchFamily="34" charset="-120"/>
+              </a:rPr>
+              <a:t>— signal sources, not decision layers</a:t>
+            </a:r>
+            <a:endParaRPr lang="en-US" sz="1300" dirty="0"/>
+          </a:p>
+          <a:p>
+            <a:pPr algn="l" indent="0" marL="0">
+              <a:spcAft>
+                <a:spcPts val="600"/>
+              </a:spcAft>
+              <a:buNone/>
+            </a:pPr>
+            <a:r>
+              <a:rPr lang="en-US" sz="1300" b="1" dirty="0">
+                <a:solidFill>
+                  <a:srgbClr val="1F2937"/>
+                </a:solidFill>
+                <a:latin typeface="Calibri" pitchFamily="34" charset="0"/>
+                <a:ea typeface="Calibri" pitchFamily="34" charset="-122"/>
+                <a:cs typeface="Calibri" pitchFamily="34" charset="-120"/>
+              </a:rPr>
+              <a:t>CI / CD pipelines </a:t>
+            </a:r>
+            <a:pPr algn="l" indent="0" marL="0">
+              <a:spcAft>
+                <a:spcPts val="600"/>
+              </a:spcAft>
+              <a:buNone/>
+            </a:pPr>
+            <a:r>
+              <a:rPr lang="en-US" sz="1300" dirty="0">
+                <a:solidFill>
+                  <a:srgbClr val="1F2937"/>
+                </a:solidFill>
+                <a:latin typeface="Calibri" pitchFamily="34" charset="0"/>
+                <a:ea typeface="Calibri" pitchFamily="34" charset="-122"/>
+                <a:cs typeface="Calibri" pitchFamily="34" charset="-120"/>
+              </a:rPr>
+              <a:t>— RuriSkry triggers the PR, CI / CD runs it</a:t>
+            </a:r>
+            <a:endParaRPr lang="en-US" sz="1300" dirty="0"/>
+          </a:p>
+          <a:p>
+            <a:pPr algn="l" indent="0" marL="0">
+              <a:spcAft>
+                <a:spcPts val="600"/>
+              </a:spcAft>
+              <a:buNone/>
+            </a:pPr>
+            <a:r>
+              <a:rPr lang="en-US" sz="1300" b="1" dirty="0">
+                <a:solidFill>
+                  <a:srgbClr val="1F2937"/>
+                </a:solidFill>
+                <a:latin typeface="Calibri" pitchFamily="34" charset="0"/>
+                <a:ea typeface="Calibri" pitchFamily="34" charset="-122"/>
+                <a:cs typeface="Calibri" pitchFamily="34" charset="-120"/>
+              </a:rPr>
+              <a:t>Existing human CAB </a:t>
+            </a:r>
+            <a:pPr algn="l" indent="0" marL="0">
+              <a:spcAft>
+                <a:spcPts val="600"/>
+              </a:spcAft>
+              <a:buNone/>
+            </a:pPr>
+            <a:r>
+              <a:rPr lang="en-US" sz="1300" dirty="0">
+                <a:solidFill>
+                  <a:srgbClr val="1F2937"/>
+                </a:solidFill>
+                <a:latin typeface="Calibri" pitchFamily="34" charset="0"/>
+                <a:ea typeface="Calibri" pitchFamily="34" charset="-122"/>
+                <a:cs typeface="Calibri" pitchFamily="34" charset="-120"/>
+              </a:rPr>
+              <a:t>— handles the subset humans don't have bandwidth for</a:t>
+            </a:r>
+            <a:endParaRPr lang="en-US" sz="1300" dirty="0"/>
+          </a:p>
+        </p:txBody>
+      </p:sp>
+      <p:sp>
+        <p:nvSpPr>
+          <p:cNvPr id="19" name="Text 14"/>
+          <p:cNvSpPr/>
+          <p:nvPr/>
+        </p:nvSpPr>
+        <p:spPr>
+          <a:xfrm>
+            <a:off x="6278728" y="3840480"/>
+            <a:ext cx="5364328" cy="365760"/>
+          </a:xfrm>
+          <a:prstGeom prst="rect">
+            <a:avLst/>
+          </a:prstGeom>
+          <a:noFill/>
+          <a:ln/>
+        </p:spPr>
+        <p:txBody>
+          <a:bodyPr wrap="square" lIns="0" tIns="0" rIns="0" bIns="0" rtlCol="0" anchor="ctr"/>
+          <a:lstStyle/>
+          <a:p>
+            <a:pPr indent="0" marL="0">
+              <a:buNone/>
+            </a:pPr>
+            <a:r>
+              <a:rPr lang="en-US" sz="1600" b="1" dirty="0">
+                <a:solidFill>
+                  <a:srgbClr val="2F3E46"/>
+                </a:solidFill>
+                <a:latin typeface="Georgia" pitchFamily="34" charset="0"/>
+                <a:ea typeface="Georgia" pitchFamily="34" charset="-122"/>
+                <a:cs typeface="Georgia" pitchFamily="34" charset="-120"/>
+              </a:rPr>
+              <a:t>Does not replace</a:t>
+            </a:r>
+            <a:endParaRPr lang="en-US" sz="1600" dirty="0"/>
+          </a:p>
+        </p:txBody>
+      </p:sp>
+      <p:sp>
+        <p:nvSpPr>
+          <p:cNvPr id="20" name="Text 15"/>
+          <p:cNvSpPr/>
+          <p:nvPr/>
+        </p:nvSpPr>
+        <p:spPr>
+          <a:xfrm>
+            <a:off x="6278728" y="4297680"/>
+            <a:ext cx="5364328" cy="1737360"/>
+          </a:xfrm>
+          <a:prstGeom prst="rect">
+            <a:avLst/>
+          </a:prstGeom>
+          <a:noFill/>
+          <a:ln/>
+        </p:spPr>
+        <p:txBody>
+          <a:bodyPr wrap="square" lIns="0" tIns="0" rIns="0" bIns="0" rtlCol="0" anchor="t"/>
+          <a:lstStyle/>
+          <a:p>
+            <a:pPr algn="l" indent="0" marL="0">
+              <a:spcAft>
+                <a:spcPts val="600"/>
+              </a:spcAft>
+              <a:buNone/>
+            </a:pPr>
+            <a:r>
+              <a:rPr lang="en-US" sz="1300" dirty="0">
+                <a:solidFill>
+                  <a:srgbClr val="1F2937"/>
+                </a:solidFill>
+                <a:latin typeface="Calibri" pitchFamily="34" charset="0"/>
+                <a:ea typeface="Calibri" pitchFamily="34" charset="-122"/>
+                <a:cs typeface="Calibri" pitchFamily="34" charset="-120"/>
+              </a:rPr>
+              <a:t>Identity and access management (IAM)</a:t>
+            </a:r>
+            <a:endParaRPr lang="en-US" sz="1300" dirty="0"/>
+          </a:p>
+          <a:p>
+            <a:pPr algn="l" indent="0" marL="0">
+              <a:spcAft>
+                <a:spcPts val="600"/>
+              </a:spcAft>
+              <a:buNone/>
+            </a:pPr>
+            <a:r>
+              <a:rPr lang="en-US" sz="400" dirty="0">
+                <a:solidFill>
+                  <a:srgbClr val="1F2937"/>
+                </a:solidFill>
+                <a:latin typeface="Calibri" pitchFamily="34" charset="0"/>
+                <a:ea typeface="Calibri" pitchFamily="34" charset="-122"/>
+                <a:cs typeface="Calibri" pitchFamily="34" charset="-120"/>
+              </a:rPr>
+              <a:t> </a:t>
+            </a:r>
+            <a:endParaRPr lang="en-US" sz="1300" dirty="0"/>
+          </a:p>
+          <a:p>
+            <a:pPr algn="l" indent="0" marL="0">
+              <a:spcAft>
+                <a:spcPts val="600"/>
+              </a:spcAft>
+              <a:buNone/>
+            </a:pPr>
+            <a:r>
+              <a:rPr lang="en-US" sz="1300" dirty="0">
+                <a:solidFill>
+                  <a:srgbClr val="1F2937"/>
+                </a:solidFill>
+                <a:latin typeface="Calibri" pitchFamily="34" charset="0"/>
+                <a:ea typeface="Calibri" pitchFamily="34" charset="-122"/>
+                <a:cs typeface="Calibri" pitchFamily="34" charset="-120"/>
+              </a:rPr>
+              <a:t>Your IaC tool of choice (Terraform, Bicep)</a:t>
+            </a:r>
+            <a:endParaRPr lang="en-US" sz="1300" dirty="0"/>
+          </a:p>
+          <a:p>
+            <a:pPr algn="l" indent="0" marL="0">
+              <a:spcAft>
+                <a:spcPts val="600"/>
+              </a:spcAft>
+              <a:buNone/>
+            </a:pPr>
+            <a:r>
+              <a:rPr lang="en-US" sz="400" dirty="0">
+                <a:solidFill>
+                  <a:srgbClr val="1F2937"/>
+                </a:solidFill>
+                <a:latin typeface="Calibri" pitchFamily="34" charset="0"/>
+                <a:ea typeface="Calibri" pitchFamily="34" charset="-122"/>
+                <a:cs typeface="Calibri" pitchFamily="34" charset="-120"/>
+              </a:rPr>
+              <a:t> </a:t>
+            </a:r>
+            <a:endParaRPr lang="en-US" sz="1300" dirty="0"/>
+          </a:p>
+          <a:p>
+            <a:pPr algn="l" indent="0" marL="0">
+              <a:spcAft>
+                <a:spcPts val="600"/>
+              </a:spcAft>
+              <a:buNone/>
+            </a:pPr>
+            <a:r>
+              <a:rPr lang="en-US" sz="1300" dirty="0">
+                <a:solidFill>
+                  <a:srgbClr val="1F2937"/>
+                </a:solidFill>
+                <a:latin typeface="Calibri" pitchFamily="34" charset="0"/>
+                <a:ea typeface="Calibri" pitchFamily="34" charset="-122"/>
+                <a:cs typeface="Calibri" pitchFamily="34" charset="-120"/>
+              </a:rPr>
+              <a:t>Your existing change management process</a:t>
             </a:r>
             <a:endParaRPr lang="en-US" sz="1300" dirty="0"/>
           </a:p>
@@ -4650,7 +4346,7 @@
                 <a:ea typeface="Georgia" pitchFamily="34" charset="-122"/>
                 <a:cs typeface="Georgia" pitchFamily="34" charset="-120"/>
               </a:rPr>
-              <a:t>Production-grade</a:t>
+              <a:t>Production-architected</a:t>
             </a:r>
             <a:endParaRPr lang="en-US" sz="1700" dirty="0"/>
           </a:p>
@@ -4689,7 +4385,7 @@
                 <a:ea typeface="Calibri" pitchFamily="34" charset="-122"/>
                 <a:cs typeface="Calibri" pitchFamily="34" charset="-120"/>
               </a:rPr>
-              <a:t>1,000+ test suite · deployed end-to-end · live Azure topology</a:t>
+              <a:t>1,000+ test suite · deployed end-to-end on Azure · small-scale validated, ready for broader field testing</a:t>
             </a:r>
             <a:endParaRPr lang="en-US" sz="1200" dirty="0"/>
           </a:p>
@@ -5184,7 +4880,7 @@
                 <a:ea typeface="Calibri" pitchFamily="34" charset="-122"/>
                 <a:cs typeface="Calibri" pitchFamily="34" charset="-120"/>
               </a:rPr>
-              <a:t>Originally built for the Microsoft AI Dev Days Hackathon 2026 (Feb – Mar 2026). Since matured into production-capable governance infrastructure.</a:t>
+              <a:t>Originally built for the Microsoft AI Dev Days Hackathon 2026 (Feb – Mar 2026). Validated at small scale; the architecture is ready for broader real-world testing.</a:t>
             </a:r>
             <a:endParaRPr lang="en-US" sz="1300" dirty="0"/>
           </a:p>
@@ -5944,7 +5640,7 @@
                 <a:ea typeface="Georgia" pitchFamily="34" charset="-122"/>
                 <a:cs typeface="Georgia" pitchFamily="34" charset="-120"/>
               </a:rPr>
-              <a:t>The thesis</a:t>
+              <a:t>Where this is heading</a:t>
             </a:r>
             <a:endParaRPr lang="en-US" sz="3600" dirty="0"/>
           </a:p>
@@ -6036,8 +5732,8 @@
         </p:nvSpPr>
         <p:spPr>
           <a:xfrm>
-            <a:off x="1005840" y="1828800"/>
-            <a:ext cx="1097280" cy="1280160"/>
+            <a:off x="548640" y="1600200"/>
+            <a:ext cx="11094415" cy="502920"/>
           </a:xfrm>
           <a:prstGeom prst="rect">
             <a:avLst/>
@@ -6053,69 +5749,158 @@
               <a:buNone/>
             </a:pPr>
             <a:r>
-              <a:rPr lang="en-US" sz="14000" b="1" dirty="0">
-                <a:solidFill>
-                  <a:srgbClr val="F59E0B"/>
+              <a:rPr lang="en-US" sz="1500" dirty="0">
+                <a:solidFill>
+                  <a:srgbClr val="1F2937"/>
+                </a:solidFill>
+                <a:latin typeface="Calibri" pitchFamily="34" charset="0"/>
+                <a:ea typeface="Calibri" pitchFamily="34" charset="-122"/>
+                <a:cs typeface="Calibri" pitchFamily="34" charset="-120"/>
+              </a:rPr>
+              <a:t>AI agents are being deployed into production infrastructure faster than governance can catch up. Three beats to watch:</a:t>
+            </a:r>
+            <a:endParaRPr lang="en-US" sz="1500" dirty="0"/>
+          </a:p>
+        </p:txBody>
+      </p:sp>
+      <p:sp>
+        <p:nvSpPr>
+          <p:cNvPr id="7" name="Shape 5"/>
+          <p:cNvSpPr/>
+          <p:nvPr/>
+        </p:nvSpPr>
+        <p:spPr>
+          <a:xfrm>
+            <a:off x="548640" y="2331720"/>
+            <a:ext cx="11094415" cy="1051560"/>
+          </a:xfrm>
+          <a:prstGeom prst="rect">
+            <a:avLst/>
+          </a:prstGeom>
+          <a:solidFill>
+            <a:srgbClr val="E9E9E4"/>
+          </a:solidFill>
+          <a:ln w="12700">
+            <a:solidFill>
+              <a:srgbClr val="E9E9E4"/>
+            </a:solidFill>
+            <a:prstDash val="solid"/>
+          </a:ln>
+        </p:spPr>
+      </p:sp>
+      <p:sp>
+        <p:nvSpPr>
+          <p:cNvPr id="8" name="Shape 6"/>
+          <p:cNvSpPr/>
+          <p:nvPr/>
+        </p:nvSpPr>
+        <p:spPr>
+          <a:xfrm>
+            <a:off x="548640" y="2331720"/>
+            <a:ext cx="91440" cy="1051560"/>
+          </a:xfrm>
+          <a:prstGeom prst="rect">
+            <a:avLst/>
+          </a:prstGeom>
+          <a:solidFill>
+            <a:srgbClr val="F59E0B"/>
+          </a:solidFill>
+          <a:ln w="12700">
+            <a:solidFill>
+              <a:srgbClr val="F59E0B"/>
+            </a:solidFill>
+            <a:prstDash val="solid"/>
+          </a:ln>
+        </p:spPr>
+      </p:sp>
+      <p:sp>
+        <p:nvSpPr>
+          <p:cNvPr id="9" name="Text 7"/>
+          <p:cNvSpPr/>
+          <p:nvPr/>
+        </p:nvSpPr>
+        <p:spPr>
+          <a:xfrm>
+            <a:off x="868680" y="2331720"/>
+            <a:ext cx="914400" cy="1051560"/>
+          </a:xfrm>
+          <a:prstGeom prst="rect">
+            <a:avLst/>
+          </a:prstGeom>
+          <a:noFill/>
+          <a:ln/>
+        </p:spPr>
+        <p:txBody>
+          <a:bodyPr wrap="square" lIns="0" tIns="0" rIns="0" bIns="0" rtlCol="0" anchor="ctr"/>
+          <a:lstStyle/>
+          <a:p>
+            <a:pPr algn="l" indent="0" marL="0">
+              <a:buNone/>
+            </a:pPr>
+            <a:r>
+              <a:rPr lang="en-US" sz="5200" b="1" dirty="0">
+                <a:solidFill>
+                  <a:srgbClr val="2F3E46"/>
                 </a:solidFill>
                 <a:latin typeface="Georgia" pitchFamily="34" charset="0"/>
                 <a:ea typeface="Georgia" pitchFamily="34" charset="-122"/>
                 <a:cs typeface="Georgia" pitchFamily="34" charset="-120"/>
               </a:rPr>
-              <a:t>“</a:t>
-            </a:r>
-            <a:endParaRPr lang="en-US" sz="14000" dirty="0"/>
-          </a:p>
-        </p:txBody>
-      </p:sp>
-      <p:sp>
-        <p:nvSpPr>
-          <p:cNvPr id="7" name="Text 5"/>
-          <p:cNvSpPr/>
-          <p:nvPr/>
-        </p:nvSpPr>
-        <p:spPr>
-          <a:xfrm>
-            <a:off x="2286000" y="2103120"/>
-            <a:ext cx="8808415" cy="2286000"/>
-          </a:xfrm>
-          <a:prstGeom prst="rect">
-            <a:avLst/>
-          </a:prstGeom>
-          <a:noFill/>
-          <a:ln/>
-        </p:spPr>
-        <p:txBody>
-          <a:bodyPr wrap="square" lIns="0" tIns="0" rIns="0" bIns="0" rtlCol="0" anchor="t"/>
+              <a:t>1</a:t>
+            </a:r>
+            <a:endParaRPr lang="en-US" sz="5200" dirty="0"/>
+          </a:p>
+        </p:txBody>
+      </p:sp>
+      <p:sp>
+        <p:nvSpPr>
+          <p:cNvPr id="10" name="Text 8"/>
+          <p:cNvSpPr/>
+          <p:nvPr/>
+        </p:nvSpPr>
+        <p:spPr>
+          <a:xfrm>
+            <a:off x="1874520" y="2496312"/>
+            <a:ext cx="9585655" cy="411480"/>
+          </a:xfrm>
+          <a:prstGeom prst="rect">
+            <a:avLst/>
+          </a:prstGeom>
+          <a:noFill/>
+          <a:ln/>
+        </p:spPr>
+        <p:txBody>
+          <a:bodyPr wrap="square" lIns="0" tIns="0" rIns="0" bIns="0" rtlCol="0" anchor="ctr"/>
           <a:lstStyle/>
           <a:p>
             <a:pPr algn="l" indent="0" marL="0">
               <a:buNone/>
             </a:pPr>
             <a:r>
-              <a:rPr lang="en-US" sz="2400" i="1" dirty="0">
-                <a:solidFill>
-                  <a:srgbClr val="1F2937"/>
+              <a:rPr lang="en-US" sz="1900" b="1" dirty="0">
+                <a:solidFill>
+                  <a:srgbClr val="2F3E46"/>
                 </a:solidFill>
                 <a:latin typeface="Georgia" pitchFamily="34" charset="0"/>
                 <a:ea typeface="Georgia" pitchFamily="34" charset="-122"/>
                 <a:cs typeface="Georgia" pitchFamily="34" charset="-120"/>
               </a:rPr>
-              <a:t>Every autonomous system in the enterprise eventually acquires a governance layer. For infrastructure AI, that layer is missing today — and will be required procurement in eighteen months.</a:t>
-            </a:r>
-            <a:endParaRPr lang="en-US" sz="2400" dirty="0"/>
-          </a:p>
-        </p:txBody>
-      </p:sp>
-      <p:sp>
-        <p:nvSpPr>
-          <p:cNvPr id="8" name="Text 6"/>
-          <p:cNvSpPr/>
-          <p:nvPr/>
-        </p:nvSpPr>
-        <p:spPr>
-          <a:xfrm>
-            <a:off x="2286000" y="4572000"/>
-            <a:ext cx="8808415" cy="1371600"/>
+              <a:t>Adoption is accelerating.</a:t>
+            </a:r>
+            <a:endParaRPr lang="en-US" sz="1900" dirty="0"/>
+          </a:p>
+        </p:txBody>
+      </p:sp>
+      <p:sp>
+        <p:nvSpPr>
+          <p:cNvPr id="11" name="Text 9"/>
+          <p:cNvSpPr/>
+          <p:nvPr/>
+        </p:nvSpPr>
+        <p:spPr>
+          <a:xfrm>
+            <a:off x="1874520" y="2880360"/>
+            <a:ext cx="9585655" cy="411480"/>
           </a:xfrm>
           <a:prstGeom prst="rect">
             <a:avLst/>
@@ -6131,7 +5916,7 @@
               <a:buNone/>
             </a:pPr>
             <a:r>
-              <a:rPr lang="en-US" sz="1500" dirty="0">
+              <a:rPr lang="en-US" sz="1300" dirty="0">
                 <a:solidFill>
                   <a:srgbClr val="1F2937"/>
                 </a:solidFill>
@@ -6139,7 +5924,380 @@
                 <a:ea typeface="Calibri" pitchFamily="34" charset="-122"/>
                 <a:cs typeface="Calibri" pitchFamily="34" charset="-120"/>
               </a:rPr>
-              <a:t>RuriSkry is a working reference implementation of what that layer looks like on Azure. Open source, because the pattern matters more than the product. Azure-native, because that is where we work. Production-grade, because anything less does not count.</a:t>
+              <a:t>Every major cloud now ships operational AI agents. Enterprises are wiring them into production, whether or not governance is ready.</a:t>
+            </a:r>
+            <a:endParaRPr lang="en-US" sz="1300" dirty="0"/>
+          </a:p>
+        </p:txBody>
+      </p:sp>
+      <p:sp>
+        <p:nvSpPr>
+          <p:cNvPr id="12" name="Shape 10"/>
+          <p:cNvSpPr/>
+          <p:nvPr/>
+        </p:nvSpPr>
+        <p:spPr>
+          <a:xfrm>
+            <a:off x="548640" y="3493008"/>
+            <a:ext cx="11094415" cy="1051560"/>
+          </a:xfrm>
+          <a:prstGeom prst="rect">
+            <a:avLst/>
+          </a:prstGeom>
+          <a:solidFill>
+            <a:srgbClr val="E9E9E4"/>
+          </a:solidFill>
+          <a:ln w="12700">
+            <a:solidFill>
+              <a:srgbClr val="E9E9E4"/>
+            </a:solidFill>
+            <a:prstDash val="solid"/>
+          </a:ln>
+        </p:spPr>
+      </p:sp>
+      <p:sp>
+        <p:nvSpPr>
+          <p:cNvPr id="13" name="Shape 11"/>
+          <p:cNvSpPr/>
+          <p:nvPr/>
+        </p:nvSpPr>
+        <p:spPr>
+          <a:xfrm>
+            <a:off x="548640" y="3493008"/>
+            <a:ext cx="91440" cy="1051560"/>
+          </a:xfrm>
+          <a:prstGeom prst="rect">
+            <a:avLst/>
+          </a:prstGeom>
+          <a:solidFill>
+            <a:srgbClr val="F59E0B"/>
+          </a:solidFill>
+          <a:ln w="12700">
+            <a:solidFill>
+              <a:srgbClr val="F59E0B"/>
+            </a:solidFill>
+            <a:prstDash val="solid"/>
+          </a:ln>
+        </p:spPr>
+      </p:sp>
+      <p:sp>
+        <p:nvSpPr>
+          <p:cNvPr id="14" name="Text 12"/>
+          <p:cNvSpPr/>
+          <p:nvPr/>
+        </p:nvSpPr>
+        <p:spPr>
+          <a:xfrm>
+            <a:off x="868680" y="3493008"/>
+            <a:ext cx="914400" cy="1051560"/>
+          </a:xfrm>
+          <a:prstGeom prst="rect">
+            <a:avLst/>
+          </a:prstGeom>
+          <a:noFill/>
+          <a:ln/>
+        </p:spPr>
+        <p:txBody>
+          <a:bodyPr wrap="square" lIns="0" tIns="0" rIns="0" bIns="0" rtlCol="0" anchor="ctr"/>
+          <a:lstStyle/>
+          <a:p>
+            <a:pPr algn="l" indent="0" marL="0">
+              <a:buNone/>
+            </a:pPr>
+            <a:r>
+              <a:rPr lang="en-US" sz="5200" b="1" dirty="0">
+                <a:solidFill>
+                  <a:srgbClr val="2F3E46"/>
+                </a:solidFill>
+                <a:latin typeface="Georgia" pitchFamily="34" charset="0"/>
+                <a:ea typeface="Georgia" pitchFamily="34" charset="-122"/>
+                <a:cs typeface="Georgia" pitchFamily="34" charset="-120"/>
+              </a:rPr>
+              <a:t>2</a:t>
+            </a:r>
+            <a:endParaRPr lang="en-US" sz="5200" dirty="0"/>
+          </a:p>
+        </p:txBody>
+      </p:sp>
+      <p:sp>
+        <p:nvSpPr>
+          <p:cNvPr id="15" name="Text 13"/>
+          <p:cNvSpPr/>
+          <p:nvPr/>
+        </p:nvSpPr>
+        <p:spPr>
+          <a:xfrm>
+            <a:off x="1874520" y="3657600"/>
+            <a:ext cx="9585655" cy="411480"/>
+          </a:xfrm>
+          <a:prstGeom prst="rect">
+            <a:avLst/>
+          </a:prstGeom>
+          <a:noFill/>
+          <a:ln/>
+        </p:spPr>
+        <p:txBody>
+          <a:bodyPr wrap="square" lIns="0" tIns="0" rIns="0" bIns="0" rtlCol="0" anchor="ctr"/>
+          <a:lstStyle/>
+          <a:p>
+            <a:pPr algn="l" indent="0" marL="0">
+              <a:buNone/>
+            </a:pPr>
+            <a:r>
+              <a:rPr lang="en-US" sz="1900" b="1" dirty="0">
+                <a:solidFill>
+                  <a:srgbClr val="2F3E46"/>
+                </a:solidFill>
+                <a:latin typeface="Georgia" pitchFamily="34" charset="0"/>
+                <a:ea typeface="Georgia" pitchFamily="34" charset="-122"/>
+                <a:cs typeface="Georgia" pitchFamily="34" charset="-120"/>
+              </a:rPr>
+              <a:t>Capability controls are commoditising.</a:t>
+            </a:r>
+            <a:endParaRPr lang="en-US" sz="1900" dirty="0"/>
+          </a:p>
+        </p:txBody>
+      </p:sp>
+      <p:sp>
+        <p:nvSpPr>
+          <p:cNvPr id="16" name="Text 14"/>
+          <p:cNvSpPr/>
+          <p:nvPr/>
+        </p:nvSpPr>
+        <p:spPr>
+          <a:xfrm>
+            <a:off x="1874520" y="4041648"/>
+            <a:ext cx="9585655" cy="411480"/>
+          </a:xfrm>
+          <a:prstGeom prst="rect">
+            <a:avLst/>
+          </a:prstGeom>
+          <a:noFill/>
+          <a:ln/>
+        </p:spPr>
+        <p:txBody>
+          <a:bodyPr wrap="square" lIns="0" tIns="0" rIns="0" bIns="0" rtlCol="0" anchor="t"/>
+          <a:lstStyle/>
+          <a:p>
+            <a:pPr algn="l" indent="0" marL="0">
+              <a:buNone/>
+            </a:pPr>
+            <a:r>
+              <a:rPr lang="en-US" sz="1300" dirty="0">
+                <a:solidFill>
+                  <a:srgbClr val="1F2937"/>
+                </a:solidFill>
+                <a:latin typeface="Calibri" pitchFamily="34" charset="0"/>
+                <a:ea typeface="Calibri" pitchFamily="34" charset="-122"/>
+                <a:cs typeface="Calibri" pitchFamily="34" charset="-120"/>
+              </a:rPr>
+              <a:t>IAM, permission scopes, rate limits — every vendor ships them. The judgment layer (blast radius, policy fit, precedent, cost) does not exist.</a:t>
+            </a:r>
+            <a:endParaRPr lang="en-US" sz="1300" dirty="0"/>
+          </a:p>
+        </p:txBody>
+      </p:sp>
+      <p:sp>
+        <p:nvSpPr>
+          <p:cNvPr id="17" name="Shape 15"/>
+          <p:cNvSpPr/>
+          <p:nvPr/>
+        </p:nvSpPr>
+        <p:spPr>
+          <a:xfrm>
+            <a:off x="548640" y="4654296"/>
+            <a:ext cx="11094415" cy="1051560"/>
+          </a:xfrm>
+          <a:prstGeom prst="rect">
+            <a:avLst/>
+          </a:prstGeom>
+          <a:solidFill>
+            <a:srgbClr val="E9E9E4"/>
+          </a:solidFill>
+          <a:ln w="12700">
+            <a:solidFill>
+              <a:srgbClr val="E9E9E4"/>
+            </a:solidFill>
+            <a:prstDash val="solid"/>
+          </a:ln>
+        </p:spPr>
+      </p:sp>
+      <p:sp>
+        <p:nvSpPr>
+          <p:cNvPr id="18" name="Shape 16"/>
+          <p:cNvSpPr/>
+          <p:nvPr/>
+        </p:nvSpPr>
+        <p:spPr>
+          <a:xfrm>
+            <a:off x="548640" y="4654296"/>
+            <a:ext cx="91440" cy="1051560"/>
+          </a:xfrm>
+          <a:prstGeom prst="rect">
+            <a:avLst/>
+          </a:prstGeom>
+          <a:solidFill>
+            <a:srgbClr val="F59E0B"/>
+          </a:solidFill>
+          <a:ln w="12700">
+            <a:solidFill>
+              <a:srgbClr val="F59E0B"/>
+            </a:solidFill>
+            <a:prstDash val="solid"/>
+          </a:ln>
+        </p:spPr>
+      </p:sp>
+      <p:sp>
+        <p:nvSpPr>
+          <p:cNvPr id="19" name="Text 17"/>
+          <p:cNvSpPr/>
+          <p:nvPr/>
+        </p:nvSpPr>
+        <p:spPr>
+          <a:xfrm>
+            <a:off x="868680" y="4654296"/>
+            <a:ext cx="914400" cy="1051560"/>
+          </a:xfrm>
+          <a:prstGeom prst="rect">
+            <a:avLst/>
+          </a:prstGeom>
+          <a:noFill/>
+          <a:ln/>
+        </p:spPr>
+        <p:txBody>
+          <a:bodyPr wrap="square" lIns="0" tIns="0" rIns="0" bIns="0" rtlCol="0" anchor="ctr"/>
+          <a:lstStyle/>
+          <a:p>
+            <a:pPr algn="l" indent="0" marL="0">
+              <a:buNone/>
+            </a:pPr>
+            <a:r>
+              <a:rPr lang="en-US" sz="5200" b="1" dirty="0">
+                <a:solidFill>
+                  <a:srgbClr val="2F3E46"/>
+                </a:solidFill>
+                <a:latin typeface="Georgia" pitchFamily="34" charset="0"/>
+                <a:ea typeface="Georgia" pitchFamily="34" charset="-122"/>
+                <a:cs typeface="Georgia" pitchFamily="34" charset="-120"/>
+              </a:rPr>
+              <a:t>3</a:t>
+            </a:r>
+            <a:endParaRPr lang="en-US" sz="5200" dirty="0"/>
+          </a:p>
+        </p:txBody>
+      </p:sp>
+      <p:sp>
+        <p:nvSpPr>
+          <p:cNvPr id="20" name="Text 18"/>
+          <p:cNvSpPr/>
+          <p:nvPr/>
+        </p:nvSpPr>
+        <p:spPr>
+          <a:xfrm>
+            <a:off x="1874520" y="4818888"/>
+            <a:ext cx="9585655" cy="411480"/>
+          </a:xfrm>
+          <a:prstGeom prst="rect">
+            <a:avLst/>
+          </a:prstGeom>
+          <a:noFill/>
+          <a:ln/>
+        </p:spPr>
+        <p:txBody>
+          <a:bodyPr wrap="square" lIns="0" tIns="0" rIns="0" bIns="0" rtlCol="0" anchor="ctr"/>
+          <a:lstStyle/>
+          <a:p>
+            <a:pPr algn="l" indent="0" marL="0">
+              <a:buNone/>
+            </a:pPr>
+            <a:r>
+              <a:rPr lang="en-US" sz="1900" b="1" dirty="0">
+                <a:solidFill>
+                  <a:srgbClr val="2F3E46"/>
+                </a:solidFill>
+                <a:latin typeface="Georgia" pitchFamily="34" charset="0"/>
+                <a:ea typeface="Georgia" pitchFamily="34" charset="-122"/>
+                <a:cs typeface="Georgia" pitchFamily="34" charset="-120"/>
+              </a:rPr>
+              <a:t>Procurement will follow.</a:t>
+            </a:r>
+            <a:endParaRPr lang="en-US" sz="1900" dirty="0"/>
+          </a:p>
+        </p:txBody>
+      </p:sp>
+      <p:sp>
+        <p:nvSpPr>
+          <p:cNvPr id="21" name="Text 19"/>
+          <p:cNvSpPr/>
+          <p:nvPr/>
+        </p:nvSpPr>
+        <p:spPr>
+          <a:xfrm>
+            <a:off x="1874520" y="5202936"/>
+            <a:ext cx="9585655" cy="411480"/>
+          </a:xfrm>
+          <a:prstGeom prst="rect">
+            <a:avLst/>
+          </a:prstGeom>
+          <a:noFill/>
+          <a:ln/>
+        </p:spPr>
+        <p:txBody>
+          <a:bodyPr wrap="square" lIns="0" tIns="0" rIns="0" bIns="0" rtlCol="0" anchor="t"/>
+          <a:lstStyle/>
+          <a:p>
+            <a:pPr algn="l" indent="0" marL="0">
+              <a:buNone/>
+            </a:pPr>
+            <a:r>
+              <a:rPr lang="en-US" sz="1300" dirty="0">
+                <a:solidFill>
+                  <a:srgbClr val="1F2937"/>
+                </a:solidFill>
+                <a:latin typeface="Calibri" pitchFamily="34" charset="0"/>
+                <a:ea typeface="Calibri" pitchFamily="34" charset="-122"/>
+                <a:cs typeface="Calibri" pitchFamily="34" charset="-120"/>
+              </a:rPr>
+              <a:t>Same pattern as IAM, endpoint detection, and cloud security posture management: a missing control layer becomes required procurement within 12–18 months.</a:t>
+            </a:r>
+            <a:endParaRPr lang="en-US" sz="1300" dirty="0"/>
+          </a:p>
+        </p:txBody>
+      </p:sp>
+      <p:sp>
+        <p:nvSpPr>
+          <p:cNvPr id="22" name="Text 20"/>
+          <p:cNvSpPr/>
+          <p:nvPr/>
+        </p:nvSpPr>
+        <p:spPr>
+          <a:xfrm>
+            <a:off x="548640" y="5852160"/>
+            <a:ext cx="11094415" cy="411480"/>
+          </a:xfrm>
+          <a:prstGeom prst="rect">
+            <a:avLst/>
+          </a:prstGeom>
+          <a:noFill/>
+          <a:ln/>
+        </p:spPr>
+        <p:txBody>
+          <a:bodyPr wrap="square" lIns="0" tIns="0" rIns="0" bIns="0" rtlCol="0" anchor="ctr"/>
+          <a:lstStyle/>
+          <a:p>
+            <a:pPr algn="ctr" indent="0" marL="0">
+              <a:buNone/>
+            </a:pPr>
+            <a:r>
+              <a:rPr lang="en-US" sz="1500" i="1" dirty="0">
+                <a:solidFill>
+                  <a:srgbClr val="2F3E46"/>
+                </a:solidFill>
+                <a:latin typeface="Georgia" pitchFamily="34" charset="0"/>
+                <a:ea typeface="Georgia" pitchFamily="34" charset="-122"/>
+                <a:cs typeface="Georgia" pitchFamily="34" charset="-120"/>
+              </a:rPr>
+              <a:t>RuriSkry is our working answer for Azure — open source, so the pattern can spread while the category gets built out.</a:t>
             </a:r>
             <a:endParaRPr lang="en-US" sz="1500" dirty="0"/>
           </a:p>
@@ -8783,7 +8941,7 @@
                 <a:ea typeface="Georgia" pitchFamily="34" charset="-122"/>
                 <a:cs typeface="Georgia" pitchFamily="34" charset="-120"/>
               </a:rPr>
-              <a:t>Two systems, one platform</a:t>
+              <a:t>Why this matters to the business</a:t>
             </a:r>
             <a:endParaRPr lang="en-US" sz="3600" dirty="0"/>
           </a:p>
@@ -8869,53 +9027,14 @@
       </p:sp>
       <p:sp>
         <p:nvSpPr>
-          <p:cNvPr id="6" name="Text 4"/>
-          <p:cNvSpPr/>
-          <p:nvPr/>
-        </p:nvSpPr>
-        <p:spPr>
-          <a:xfrm>
-            <a:off x="548640" y="1600200"/>
-            <a:ext cx="11094415" cy="457200"/>
-          </a:xfrm>
-          <a:prstGeom prst="rect">
-            <a:avLst/>
-          </a:prstGeom>
-          <a:noFill/>
-          <a:ln/>
-        </p:spPr>
-        <p:txBody>
-          <a:bodyPr wrap="square" lIns="0" tIns="0" rIns="0" bIns="0" rtlCol="0" anchor="t"/>
-          <a:lstStyle/>
-          <a:p>
-            <a:pPr algn="l" indent="0" marL="0">
-              <a:buNone/>
-            </a:pPr>
-            <a:r>
-              <a:rPr lang="en-US" sz="1600" i="1" dirty="0">
-                <a:solidFill>
-                  <a:srgbClr val="1F2937"/>
-                </a:solidFill>
-                <a:latin typeface="Calibri" pitchFamily="34" charset="0"/>
-                <a:ea typeface="Calibri" pitchFamily="34" charset="-122"/>
-                <a:cs typeface="Calibri" pitchFamily="34" charset="-120"/>
-              </a:rPr>
-              <a:t>Ops agents supply the changes. The CAB decides whether they ship.</a:t>
-            </a:r>
-            <a:endParaRPr lang="en-US" sz="1600" dirty="0"/>
-          </a:p>
-        </p:txBody>
-      </p:sp>
-      <p:sp>
-        <p:nvSpPr>
-          <p:cNvPr id="7" name="Shape 5"/>
-          <p:cNvSpPr/>
-          <p:nvPr/>
-        </p:nvSpPr>
-        <p:spPr>
-          <a:xfrm>
-            <a:off x="548640" y="2377440"/>
-            <a:ext cx="5090008" cy="3657600"/>
+          <p:cNvPr id="6" name="Shape 4"/>
+          <p:cNvSpPr/>
+          <p:nvPr/>
+        </p:nvSpPr>
+        <p:spPr>
+          <a:xfrm>
+            <a:off x="548640" y="1737360"/>
+            <a:ext cx="11094415" cy="822960"/>
           </a:xfrm>
           <a:prstGeom prst="rect">
             <a:avLst/>
@@ -8933,424 +9052,16 @@
       </p:sp>
       <p:sp>
         <p:nvSpPr>
-          <p:cNvPr id="8" name="Text 6"/>
-          <p:cNvSpPr/>
-          <p:nvPr/>
-        </p:nvSpPr>
-        <p:spPr>
-          <a:xfrm>
-            <a:off x="914400" y="2651760"/>
-            <a:ext cx="4358488" cy="457200"/>
-          </a:xfrm>
-          <a:prstGeom prst="rect">
-            <a:avLst/>
-          </a:prstGeom>
-          <a:noFill/>
-          <a:ln/>
-        </p:spPr>
-        <p:txBody>
-          <a:bodyPr wrap="square" lIns="0" tIns="0" rIns="0" bIns="0" rtlCol="0" anchor="ctr"/>
-          <a:lstStyle/>
-          <a:p>
-            <a:pPr indent="0" marL="0">
-              <a:buNone/>
-            </a:pPr>
-            <a:r>
-              <a:rPr lang="en-US" sz="2200" b="1" dirty="0">
-                <a:solidFill>
-                  <a:srgbClr val="2F3E46"/>
-                </a:solidFill>
-                <a:latin typeface="Georgia" pitchFamily="34" charset="0"/>
-                <a:ea typeface="Georgia" pitchFamily="34" charset="-122"/>
-                <a:cs typeface="Georgia" pitchFamily="34" charset="-120"/>
-              </a:rPr>
-              <a:t>Ops Agents</a:t>
-            </a:r>
-            <a:endParaRPr lang="en-US" sz="2200" dirty="0"/>
-          </a:p>
-        </p:txBody>
-      </p:sp>
-      <p:sp>
-        <p:nvSpPr>
-          <p:cNvPr id="9" name="Text 7"/>
-          <p:cNvSpPr/>
-          <p:nvPr/>
-        </p:nvSpPr>
-        <p:spPr>
-          <a:xfrm>
-            <a:off x="914400" y="3108960"/>
-            <a:ext cx="4358488" cy="320040"/>
-          </a:xfrm>
-          <a:prstGeom prst="rect">
-            <a:avLst/>
-          </a:prstGeom>
-          <a:noFill/>
-          <a:ln/>
-        </p:spPr>
-        <p:txBody>
-          <a:bodyPr wrap="square" lIns="0" tIns="0" rIns="0" bIns="0" rtlCol="0" anchor="ctr"/>
-          <a:lstStyle/>
-          <a:p>
-            <a:pPr indent="0" marL="0">
-              <a:buNone/>
-            </a:pPr>
-            <a:r>
-              <a:rPr lang="en-US" sz="1300" i="1" dirty="0">
-                <a:solidFill>
-                  <a:srgbClr val="64748B"/>
-                </a:solidFill>
-                <a:latin typeface="Calibri" pitchFamily="34" charset="0"/>
-                <a:ea typeface="Calibri" pitchFamily="34" charset="-122"/>
-                <a:cs typeface="Calibri" pitchFamily="34" charset="-120"/>
-              </a:rPr>
-              <a:t>the proposers</a:t>
-            </a:r>
-            <a:endParaRPr lang="en-US" sz="1300" dirty="0"/>
-          </a:p>
-        </p:txBody>
-      </p:sp>
-      <p:pic>
-        <p:nvPicPr>
-          <p:cNvPr id="10" name="Image 0" descr="preencoded.png">    </p:cNvPr>
-          <p:cNvPicPr>
-            <a:picLocks noChangeAspect="1"/>
-          </p:cNvPicPr>
-          <p:nvPr/>
-        </p:nvPicPr>
-        <p:blipFill>
-          <a:blip r:embed="rId1"/>
-          <a:stretch>
-            <a:fillRect/>
-          </a:stretch>
-        </p:blipFill>
-        <p:spPr>
-          <a:xfrm>
-            <a:off x="914400" y="3657600"/>
-            <a:ext cx="365760" cy="365760"/>
-          </a:xfrm>
-          <a:prstGeom prst="rect">
-            <a:avLst/>
-          </a:prstGeom>
-        </p:spPr>
-      </p:pic>
-      <p:sp>
-        <p:nvSpPr>
-          <p:cNvPr id="11" name="Text 8"/>
-          <p:cNvSpPr/>
-          <p:nvPr/>
-        </p:nvSpPr>
-        <p:spPr>
-          <a:xfrm>
-            <a:off x="1463040" y="3611880"/>
-            <a:ext cx="3809848" cy="320040"/>
-          </a:xfrm>
-          <a:prstGeom prst="rect">
-            <a:avLst/>
-          </a:prstGeom>
-          <a:noFill/>
-          <a:ln/>
-        </p:spPr>
-        <p:txBody>
-          <a:bodyPr wrap="square" lIns="0" tIns="0" rIns="0" bIns="0" rtlCol="0" anchor="ctr"/>
-          <a:lstStyle/>
-          <a:p>
-            <a:pPr indent="0" marL="0">
-              <a:buNone/>
-            </a:pPr>
-            <a:r>
-              <a:rPr lang="en-US" sz="1500" b="1" dirty="0">
-                <a:solidFill>
-                  <a:srgbClr val="1F2937"/>
-                </a:solidFill>
-                <a:latin typeface="Georgia" pitchFamily="34" charset="0"/>
-                <a:ea typeface="Georgia" pitchFamily="34" charset="-122"/>
-                <a:cs typeface="Georgia" pitchFamily="34" charset="-120"/>
-              </a:rPr>
-              <a:t>Monitoring Agent</a:t>
-            </a:r>
-            <a:endParaRPr lang="en-US" sz="1500" dirty="0"/>
-          </a:p>
-        </p:txBody>
-      </p:sp>
-      <p:sp>
-        <p:nvSpPr>
-          <p:cNvPr id="12" name="Text 9"/>
-          <p:cNvSpPr/>
-          <p:nvPr/>
-        </p:nvSpPr>
-        <p:spPr>
-          <a:xfrm>
-            <a:off x="1463040" y="3931920"/>
-            <a:ext cx="3809848" cy="320040"/>
-          </a:xfrm>
-          <a:prstGeom prst="rect">
-            <a:avLst/>
-          </a:prstGeom>
-          <a:noFill/>
-          <a:ln/>
-        </p:spPr>
-        <p:txBody>
-          <a:bodyPr wrap="square" lIns="0" tIns="0" rIns="0" bIns="0" rtlCol="0" anchor="ctr"/>
-          <a:lstStyle/>
-          <a:p>
-            <a:pPr indent="0" marL="0">
-              <a:buNone/>
-            </a:pPr>
-            <a:r>
-              <a:rPr lang="en-US" sz="1200" dirty="0">
-                <a:solidFill>
-                  <a:srgbClr val="64748B"/>
-                </a:solidFill>
-                <a:latin typeface="Calibri" pitchFamily="34" charset="0"/>
-                <a:ea typeface="Calibri" pitchFamily="34" charset="-122"/>
-                <a:cs typeface="Calibri" pitchFamily="34" charset="-120"/>
-              </a:rPr>
-              <a:t>VM health, alerts, observability gaps</a:t>
-            </a:r>
-            <a:endParaRPr lang="en-US" sz="1200" dirty="0"/>
-          </a:p>
-        </p:txBody>
-      </p:sp>
-      <p:pic>
-        <p:nvPicPr>
-          <p:cNvPr id="13" name="Image 1" descr="preencoded.png">    </p:cNvPr>
-          <p:cNvPicPr>
-            <a:picLocks noChangeAspect="1"/>
-          </p:cNvPicPr>
-          <p:nvPr/>
-        </p:nvPicPr>
-        <p:blipFill>
-          <a:blip r:embed="rId2"/>
-          <a:stretch>
-            <a:fillRect/>
-          </a:stretch>
-        </p:blipFill>
-        <p:spPr>
-          <a:xfrm>
-            <a:off x="914400" y="4434840"/>
-            <a:ext cx="365760" cy="365760"/>
-          </a:xfrm>
-          <a:prstGeom prst="rect">
-            <a:avLst/>
-          </a:prstGeom>
-        </p:spPr>
-      </p:pic>
-      <p:sp>
-        <p:nvSpPr>
-          <p:cNvPr id="14" name="Text 10"/>
-          <p:cNvSpPr/>
-          <p:nvPr/>
-        </p:nvSpPr>
-        <p:spPr>
-          <a:xfrm>
-            <a:off x="1463040" y="4389120"/>
-            <a:ext cx="3809848" cy="320040"/>
-          </a:xfrm>
-          <a:prstGeom prst="rect">
-            <a:avLst/>
-          </a:prstGeom>
-          <a:noFill/>
-          <a:ln/>
-        </p:spPr>
-        <p:txBody>
-          <a:bodyPr wrap="square" lIns="0" tIns="0" rIns="0" bIns="0" rtlCol="0" anchor="ctr"/>
-          <a:lstStyle/>
-          <a:p>
-            <a:pPr indent="0" marL="0">
-              <a:buNone/>
-            </a:pPr>
-            <a:r>
-              <a:rPr lang="en-US" sz="1500" b="1" dirty="0">
-                <a:solidFill>
-                  <a:srgbClr val="1F2937"/>
-                </a:solidFill>
-                <a:latin typeface="Georgia" pitchFamily="34" charset="0"/>
-                <a:ea typeface="Georgia" pitchFamily="34" charset="-122"/>
-                <a:cs typeface="Georgia" pitchFamily="34" charset="-120"/>
-              </a:rPr>
-              <a:t>Cost Agent</a:t>
-            </a:r>
-            <a:endParaRPr lang="en-US" sz="1500" dirty="0"/>
-          </a:p>
-        </p:txBody>
-      </p:sp>
-      <p:sp>
-        <p:nvSpPr>
-          <p:cNvPr id="15" name="Text 11"/>
-          <p:cNvSpPr/>
-          <p:nvPr/>
-        </p:nvSpPr>
-        <p:spPr>
-          <a:xfrm>
-            <a:off x="1463040" y="4709160"/>
-            <a:ext cx="3809848" cy="320040"/>
-          </a:xfrm>
-          <a:prstGeom prst="rect">
-            <a:avLst/>
-          </a:prstGeom>
-          <a:noFill/>
-          <a:ln/>
-        </p:spPr>
-        <p:txBody>
-          <a:bodyPr wrap="square" lIns="0" tIns="0" rIns="0" bIns="0" rtlCol="0" anchor="ctr"/>
-          <a:lstStyle/>
-          <a:p>
-            <a:pPr indent="0" marL="0">
-              <a:buNone/>
-            </a:pPr>
-            <a:r>
-              <a:rPr lang="en-US" sz="1200" dirty="0">
-                <a:solidFill>
-                  <a:srgbClr val="64748B"/>
-                </a:solidFill>
-                <a:latin typeface="Calibri" pitchFamily="34" charset="0"/>
-                <a:ea typeface="Calibri" pitchFamily="34" charset="-122"/>
-                <a:cs typeface="Calibri" pitchFamily="34" charset="-120"/>
-              </a:rPr>
-              <a:t>Waste, orphaned disks, over-provisioning</a:t>
-            </a:r>
-            <a:endParaRPr lang="en-US" sz="1200" dirty="0"/>
-          </a:p>
-        </p:txBody>
-      </p:sp>
-      <p:pic>
-        <p:nvPicPr>
-          <p:cNvPr id="16" name="Image 2" descr="preencoded.png">    </p:cNvPr>
-          <p:cNvPicPr>
-            <a:picLocks noChangeAspect="1"/>
-          </p:cNvPicPr>
-          <p:nvPr/>
-        </p:nvPicPr>
-        <p:blipFill>
-          <a:blip r:embed="rId3"/>
-          <a:stretch>
-            <a:fillRect/>
-          </a:stretch>
-        </p:blipFill>
-        <p:spPr>
-          <a:xfrm>
-            <a:off x="914400" y="5212080"/>
-            <a:ext cx="365760" cy="365760"/>
-          </a:xfrm>
-          <a:prstGeom prst="rect">
-            <a:avLst/>
-          </a:prstGeom>
-        </p:spPr>
-      </p:pic>
-      <p:sp>
-        <p:nvSpPr>
-          <p:cNvPr id="17" name="Text 12"/>
-          <p:cNvSpPr/>
-          <p:nvPr/>
-        </p:nvSpPr>
-        <p:spPr>
-          <a:xfrm>
-            <a:off x="1463040" y="5166360"/>
-            <a:ext cx="3809848" cy="320040"/>
-          </a:xfrm>
-          <a:prstGeom prst="rect">
-            <a:avLst/>
-          </a:prstGeom>
-          <a:noFill/>
-          <a:ln/>
-        </p:spPr>
-        <p:txBody>
-          <a:bodyPr wrap="square" lIns="0" tIns="0" rIns="0" bIns="0" rtlCol="0" anchor="ctr"/>
-          <a:lstStyle/>
-          <a:p>
-            <a:pPr indent="0" marL="0">
-              <a:buNone/>
-            </a:pPr>
-            <a:r>
-              <a:rPr lang="en-US" sz="1500" b="1" dirty="0">
-                <a:solidFill>
-                  <a:srgbClr val="1F2937"/>
-                </a:solidFill>
-                <a:latin typeface="Georgia" pitchFamily="34" charset="0"/>
-                <a:ea typeface="Georgia" pitchFamily="34" charset="-122"/>
-                <a:cs typeface="Georgia" pitchFamily="34" charset="-120"/>
-              </a:rPr>
-              <a:t>Deploy Agent</a:t>
-            </a:r>
-            <a:endParaRPr lang="en-US" sz="1500" dirty="0"/>
-          </a:p>
-        </p:txBody>
-      </p:sp>
-      <p:sp>
-        <p:nvSpPr>
-          <p:cNvPr id="18" name="Text 13"/>
-          <p:cNvSpPr/>
-          <p:nvPr/>
-        </p:nvSpPr>
-        <p:spPr>
-          <a:xfrm>
-            <a:off x="1463040" y="5486400"/>
-            <a:ext cx="3809848" cy="320040"/>
-          </a:xfrm>
-          <a:prstGeom prst="rect">
-            <a:avLst/>
-          </a:prstGeom>
-          <a:noFill/>
-          <a:ln/>
-        </p:spPr>
-        <p:txBody>
-          <a:bodyPr wrap="square" lIns="0" tIns="0" rIns="0" bIns="0" rtlCol="0" anchor="ctr"/>
-          <a:lstStyle/>
-          <a:p>
-            <a:pPr indent="0" marL="0">
-              <a:buNone/>
-            </a:pPr>
-            <a:r>
-              <a:rPr lang="en-US" sz="1200" dirty="0">
-                <a:solidFill>
-                  <a:srgbClr val="64748B"/>
-                </a:solidFill>
-                <a:latin typeface="Calibri" pitchFamily="34" charset="0"/>
-                <a:ea typeface="Calibri" pitchFamily="34" charset="-122"/>
-                <a:cs typeface="Calibri" pitchFamily="34" charset="-120"/>
-              </a:rPr>
-              <a:t>Security posture, NSG rules, compliance</a:t>
-            </a:r>
-            <a:endParaRPr lang="en-US" sz="1200" dirty="0"/>
-          </a:p>
-        </p:txBody>
-      </p:sp>
-      <p:pic>
-        <p:nvPicPr>
-          <p:cNvPr id="19" name="Image 3" descr="preencoded.png">    </p:cNvPr>
-          <p:cNvPicPr>
-            <a:picLocks noChangeAspect="1"/>
-          </p:cNvPicPr>
-          <p:nvPr/>
-        </p:nvPicPr>
-        <p:blipFill>
-          <a:blip r:embed="rId4"/>
-          <a:stretch>
-            <a:fillRect/>
-          </a:stretch>
-        </p:blipFill>
-        <p:spPr>
-          <a:xfrm>
-            <a:off x="5867248" y="3977640"/>
-            <a:ext cx="457200" cy="457200"/>
-          </a:xfrm>
-          <a:prstGeom prst="rect">
-            <a:avLst/>
-          </a:prstGeom>
-        </p:spPr>
-      </p:pic>
-      <p:sp>
-        <p:nvSpPr>
-          <p:cNvPr id="20" name="Shape 14"/>
-          <p:cNvSpPr/>
-          <p:nvPr/>
-        </p:nvSpPr>
-        <p:spPr>
-          <a:xfrm>
-            <a:off x="6553048" y="2377440"/>
-            <a:ext cx="5090008" cy="3657600"/>
-          </a:xfrm>
-          <a:prstGeom prst="rect">
+          <p:cNvPr id="7" name="Shape 5"/>
+          <p:cNvSpPr/>
+          <p:nvPr/>
+        </p:nvSpPr>
+        <p:spPr>
+          <a:xfrm>
+            <a:off x="731520" y="1874520"/>
+            <a:ext cx="548640" cy="548640"/>
+          </a:xfrm>
+          <a:prstGeom prst="ellipse">
             <a:avLst/>
           </a:prstGeom>
           <a:solidFill>
@@ -9364,16 +9075,40 @@
           </a:ln>
         </p:spPr>
       </p:sp>
-      <p:sp>
-        <p:nvSpPr>
-          <p:cNvPr id="21" name="Text 15"/>
-          <p:cNvSpPr/>
-          <p:nvPr/>
-        </p:nvSpPr>
-        <p:spPr>
-          <a:xfrm>
-            <a:off x="6918808" y="2651760"/>
-            <a:ext cx="4358488" cy="457200"/>
+      <p:pic>
+        <p:nvPicPr>
+          <p:cNvPr id="8" name="Image 0" descr="preencoded.png">    </p:cNvPr>
+          <p:cNvPicPr>
+            <a:picLocks noChangeAspect="1"/>
+          </p:cNvPicPr>
+          <p:nvPr/>
+        </p:nvPicPr>
+        <p:blipFill>
+          <a:blip r:embed="rId1"/>
+          <a:stretch>
+            <a:fillRect/>
+          </a:stretch>
+        </p:blipFill>
+        <p:spPr>
+          <a:xfrm>
+            <a:off x="822960" y="1965960"/>
+            <a:ext cx="365760" cy="365760"/>
+          </a:xfrm>
+          <a:prstGeom prst="rect">
+            <a:avLst/>
+          </a:prstGeom>
+        </p:spPr>
+      </p:pic>
+      <p:sp>
+        <p:nvSpPr>
+          <p:cNvPr id="9" name="Text 6"/>
+          <p:cNvSpPr/>
+          <p:nvPr/>
+        </p:nvSpPr>
+        <p:spPr>
+          <a:xfrm>
+            <a:off x="1463040" y="1737360"/>
+            <a:ext cx="4389120" cy="822960"/>
           </a:xfrm>
           <a:prstGeom prst="rect">
             <a:avLst/>
@@ -9385,34 +9120,34 @@
           <a:bodyPr wrap="square" lIns="0" tIns="0" rIns="0" bIns="0" rtlCol="0" anchor="ctr"/>
           <a:lstStyle/>
           <a:p>
-            <a:pPr indent="0" marL="0">
-              <a:buNone/>
-            </a:pPr>
-            <a:r>
-              <a:rPr lang="en-US" sz="2200" b="1" dirty="0">
-                <a:solidFill>
-                  <a:srgbClr val="F59E0B"/>
+            <a:pPr algn="l" indent="0" marL="0">
+              <a:buNone/>
+            </a:pPr>
+            <a:r>
+              <a:rPr lang="en-US" sz="1600" b="1" dirty="0">
+                <a:solidFill>
+                  <a:srgbClr val="2F3E46"/>
                 </a:solidFill>
                 <a:latin typeface="Georgia" pitchFamily="34" charset="0"/>
                 <a:ea typeface="Georgia" pitchFamily="34" charset="-122"/>
                 <a:cs typeface="Georgia" pitchFamily="34" charset="-120"/>
               </a:rPr>
-              <a:t>AI CAB</a:t>
-            </a:r>
-            <a:endParaRPr lang="en-US" sz="2200" dirty="0"/>
-          </a:p>
-        </p:txBody>
-      </p:sp>
-      <p:sp>
-        <p:nvSpPr>
-          <p:cNvPr id="22" name="Text 16"/>
-          <p:cNvSpPr/>
-          <p:nvPr/>
-        </p:nvSpPr>
-        <p:spPr>
-          <a:xfrm>
-            <a:off x="6918808" y="3108960"/>
-            <a:ext cx="4358488" cy="320040"/>
+              <a:t>Containment of AI-driven incidents</a:t>
+            </a:r>
+            <a:endParaRPr lang="en-US" sz="1600" dirty="0"/>
+          </a:p>
+        </p:txBody>
+      </p:sp>
+      <p:sp>
+        <p:nvSpPr>
+          <p:cNvPr id="10" name="Text 7"/>
+          <p:cNvSpPr/>
+          <p:nvPr/>
+        </p:nvSpPr>
+        <p:spPr>
+          <a:xfrm>
+            <a:off x="5943600" y="1737360"/>
+            <a:ext cx="5516575" cy="822960"/>
           </a:xfrm>
           <a:prstGeom prst="rect">
             <a:avLst/>
@@ -9424,19 +9159,19 @@
           <a:bodyPr wrap="square" lIns="0" tIns="0" rIns="0" bIns="0" rtlCol="0" anchor="ctr"/>
           <a:lstStyle/>
           <a:p>
-            <a:pPr indent="0" marL="0">
-              <a:buNone/>
-            </a:pPr>
-            <a:r>
-              <a:rPr lang="en-US" sz="1300" i="1" dirty="0">
-                <a:solidFill>
-                  <a:srgbClr val="CBD5E1"/>
+            <a:pPr algn="l" indent="0" marL="0">
+              <a:buNone/>
+            </a:pPr>
+            <a:r>
+              <a:rPr lang="en-US" sz="1300" dirty="0">
+                <a:solidFill>
+                  <a:srgbClr val="1F2937"/>
                 </a:solidFill>
                 <a:latin typeface="Calibri" pitchFamily="34" charset="0"/>
                 <a:ea typeface="Calibri" pitchFamily="34" charset="-122"/>
                 <a:cs typeface="Calibri" pitchFamily="34" charset="-120"/>
               </a:rPr>
-              <a:t>the adjudicators</a:t>
+              <a:t>Every agent action pre-scored before it reaches Azure.</a:t>
             </a:r>
             <a:endParaRPr lang="en-US" sz="1300" dirty="0"/>
           </a:p>
@@ -9444,24 +9179,24 @@
       </p:sp>
       <p:sp>
         <p:nvSpPr>
-          <p:cNvPr id="23" name="Shape 17"/>
-          <p:cNvSpPr/>
-          <p:nvPr/>
-        </p:nvSpPr>
-        <p:spPr>
-          <a:xfrm>
-            <a:off x="6964528" y="3776472"/>
-            <a:ext cx="137160" cy="137160"/>
-          </a:xfrm>
-          <a:prstGeom prst="ellipse">
+          <p:cNvPr id="11" name="Shape 8"/>
+          <p:cNvSpPr/>
+          <p:nvPr/>
+        </p:nvSpPr>
+        <p:spPr>
+          <a:xfrm>
+            <a:off x="548640" y="2651760"/>
+            <a:ext cx="11094415" cy="822960"/>
+          </a:xfrm>
+          <a:prstGeom prst="rect">
             <a:avLst/>
           </a:prstGeom>
           <a:solidFill>
-            <a:srgbClr val="F59E0B"/>
+            <a:srgbClr val="F7F7F5"/>
           </a:solidFill>
           <a:ln w="12700">
             <a:solidFill>
-              <a:srgbClr val="F59E0B"/>
+              <a:srgbClr val="E9E9E4"/>
             </a:solidFill>
             <a:prstDash val="solid"/>
           </a:ln>
@@ -9469,14 +9204,63 @@
       </p:sp>
       <p:sp>
         <p:nvSpPr>
-          <p:cNvPr id="24" name="Text 18"/>
-          <p:cNvSpPr/>
-          <p:nvPr/>
-        </p:nvSpPr>
-        <p:spPr>
-          <a:xfrm>
-            <a:off x="7284568" y="3611880"/>
-            <a:ext cx="2286000" cy="457200"/>
+          <p:cNvPr id="12" name="Shape 9"/>
+          <p:cNvSpPr/>
+          <p:nvPr/>
+        </p:nvSpPr>
+        <p:spPr>
+          <a:xfrm>
+            <a:off x="731520" y="2788920"/>
+            <a:ext cx="548640" cy="548640"/>
+          </a:xfrm>
+          <a:prstGeom prst="ellipse">
+            <a:avLst/>
+          </a:prstGeom>
+          <a:solidFill>
+            <a:srgbClr val="2F3E46"/>
+          </a:solidFill>
+          <a:ln w="12700">
+            <a:solidFill>
+              <a:srgbClr val="2F3E46"/>
+            </a:solidFill>
+            <a:prstDash val="solid"/>
+          </a:ln>
+        </p:spPr>
+      </p:sp>
+      <p:pic>
+        <p:nvPicPr>
+          <p:cNvPr id="13" name="Image 1" descr="preencoded.png">    </p:cNvPr>
+          <p:cNvPicPr>
+            <a:picLocks noChangeAspect="1"/>
+          </p:cNvPicPr>
+          <p:nvPr/>
+        </p:nvPicPr>
+        <p:blipFill>
+          <a:blip r:embed="rId2"/>
+          <a:stretch>
+            <a:fillRect/>
+          </a:stretch>
+        </p:blipFill>
+        <p:spPr>
+          <a:xfrm>
+            <a:off x="822960" y="2880360"/>
+            <a:ext cx="365760" cy="365760"/>
+          </a:xfrm>
+          <a:prstGeom prst="rect">
+            <a:avLst/>
+          </a:prstGeom>
+        </p:spPr>
+      </p:pic>
+      <p:sp>
+        <p:nvSpPr>
+          <p:cNvPr id="14" name="Text 10"/>
+          <p:cNvSpPr/>
+          <p:nvPr/>
+        </p:nvSpPr>
+        <p:spPr>
+          <a:xfrm>
+            <a:off x="1463040" y="2651760"/>
+            <a:ext cx="4389120" cy="822960"/>
           </a:xfrm>
           <a:prstGeom prst="rect">
             <a:avLst/>
@@ -9488,34 +9272,34 @@
           <a:bodyPr wrap="square" lIns="0" tIns="0" rIns="0" bIns="0" rtlCol="0" anchor="ctr"/>
           <a:lstStyle/>
           <a:p>
-            <a:pPr indent="0" marL="0">
-              <a:buNone/>
-            </a:pPr>
-            <a:r>
-              <a:rPr lang="en-US" sz="1500" b="1" dirty="0">
-                <a:solidFill>
-                  <a:srgbClr val="FFFFFF"/>
+            <a:pPr algn="l" indent="0" marL="0">
+              <a:buNone/>
+            </a:pPr>
+            <a:r>
+              <a:rPr lang="en-US" sz="1600" b="1" dirty="0">
+                <a:solidFill>
+                  <a:srgbClr val="2F3E46"/>
                 </a:solidFill>
                 <a:latin typeface="Georgia" pitchFamily="34" charset="0"/>
                 <a:ea typeface="Georgia" pitchFamily="34" charset="-122"/>
                 <a:cs typeface="Georgia" pitchFamily="34" charset="-120"/>
               </a:rPr>
-              <a:t>Blast Radius</a:t>
-            </a:r>
-            <a:endParaRPr lang="en-US" sz="1500" dirty="0"/>
-          </a:p>
-        </p:txBody>
-      </p:sp>
-      <p:sp>
-        <p:nvSpPr>
-          <p:cNvPr id="25" name="Text 19"/>
-          <p:cNvSpPr/>
-          <p:nvPr/>
-        </p:nvSpPr>
-        <p:spPr>
-          <a:xfrm>
-            <a:off x="9387688" y="3611880"/>
-            <a:ext cx="1889608" cy="457200"/>
+              <a:t>Audit-ready on day one</a:t>
+            </a:r>
+            <a:endParaRPr lang="en-US" sz="1600" dirty="0"/>
+          </a:p>
+        </p:txBody>
+      </p:sp>
+      <p:sp>
+        <p:nvSpPr>
+          <p:cNvPr id="15" name="Text 11"/>
+          <p:cNvSpPr/>
+          <p:nvPr/>
+        </p:nvSpPr>
+        <p:spPr>
+          <a:xfrm>
+            <a:off x="5943600" y="2651760"/>
+            <a:ext cx="5516575" cy="822960"/>
           </a:xfrm>
           <a:prstGeom prst="rect">
             <a:avLst/>
@@ -9527,44 +9311,44 @@
           <a:bodyPr wrap="square" lIns="0" tIns="0" rIns="0" bIns="0" rtlCol="0" anchor="ctr"/>
           <a:lstStyle/>
           <a:p>
-            <a:pPr indent="0" marL="0">
-              <a:buNone/>
-            </a:pPr>
-            <a:r>
-              <a:rPr lang="en-US" sz="1200" dirty="0">
-                <a:solidFill>
-                  <a:srgbClr val="CBD5E1"/>
+            <a:pPr algn="l" indent="0" marL="0">
+              <a:buNone/>
+            </a:pPr>
+            <a:r>
+              <a:rPr lang="en-US" sz="1300" dirty="0">
+                <a:solidFill>
+                  <a:srgbClr val="1F2937"/>
                 </a:solidFill>
                 <a:latin typeface="Calibri" pitchFamily="34" charset="0"/>
                 <a:ea typeface="Calibri" pitchFamily="34" charset="-122"/>
                 <a:cs typeface="Calibri" pitchFamily="34" charset="-120"/>
               </a:rPr>
-              <a:t>Downstream impact</a:t>
-            </a:r>
-            <a:endParaRPr lang="en-US" sz="1200" dirty="0"/>
-          </a:p>
-        </p:txBody>
-      </p:sp>
-      <p:sp>
-        <p:nvSpPr>
-          <p:cNvPr id="26" name="Shape 20"/>
-          <p:cNvSpPr/>
-          <p:nvPr/>
-        </p:nvSpPr>
-        <p:spPr>
-          <a:xfrm>
-            <a:off x="6964528" y="4325112"/>
-            <a:ext cx="137160" cy="137160"/>
-          </a:xfrm>
-          <a:prstGeom prst="ellipse">
+              <a:t>Cosmos DB lineage — every decision reconstructable from inputs.</a:t>
+            </a:r>
+            <a:endParaRPr lang="en-US" sz="1300" dirty="0"/>
+          </a:p>
+        </p:txBody>
+      </p:sp>
+      <p:sp>
+        <p:nvSpPr>
+          <p:cNvPr id="16" name="Shape 12"/>
+          <p:cNvSpPr/>
+          <p:nvPr/>
+        </p:nvSpPr>
+        <p:spPr>
+          <a:xfrm>
+            <a:off x="548640" y="3566160"/>
+            <a:ext cx="11094415" cy="822960"/>
+          </a:xfrm>
+          <a:prstGeom prst="rect">
             <a:avLst/>
           </a:prstGeom>
           <a:solidFill>
-            <a:srgbClr val="F59E0B"/>
+            <a:srgbClr val="E9E9E4"/>
           </a:solidFill>
           <a:ln w="12700">
             <a:solidFill>
-              <a:srgbClr val="F59E0B"/>
+              <a:srgbClr val="E9E9E4"/>
             </a:solidFill>
             <a:prstDash val="solid"/>
           </a:ln>
@@ -9572,14 +9356,63 @@
       </p:sp>
       <p:sp>
         <p:nvSpPr>
-          <p:cNvPr id="27" name="Text 21"/>
-          <p:cNvSpPr/>
-          <p:nvPr/>
-        </p:nvSpPr>
-        <p:spPr>
-          <a:xfrm>
-            <a:off x="7284568" y="4160520"/>
-            <a:ext cx="2286000" cy="457200"/>
+          <p:cNvPr id="17" name="Shape 13"/>
+          <p:cNvSpPr/>
+          <p:nvPr/>
+        </p:nvSpPr>
+        <p:spPr>
+          <a:xfrm>
+            <a:off x="731520" y="3703320"/>
+            <a:ext cx="548640" cy="548640"/>
+          </a:xfrm>
+          <a:prstGeom prst="ellipse">
+            <a:avLst/>
+          </a:prstGeom>
+          <a:solidFill>
+            <a:srgbClr val="2F3E46"/>
+          </a:solidFill>
+          <a:ln w="12700">
+            <a:solidFill>
+              <a:srgbClr val="2F3E46"/>
+            </a:solidFill>
+            <a:prstDash val="solid"/>
+          </a:ln>
+        </p:spPr>
+      </p:sp>
+      <p:pic>
+        <p:nvPicPr>
+          <p:cNvPr id="18" name="Image 2" descr="preencoded.png">    </p:cNvPr>
+          <p:cNvPicPr>
+            <a:picLocks noChangeAspect="1"/>
+          </p:cNvPicPr>
+          <p:nvPr/>
+        </p:nvPicPr>
+        <p:blipFill>
+          <a:blip r:embed="rId3"/>
+          <a:stretch>
+            <a:fillRect/>
+          </a:stretch>
+        </p:blipFill>
+        <p:spPr>
+          <a:xfrm>
+            <a:off x="822960" y="3794760"/>
+            <a:ext cx="365760" cy="365760"/>
+          </a:xfrm>
+          <a:prstGeom prst="rect">
+            <a:avLst/>
+          </a:prstGeom>
+        </p:spPr>
+      </p:pic>
+      <p:sp>
+        <p:nvSpPr>
+          <p:cNvPr id="19" name="Text 14"/>
+          <p:cNvSpPr/>
+          <p:nvPr/>
+        </p:nvSpPr>
+        <p:spPr>
+          <a:xfrm>
+            <a:off x="1463040" y="3566160"/>
+            <a:ext cx="4389120" cy="822960"/>
           </a:xfrm>
           <a:prstGeom prst="rect">
             <a:avLst/>
@@ -9591,34 +9424,34 @@
           <a:bodyPr wrap="square" lIns="0" tIns="0" rIns="0" bIns="0" rtlCol="0" anchor="ctr"/>
           <a:lstStyle/>
           <a:p>
-            <a:pPr indent="0" marL="0">
-              <a:buNone/>
-            </a:pPr>
-            <a:r>
-              <a:rPr lang="en-US" sz="1500" b="1" dirty="0">
-                <a:solidFill>
-                  <a:srgbClr val="FFFFFF"/>
+            <a:pPr algn="l" indent="0" marL="0">
+              <a:buNone/>
+            </a:pPr>
+            <a:r>
+              <a:rPr lang="en-US" sz="1600" b="1" dirty="0">
+                <a:solidFill>
+                  <a:srgbClr val="2F3E46"/>
                 </a:solidFill>
                 <a:latin typeface="Georgia" pitchFamily="34" charset="0"/>
                 <a:ea typeface="Georgia" pitchFamily="34" charset="-122"/>
                 <a:cs typeface="Georgia" pitchFamily="34" charset="-120"/>
               </a:rPr>
-              <a:t>Policy</a:t>
-            </a:r>
-            <a:endParaRPr lang="en-US" sz="1500" dirty="0"/>
-          </a:p>
-        </p:txBody>
-      </p:sp>
-      <p:sp>
-        <p:nvSpPr>
-          <p:cNvPr id="28" name="Text 22"/>
-          <p:cNvSpPr/>
-          <p:nvPr/>
-        </p:nvSpPr>
-        <p:spPr>
-          <a:xfrm>
-            <a:off x="9387688" y="4160520"/>
-            <a:ext cx="1889608" cy="457200"/>
+              <a:t>Faster incident response</a:t>
+            </a:r>
+            <a:endParaRPr lang="en-US" sz="1600" dirty="0"/>
+          </a:p>
+        </p:txBody>
+      </p:sp>
+      <p:sp>
+        <p:nvSpPr>
+          <p:cNvPr id="20" name="Text 15"/>
+          <p:cNvSpPr/>
+          <p:nvPr/>
+        </p:nvSpPr>
+        <p:spPr>
+          <a:xfrm>
+            <a:off x="5943600" y="3566160"/>
+            <a:ext cx="5516575" cy="822960"/>
           </a:xfrm>
           <a:prstGeom prst="rect">
             <a:avLst/>
@@ -9630,44 +9463,44 @@
           <a:bodyPr wrap="square" lIns="0" tIns="0" rIns="0" bIns="0" rtlCol="0" anchor="ctr"/>
           <a:lstStyle/>
           <a:p>
-            <a:pPr indent="0" marL="0">
-              <a:buNone/>
-            </a:pPr>
-            <a:r>
-              <a:rPr lang="en-US" sz="1200" dirty="0">
-                <a:solidFill>
-                  <a:srgbClr val="CBD5E1"/>
+            <a:pPr algn="l" indent="0" marL="0">
+              <a:buNone/>
+            </a:pPr>
+            <a:r>
+              <a:rPr lang="en-US" sz="1300" dirty="0">
+                <a:solidFill>
+                  <a:srgbClr val="1F2937"/>
                 </a:solidFill>
                 <a:latin typeface="Calibri" pitchFamily="34" charset="0"/>
                 <a:ea typeface="Calibri" pitchFamily="34" charset="-122"/>
                 <a:cs typeface="Calibri" pitchFamily="34" charset="-120"/>
               </a:rPr>
-              <a:t>Governance compliance</a:t>
-            </a:r>
-            <a:endParaRPr lang="en-US" sz="1200" dirty="0"/>
-          </a:p>
-        </p:txBody>
-      </p:sp>
-      <p:sp>
-        <p:nvSpPr>
-          <p:cNvPr id="29" name="Shape 23"/>
-          <p:cNvSpPr/>
-          <p:nvPr/>
-        </p:nvSpPr>
-        <p:spPr>
-          <a:xfrm>
-            <a:off x="6964528" y="4873752"/>
-            <a:ext cx="137160" cy="137160"/>
-          </a:xfrm>
-          <a:prstGeom prst="ellipse">
+              <a:t>Azure Monitor alerts route through the same pipeline; LLM-verified remediation plan in minutes, rollback pre-staged.</a:t>
+            </a:r>
+            <a:endParaRPr lang="en-US" sz="1300" dirty="0"/>
+          </a:p>
+        </p:txBody>
+      </p:sp>
+      <p:sp>
+        <p:nvSpPr>
+          <p:cNvPr id="21" name="Shape 16"/>
+          <p:cNvSpPr/>
+          <p:nvPr/>
+        </p:nvSpPr>
+        <p:spPr>
+          <a:xfrm>
+            <a:off x="548640" y="4480560"/>
+            <a:ext cx="11094415" cy="822960"/>
+          </a:xfrm>
+          <a:prstGeom prst="rect">
             <a:avLst/>
           </a:prstGeom>
           <a:solidFill>
-            <a:srgbClr val="F59E0B"/>
+            <a:srgbClr val="F7F7F5"/>
           </a:solidFill>
           <a:ln w="12700">
             <a:solidFill>
-              <a:srgbClr val="F59E0B"/>
+              <a:srgbClr val="E9E9E4"/>
             </a:solidFill>
             <a:prstDash val="solid"/>
           </a:ln>
@@ -9675,14 +9508,63 @@
       </p:sp>
       <p:sp>
         <p:nvSpPr>
-          <p:cNvPr id="30" name="Text 24"/>
-          <p:cNvSpPr/>
-          <p:nvPr/>
-        </p:nvSpPr>
-        <p:spPr>
-          <a:xfrm>
-            <a:off x="7284568" y="4709160"/>
-            <a:ext cx="2286000" cy="457200"/>
+          <p:cNvPr id="22" name="Shape 17"/>
+          <p:cNvSpPr/>
+          <p:nvPr/>
+        </p:nvSpPr>
+        <p:spPr>
+          <a:xfrm>
+            <a:off x="731520" y="4617720"/>
+            <a:ext cx="548640" cy="548640"/>
+          </a:xfrm>
+          <a:prstGeom prst="ellipse">
+            <a:avLst/>
+          </a:prstGeom>
+          <a:solidFill>
+            <a:srgbClr val="2F3E46"/>
+          </a:solidFill>
+          <a:ln w="12700">
+            <a:solidFill>
+              <a:srgbClr val="2F3E46"/>
+            </a:solidFill>
+            <a:prstDash val="solid"/>
+          </a:ln>
+        </p:spPr>
+      </p:sp>
+      <p:pic>
+        <p:nvPicPr>
+          <p:cNvPr id="23" name="Image 3" descr="preencoded.png">    </p:cNvPr>
+          <p:cNvPicPr>
+            <a:picLocks noChangeAspect="1"/>
+          </p:cNvPicPr>
+          <p:nvPr/>
+        </p:nvPicPr>
+        <p:blipFill>
+          <a:blip r:embed="rId4"/>
+          <a:stretch>
+            <a:fillRect/>
+          </a:stretch>
+        </p:blipFill>
+        <p:spPr>
+          <a:xfrm>
+            <a:off x="822960" y="4709160"/>
+            <a:ext cx="365760" cy="365760"/>
+          </a:xfrm>
+          <a:prstGeom prst="rect">
+            <a:avLst/>
+          </a:prstGeom>
+        </p:spPr>
+      </p:pic>
+      <p:sp>
+        <p:nvSpPr>
+          <p:cNvPr id="24" name="Text 18"/>
+          <p:cNvSpPr/>
+          <p:nvPr/>
+        </p:nvSpPr>
+        <p:spPr>
+          <a:xfrm>
+            <a:off x="1463040" y="4480560"/>
+            <a:ext cx="4389120" cy="822960"/>
           </a:xfrm>
           <a:prstGeom prst="rect">
             <a:avLst/>
@@ -9694,34 +9576,34 @@
           <a:bodyPr wrap="square" lIns="0" tIns="0" rIns="0" bIns="0" rtlCol="0" anchor="ctr"/>
           <a:lstStyle/>
           <a:p>
-            <a:pPr indent="0" marL="0">
-              <a:buNone/>
-            </a:pPr>
-            <a:r>
-              <a:rPr lang="en-US" sz="1500" b="1" dirty="0">
-                <a:solidFill>
-                  <a:srgbClr val="FFFFFF"/>
+            <a:pPr algn="l" indent="0" marL="0">
+              <a:buNone/>
+            </a:pPr>
+            <a:r>
+              <a:rPr lang="en-US" sz="1600" b="1" dirty="0">
+                <a:solidFill>
+                  <a:srgbClr val="2F3E46"/>
                 </a:solidFill>
                 <a:latin typeface="Georgia" pitchFamily="34" charset="0"/>
                 <a:ea typeface="Georgia" pitchFamily="34" charset="-122"/>
                 <a:cs typeface="Georgia" pitchFamily="34" charset="-120"/>
               </a:rPr>
-              <a:t>Historical</a:t>
-            </a:r>
-            <a:endParaRPr lang="en-US" sz="1500" dirty="0"/>
-          </a:p>
-        </p:txBody>
-      </p:sp>
-      <p:sp>
-        <p:nvSpPr>
-          <p:cNvPr id="31" name="Text 25"/>
-          <p:cNvSpPr/>
-          <p:nvPr/>
-        </p:nvSpPr>
-        <p:spPr>
-          <a:xfrm>
-            <a:off x="9387688" y="4709160"/>
-            <a:ext cx="1889608" cy="457200"/>
+              <a:t>Cost discipline</a:t>
+            </a:r>
+            <a:endParaRPr lang="en-US" sz="1600" dirty="0"/>
+          </a:p>
+        </p:txBody>
+      </p:sp>
+      <p:sp>
+        <p:nvSpPr>
+          <p:cNvPr id="25" name="Text 19"/>
+          <p:cNvSpPr/>
+          <p:nvPr/>
+        </p:nvSpPr>
+        <p:spPr>
+          <a:xfrm>
+            <a:off x="5943600" y="4480560"/>
+            <a:ext cx="5516575" cy="822960"/>
           </a:xfrm>
           <a:prstGeom prst="rect">
             <a:avLst/>
@@ -9733,44 +9615,44 @@
           <a:bodyPr wrap="square" lIns="0" tIns="0" rIns="0" bIns="0" rtlCol="0" anchor="ctr"/>
           <a:lstStyle/>
           <a:p>
-            <a:pPr indent="0" marL="0">
-              <a:buNone/>
-            </a:pPr>
-            <a:r>
-              <a:rPr lang="en-US" sz="1200" dirty="0">
-                <a:solidFill>
-                  <a:srgbClr val="CBD5E1"/>
+            <a:pPr algn="l" indent="0" marL="0">
+              <a:buNone/>
+            </a:pPr>
+            <a:r>
+              <a:rPr lang="en-US" sz="1300" dirty="0">
+                <a:solidFill>
+                  <a:srgbClr val="1F2937"/>
                 </a:solidFill>
                 <a:latin typeface="Calibri" pitchFamily="34" charset="0"/>
                 <a:ea typeface="Calibri" pitchFamily="34" charset="-122"/>
                 <a:cs typeface="Calibri" pitchFamily="34" charset="-120"/>
               </a:rPr>
-              <a:t>Incident precedent</a:t>
-            </a:r>
-            <a:endParaRPr lang="en-US" sz="1200" dirty="0"/>
-          </a:p>
-        </p:txBody>
-      </p:sp>
-      <p:sp>
-        <p:nvSpPr>
-          <p:cNvPr id="32" name="Shape 26"/>
-          <p:cNvSpPr/>
-          <p:nvPr/>
-        </p:nvSpPr>
-        <p:spPr>
-          <a:xfrm>
-            <a:off x="6964528" y="5422392"/>
-            <a:ext cx="137160" cy="137160"/>
-          </a:xfrm>
-          <a:prstGeom prst="ellipse">
+              <a:t>Cost agent surfaces waste; governance ensures DR and compliance tags aren't stripped by over-optimisation.</a:t>
+            </a:r>
+            <a:endParaRPr lang="en-US" sz="1300" dirty="0"/>
+          </a:p>
+        </p:txBody>
+      </p:sp>
+      <p:sp>
+        <p:nvSpPr>
+          <p:cNvPr id="26" name="Shape 20"/>
+          <p:cNvSpPr/>
+          <p:nvPr/>
+        </p:nvSpPr>
+        <p:spPr>
+          <a:xfrm>
+            <a:off x="548640" y="5394960"/>
+            <a:ext cx="11094415" cy="822960"/>
+          </a:xfrm>
+          <a:prstGeom prst="rect">
             <a:avLst/>
           </a:prstGeom>
           <a:solidFill>
-            <a:srgbClr val="F59E0B"/>
+            <a:srgbClr val="E9E9E4"/>
           </a:solidFill>
           <a:ln w="12700">
             <a:solidFill>
-              <a:srgbClr val="F59E0B"/>
+              <a:srgbClr val="E9E9E4"/>
             </a:solidFill>
             <a:prstDash val="solid"/>
           </a:ln>
@@ -9778,14 +9660,63 @@
       </p:sp>
       <p:sp>
         <p:nvSpPr>
-          <p:cNvPr id="33" name="Text 27"/>
-          <p:cNvSpPr/>
-          <p:nvPr/>
-        </p:nvSpPr>
-        <p:spPr>
-          <a:xfrm>
-            <a:off x="7284568" y="5257800"/>
-            <a:ext cx="2286000" cy="457200"/>
+          <p:cNvPr id="27" name="Shape 21"/>
+          <p:cNvSpPr/>
+          <p:nvPr/>
+        </p:nvSpPr>
+        <p:spPr>
+          <a:xfrm>
+            <a:off x="731520" y="5532120"/>
+            <a:ext cx="548640" cy="548640"/>
+          </a:xfrm>
+          <a:prstGeom prst="ellipse">
+            <a:avLst/>
+          </a:prstGeom>
+          <a:solidFill>
+            <a:srgbClr val="2F3E46"/>
+          </a:solidFill>
+          <a:ln w="12700">
+            <a:solidFill>
+              <a:srgbClr val="2F3E46"/>
+            </a:solidFill>
+            <a:prstDash val="solid"/>
+          </a:ln>
+        </p:spPr>
+      </p:sp>
+      <p:pic>
+        <p:nvPicPr>
+          <p:cNvPr id="28" name="Image 4" descr="preencoded.png">    </p:cNvPr>
+          <p:cNvPicPr>
+            <a:picLocks noChangeAspect="1"/>
+          </p:cNvPicPr>
+          <p:nvPr/>
+        </p:nvPicPr>
+        <p:blipFill>
+          <a:blip r:embed="rId5"/>
+          <a:stretch>
+            <a:fillRect/>
+          </a:stretch>
+        </p:blipFill>
+        <p:spPr>
+          <a:xfrm>
+            <a:off x="822960" y="5623560"/>
+            <a:ext cx="365760" cy="365760"/>
+          </a:xfrm>
+          <a:prstGeom prst="rect">
+            <a:avLst/>
+          </a:prstGeom>
+        </p:spPr>
+      </p:pic>
+      <p:sp>
+        <p:nvSpPr>
+          <p:cNvPr id="29" name="Text 22"/>
+          <p:cNvSpPr/>
+          <p:nvPr/>
+        </p:nvSpPr>
+        <p:spPr>
+          <a:xfrm>
+            <a:off x="1463040" y="5394960"/>
+            <a:ext cx="4389120" cy="822960"/>
           </a:xfrm>
           <a:prstGeom prst="rect">
             <a:avLst/>
@@ -9797,34 +9728,34 @@
           <a:bodyPr wrap="square" lIns="0" tIns="0" rIns="0" bIns="0" rtlCol="0" anchor="ctr"/>
           <a:lstStyle/>
           <a:p>
-            <a:pPr indent="0" marL="0">
-              <a:buNone/>
-            </a:pPr>
-            <a:r>
-              <a:rPr lang="en-US" sz="1500" b="1" dirty="0">
-                <a:solidFill>
-                  <a:srgbClr val="FFFFFF"/>
+            <a:pPr algn="l" indent="0" marL="0">
+              <a:buNone/>
+            </a:pPr>
+            <a:r>
+              <a:rPr lang="en-US" sz="1600" b="1" dirty="0">
+                <a:solidFill>
+                  <a:srgbClr val="2F3E46"/>
                 </a:solidFill>
                 <a:latin typeface="Georgia" pitchFamily="34" charset="0"/>
                 <a:ea typeface="Georgia" pitchFamily="34" charset="-122"/>
                 <a:cs typeface="Georgia" pitchFamily="34" charset="-120"/>
               </a:rPr>
-              <a:t>Financial</a:t>
-            </a:r>
-            <a:endParaRPr lang="en-US" sz="1500" dirty="0"/>
-          </a:p>
-        </p:txBody>
-      </p:sp>
-      <p:sp>
-        <p:nvSpPr>
-          <p:cNvPr id="34" name="Text 28"/>
-          <p:cNvSpPr/>
-          <p:nvPr/>
-        </p:nvSpPr>
-        <p:spPr>
-          <a:xfrm>
-            <a:off x="9387688" y="5257800"/>
-            <a:ext cx="1889608" cy="457200"/>
+              <a:t>Compliance evidence</a:t>
+            </a:r>
+            <a:endParaRPr lang="en-US" sz="1600" dirty="0"/>
+          </a:p>
+        </p:txBody>
+      </p:sp>
+      <p:sp>
+        <p:nvSpPr>
+          <p:cNvPr id="30" name="Text 23"/>
+          <p:cNvSpPr/>
+          <p:nvPr/>
+        </p:nvSpPr>
+        <p:spPr>
+          <a:xfrm>
+            <a:off x="5943600" y="5394960"/>
+            <a:ext cx="5516575" cy="822960"/>
           </a:xfrm>
           <a:prstGeom prst="rect">
             <a:avLst/>
@@ -9836,21 +9767,21 @@
           <a:bodyPr wrap="square" lIns="0" tIns="0" rIns="0" bIns="0" rtlCol="0" anchor="ctr"/>
           <a:lstStyle/>
           <a:p>
-            <a:pPr indent="0" marL="0">
-              <a:buNone/>
-            </a:pPr>
-            <a:r>
-              <a:rPr lang="en-US" sz="1200" dirty="0">
-                <a:solidFill>
-                  <a:srgbClr val="CBD5E1"/>
+            <a:pPr algn="l" indent="0" marL="0">
+              <a:buNone/>
+            </a:pPr>
+            <a:r>
+              <a:rPr lang="en-US" sz="1300" dirty="0">
+                <a:solidFill>
+                  <a:srgbClr val="1F2937"/>
                 </a:solidFill>
                 <a:latin typeface="Calibri" pitchFamily="34" charset="0"/>
                 <a:ea typeface="Calibri" pitchFamily="34" charset="-122"/>
                 <a:cs typeface="Calibri" pitchFamily="34" charset="-120"/>
               </a:rPr>
-              <a:t>Cost volatility</a:t>
-            </a:r>
-            <a:endParaRPr lang="en-US" sz="1200" dirty="0"/>
+              <a:t>Policy engine + full lineage supports SOC 2, ISO 27001, and PCI change-control obligations.</a:t>
+            </a:r>
+            <a:endParaRPr lang="en-US" sz="1300" dirty="0"/>
           </a:p>
         </p:txBody>
       </p:sp>
@@ -9944,7 +9875,7 @@
                 <a:ea typeface="Georgia" pitchFamily="34" charset="-122"/>
                 <a:cs typeface="Georgia" pitchFamily="34" charset="-120"/>
               </a:rPr>
-              <a:t>The SRI™ framework</a:t>
+              <a:t>Two systems, one platform</a:t>
             </a:r>
             <a:endParaRPr lang="en-US" sz="3600" dirty="0"/>
           </a:p>
@@ -10046,10 +9977,10 @@
           <a:ln/>
         </p:spPr>
         <p:txBody>
-          <a:bodyPr wrap="square" lIns="0" tIns="0" rIns="0" bIns="0" rtlCol="0" anchor="ctr"/>
-          <a:lstStyle/>
-          <a:p>
-            <a:pPr indent="0" marL="0">
+          <a:bodyPr wrap="square" lIns="0" tIns="0" rIns="0" bIns="0" rtlCol="0" anchor="t"/>
+          <a:lstStyle/>
+          <a:p>
+            <a:pPr algn="l" indent="0" marL="0">
               <a:buNone/>
             </a:pPr>
             <a:r>
@@ -10061,6 +9992,1167 @@
                 <a:ea typeface="Calibri" pitchFamily="34" charset="-122"/>
                 <a:cs typeface="Calibri" pitchFamily="34" charset="-120"/>
               </a:rPr>
+              <a:t>Ops agents supply the changes. The CAB decides whether they ship.</a:t>
+            </a:r>
+            <a:endParaRPr lang="en-US" sz="1600" dirty="0"/>
+          </a:p>
+        </p:txBody>
+      </p:sp>
+      <p:sp>
+        <p:nvSpPr>
+          <p:cNvPr id="7" name="Shape 5"/>
+          <p:cNvSpPr/>
+          <p:nvPr/>
+        </p:nvSpPr>
+        <p:spPr>
+          <a:xfrm>
+            <a:off x="548640" y="2377440"/>
+            <a:ext cx="5090008" cy="3657600"/>
+          </a:xfrm>
+          <a:prstGeom prst="rect">
+            <a:avLst/>
+          </a:prstGeom>
+          <a:solidFill>
+            <a:srgbClr val="E9E9E4"/>
+          </a:solidFill>
+          <a:ln w="12700">
+            <a:solidFill>
+              <a:srgbClr val="E9E9E4"/>
+            </a:solidFill>
+            <a:prstDash val="solid"/>
+          </a:ln>
+        </p:spPr>
+      </p:sp>
+      <p:sp>
+        <p:nvSpPr>
+          <p:cNvPr id="8" name="Text 6"/>
+          <p:cNvSpPr/>
+          <p:nvPr/>
+        </p:nvSpPr>
+        <p:spPr>
+          <a:xfrm>
+            <a:off x="914400" y="2651760"/>
+            <a:ext cx="4358488" cy="457200"/>
+          </a:xfrm>
+          <a:prstGeom prst="rect">
+            <a:avLst/>
+          </a:prstGeom>
+          <a:noFill/>
+          <a:ln/>
+        </p:spPr>
+        <p:txBody>
+          <a:bodyPr wrap="square" lIns="0" tIns="0" rIns="0" bIns="0" rtlCol="0" anchor="ctr"/>
+          <a:lstStyle/>
+          <a:p>
+            <a:pPr indent="0" marL="0">
+              <a:buNone/>
+            </a:pPr>
+            <a:r>
+              <a:rPr lang="en-US" sz="2200" b="1" dirty="0">
+                <a:solidFill>
+                  <a:srgbClr val="2F3E46"/>
+                </a:solidFill>
+                <a:latin typeface="Georgia" pitchFamily="34" charset="0"/>
+                <a:ea typeface="Georgia" pitchFamily="34" charset="-122"/>
+                <a:cs typeface="Georgia" pitchFamily="34" charset="-120"/>
+              </a:rPr>
+              <a:t>Ops Agents</a:t>
+            </a:r>
+            <a:endParaRPr lang="en-US" sz="2200" dirty="0"/>
+          </a:p>
+        </p:txBody>
+      </p:sp>
+      <p:sp>
+        <p:nvSpPr>
+          <p:cNvPr id="9" name="Text 7"/>
+          <p:cNvSpPr/>
+          <p:nvPr/>
+        </p:nvSpPr>
+        <p:spPr>
+          <a:xfrm>
+            <a:off x="914400" y="3108960"/>
+            <a:ext cx="4358488" cy="320040"/>
+          </a:xfrm>
+          <a:prstGeom prst="rect">
+            <a:avLst/>
+          </a:prstGeom>
+          <a:noFill/>
+          <a:ln/>
+        </p:spPr>
+        <p:txBody>
+          <a:bodyPr wrap="square" lIns="0" tIns="0" rIns="0" bIns="0" rtlCol="0" anchor="ctr"/>
+          <a:lstStyle/>
+          <a:p>
+            <a:pPr indent="0" marL="0">
+              <a:buNone/>
+            </a:pPr>
+            <a:r>
+              <a:rPr lang="en-US" sz="1300" i="1" dirty="0">
+                <a:solidFill>
+                  <a:srgbClr val="64748B"/>
+                </a:solidFill>
+                <a:latin typeface="Calibri" pitchFamily="34" charset="0"/>
+                <a:ea typeface="Calibri" pitchFamily="34" charset="-122"/>
+                <a:cs typeface="Calibri" pitchFamily="34" charset="-120"/>
+              </a:rPr>
+              <a:t>the proposers</a:t>
+            </a:r>
+            <a:endParaRPr lang="en-US" sz="1300" dirty="0"/>
+          </a:p>
+        </p:txBody>
+      </p:sp>
+      <p:pic>
+        <p:nvPicPr>
+          <p:cNvPr id="10" name="Image 0" descr="preencoded.png">    </p:cNvPr>
+          <p:cNvPicPr>
+            <a:picLocks noChangeAspect="1"/>
+          </p:cNvPicPr>
+          <p:nvPr/>
+        </p:nvPicPr>
+        <p:blipFill>
+          <a:blip r:embed="rId1"/>
+          <a:stretch>
+            <a:fillRect/>
+          </a:stretch>
+        </p:blipFill>
+        <p:spPr>
+          <a:xfrm>
+            <a:off x="914400" y="3657600"/>
+            <a:ext cx="365760" cy="365760"/>
+          </a:xfrm>
+          <a:prstGeom prst="rect">
+            <a:avLst/>
+          </a:prstGeom>
+        </p:spPr>
+      </p:pic>
+      <p:sp>
+        <p:nvSpPr>
+          <p:cNvPr id="11" name="Text 8"/>
+          <p:cNvSpPr/>
+          <p:nvPr/>
+        </p:nvSpPr>
+        <p:spPr>
+          <a:xfrm>
+            <a:off x="1463040" y="3611880"/>
+            <a:ext cx="3809848" cy="320040"/>
+          </a:xfrm>
+          <a:prstGeom prst="rect">
+            <a:avLst/>
+          </a:prstGeom>
+          <a:noFill/>
+          <a:ln/>
+        </p:spPr>
+        <p:txBody>
+          <a:bodyPr wrap="square" lIns="0" tIns="0" rIns="0" bIns="0" rtlCol="0" anchor="ctr"/>
+          <a:lstStyle/>
+          <a:p>
+            <a:pPr indent="0" marL="0">
+              <a:buNone/>
+            </a:pPr>
+            <a:r>
+              <a:rPr lang="en-US" sz="1500" b="1" dirty="0">
+                <a:solidFill>
+                  <a:srgbClr val="1F2937"/>
+                </a:solidFill>
+                <a:latin typeface="Georgia" pitchFamily="34" charset="0"/>
+                <a:ea typeface="Georgia" pitchFamily="34" charset="-122"/>
+                <a:cs typeface="Georgia" pitchFamily="34" charset="-120"/>
+              </a:rPr>
+              <a:t>Monitoring Agent</a:t>
+            </a:r>
+            <a:endParaRPr lang="en-US" sz="1500" dirty="0"/>
+          </a:p>
+        </p:txBody>
+      </p:sp>
+      <p:sp>
+        <p:nvSpPr>
+          <p:cNvPr id="12" name="Text 9"/>
+          <p:cNvSpPr/>
+          <p:nvPr/>
+        </p:nvSpPr>
+        <p:spPr>
+          <a:xfrm>
+            <a:off x="1463040" y="3931920"/>
+            <a:ext cx="3809848" cy="320040"/>
+          </a:xfrm>
+          <a:prstGeom prst="rect">
+            <a:avLst/>
+          </a:prstGeom>
+          <a:noFill/>
+          <a:ln/>
+        </p:spPr>
+        <p:txBody>
+          <a:bodyPr wrap="square" lIns="0" tIns="0" rIns="0" bIns="0" rtlCol="0" anchor="ctr"/>
+          <a:lstStyle/>
+          <a:p>
+            <a:pPr indent="0" marL="0">
+              <a:buNone/>
+            </a:pPr>
+            <a:r>
+              <a:rPr lang="en-US" sz="1200" dirty="0">
+                <a:solidFill>
+                  <a:srgbClr val="64748B"/>
+                </a:solidFill>
+                <a:latin typeface="Calibri" pitchFamily="34" charset="0"/>
+                <a:ea typeface="Calibri" pitchFamily="34" charset="-122"/>
+                <a:cs typeface="Calibri" pitchFamily="34" charset="-120"/>
+              </a:rPr>
+              <a:t>VM health, alerts, observability gaps</a:t>
+            </a:r>
+            <a:endParaRPr lang="en-US" sz="1200" dirty="0"/>
+          </a:p>
+        </p:txBody>
+      </p:sp>
+      <p:pic>
+        <p:nvPicPr>
+          <p:cNvPr id="13" name="Image 1" descr="preencoded.png">    </p:cNvPr>
+          <p:cNvPicPr>
+            <a:picLocks noChangeAspect="1"/>
+          </p:cNvPicPr>
+          <p:nvPr/>
+        </p:nvPicPr>
+        <p:blipFill>
+          <a:blip r:embed="rId2"/>
+          <a:stretch>
+            <a:fillRect/>
+          </a:stretch>
+        </p:blipFill>
+        <p:spPr>
+          <a:xfrm>
+            <a:off x="914400" y="4434840"/>
+            <a:ext cx="365760" cy="365760"/>
+          </a:xfrm>
+          <a:prstGeom prst="rect">
+            <a:avLst/>
+          </a:prstGeom>
+        </p:spPr>
+      </p:pic>
+      <p:sp>
+        <p:nvSpPr>
+          <p:cNvPr id="14" name="Text 10"/>
+          <p:cNvSpPr/>
+          <p:nvPr/>
+        </p:nvSpPr>
+        <p:spPr>
+          <a:xfrm>
+            <a:off x="1463040" y="4389120"/>
+            <a:ext cx="3809848" cy="320040"/>
+          </a:xfrm>
+          <a:prstGeom prst="rect">
+            <a:avLst/>
+          </a:prstGeom>
+          <a:noFill/>
+          <a:ln/>
+        </p:spPr>
+        <p:txBody>
+          <a:bodyPr wrap="square" lIns="0" tIns="0" rIns="0" bIns="0" rtlCol="0" anchor="ctr"/>
+          <a:lstStyle/>
+          <a:p>
+            <a:pPr indent="0" marL="0">
+              <a:buNone/>
+            </a:pPr>
+            <a:r>
+              <a:rPr lang="en-US" sz="1500" b="1" dirty="0">
+                <a:solidFill>
+                  <a:srgbClr val="1F2937"/>
+                </a:solidFill>
+                <a:latin typeface="Georgia" pitchFamily="34" charset="0"/>
+                <a:ea typeface="Georgia" pitchFamily="34" charset="-122"/>
+                <a:cs typeface="Georgia" pitchFamily="34" charset="-120"/>
+              </a:rPr>
+              <a:t>Cost Agent</a:t>
+            </a:r>
+            <a:endParaRPr lang="en-US" sz="1500" dirty="0"/>
+          </a:p>
+        </p:txBody>
+      </p:sp>
+      <p:sp>
+        <p:nvSpPr>
+          <p:cNvPr id="15" name="Text 11"/>
+          <p:cNvSpPr/>
+          <p:nvPr/>
+        </p:nvSpPr>
+        <p:spPr>
+          <a:xfrm>
+            <a:off x="1463040" y="4709160"/>
+            <a:ext cx="3809848" cy="320040"/>
+          </a:xfrm>
+          <a:prstGeom prst="rect">
+            <a:avLst/>
+          </a:prstGeom>
+          <a:noFill/>
+          <a:ln/>
+        </p:spPr>
+        <p:txBody>
+          <a:bodyPr wrap="square" lIns="0" tIns="0" rIns="0" bIns="0" rtlCol="0" anchor="ctr"/>
+          <a:lstStyle/>
+          <a:p>
+            <a:pPr indent="0" marL="0">
+              <a:buNone/>
+            </a:pPr>
+            <a:r>
+              <a:rPr lang="en-US" sz="1200" dirty="0">
+                <a:solidFill>
+                  <a:srgbClr val="64748B"/>
+                </a:solidFill>
+                <a:latin typeface="Calibri" pitchFamily="34" charset="0"/>
+                <a:ea typeface="Calibri" pitchFamily="34" charset="-122"/>
+                <a:cs typeface="Calibri" pitchFamily="34" charset="-120"/>
+              </a:rPr>
+              <a:t>Waste, orphaned disks, over-provisioning</a:t>
+            </a:r>
+            <a:endParaRPr lang="en-US" sz="1200" dirty="0"/>
+          </a:p>
+        </p:txBody>
+      </p:sp>
+      <p:pic>
+        <p:nvPicPr>
+          <p:cNvPr id="16" name="Image 2" descr="preencoded.png">    </p:cNvPr>
+          <p:cNvPicPr>
+            <a:picLocks noChangeAspect="1"/>
+          </p:cNvPicPr>
+          <p:nvPr/>
+        </p:nvPicPr>
+        <p:blipFill>
+          <a:blip r:embed="rId3"/>
+          <a:stretch>
+            <a:fillRect/>
+          </a:stretch>
+        </p:blipFill>
+        <p:spPr>
+          <a:xfrm>
+            <a:off x="914400" y="5212080"/>
+            <a:ext cx="365760" cy="365760"/>
+          </a:xfrm>
+          <a:prstGeom prst="rect">
+            <a:avLst/>
+          </a:prstGeom>
+        </p:spPr>
+      </p:pic>
+      <p:sp>
+        <p:nvSpPr>
+          <p:cNvPr id="17" name="Text 12"/>
+          <p:cNvSpPr/>
+          <p:nvPr/>
+        </p:nvSpPr>
+        <p:spPr>
+          <a:xfrm>
+            <a:off x="1463040" y="5166360"/>
+            <a:ext cx="3809848" cy="320040"/>
+          </a:xfrm>
+          <a:prstGeom prst="rect">
+            <a:avLst/>
+          </a:prstGeom>
+          <a:noFill/>
+          <a:ln/>
+        </p:spPr>
+        <p:txBody>
+          <a:bodyPr wrap="square" lIns="0" tIns="0" rIns="0" bIns="0" rtlCol="0" anchor="ctr"/>
+          <a:lstStyle/>
+          <a:p>
+            <a:pPr indent="0" marL="0">
+              <a:buNone/>
+            </a:pPr>
+            <a:r>
+              <a:rPr lang="en-US" sz="1500" b="1" dirty="0">
+                <a:solidFill>
+                  <a:srgbClr val="1F2937"/>
+                </a:solidFill>
+                <a:latin typeface="Georgia" pitchFamily="34" charset="0"/>
+                <a:ea typeface="Georgia" pitchFamily="34" charset="-122"/>
+                <a:cs typeface="Georgia" pitchFamily="34" charset="-120"/>
+              </a:rPr>
+              <a:t>Deploy Agent</a:t>
+            </a:r>
+            <a:endParaRPr lang="en-US" sz="1500" dirty="0"/>
+          </a:p>
+        </p:txBody>
+      </p:sp>
+      <p:sp>
+        <p:nvSpPr>
+          <p:cNvPr id="18" name="Text 13"/>
+          <p:cNvSpPr/>
+          <p:nvPr/>
+        </p:nvSpPr>
+        <p:spPr>
+          <a:xfrm>
+            <a:off x="1463040" y="5486400"/>
+            <a:ext cx="3809848" cy="320040"/>
+          </a:xfrm>
+          <a:prstGeom prst="rect">
+            <a:avLst/>
+          </a:prstGeom>
+          <a:noFill/>
+          <a:ln/>
+        </p:spPr>
+        <p:txBody>
+          <a:bodyPr wrap="square" lIns="0" tIns="0" rIns="0" bIns="0" rtlCol="0" anchor="ctr"/>
+          <a:lstStyle/>
+          <a:p>
+            <a:pPr indent="0" marL="0">
+              <a:buNone/>
+            </a:pPr>
+            <a:r>
+              <a:rPr lang="en-US" sz="1200" dirty="0">
+                <a:solidFill>
+                  <a:srgbClr val="64748B"/>
+                </a:solidFill>
+                <a:latin typeface="Calibri" pitchFamily="34" charset="0"/>
+                <a:ea typeface="Calibri" pitchFamily="34" charset="-122"/>
+                <a:cs typeface="Calibri" pitchFamily="34" charset="-120"/>
+              </a:rPr>
+              <a:t>Security posture, NSG rules, compliance</a:t>
+            </a:r>
+            <a:endParaRPr lang="en-US" sz="1200" dirty="0"/>
+          </a:p>
+        </p:txBody>
+      </p:sp>
+      <p:pic>
+        <p:nvPicPr>
+          <p:cNvPr id="19" name="Image 3" descr="preencoded.png">    </p:cNvPr>
+          <p:cNvPicPr>
+            <a:picLocks noChangeAspect="1"/>
+          </p:cNvPicPr>
+          <p:nvPr/>
+        </p:nvPicPr>
+        <p:blipFill>
+          <a:blip r:embed="rId4"/>
+          <a:stretch>
+            <a:fillRect/>
+          </a:stretch>
+        </p:blipFill>
+        <p:spPr>
+          <a:xfrm>
+            <a:off x="5867248" y="3977640"/>
+            <a:ext cx="457200" cy="457200"/>
+          </a:xfrm>
+          <a:prstGeom prst="rect">
+            <a:avLst/>
+          </a:prstGeom>
+        </p:spPr>
+      </p:pic>
+      <p:sp>
+        <p:nvSpPr>
+          <p:cNvPr id="20" name="Shape 14"/>
+          <p:cNvSpPr/>
+          <p:nvPr/>
+        </p:nvSpPr>
+        <p:spPr>
+          <a:xfrm>
+            <a:off x="6553048" y="2377440"/>
+            <a:ext cx="5090008" cy="3657600"/>
+          </a:xfrm>
+          <a:prstGeom prst="rect">
+            <a:avLst/>
+          </a:prstGeom>
+          <a:solidFill>
+            <a:srgbClr val="2F3E46"/>
+          </a:solidFill>
+          <a:ln w="12700">
+            <a:solidFill>
+              <a:srgbClr val="2F3E46"/>
+            </a:solidFill>
+            <a:prstDash val="solid"/>
+          </a:ln>
+        </p:spPr>
+      </p:sp>
+      <p:sp>
+        <p:nvSpPr>
+          <p:cNvPr id="21" name="Text 15"/>
+          <p:cNvSpPr/>
+          <p:nvPr/>
+        </p:nvSpPr>
+        <p:spPr>
+          <a:xfrm>
+            <a:off x="6918808" y="2651760"/>
+            <a:ext cx="4358488" cy="457200"/>
+          </a:xfrm>
+          <a:prstGeom prst="rect">
+            <a:avLst/>
+          </a:prstGeom>
+          <a:noFill/>
+          <a:ln/>
+        </p:spPr>
+        <p:txBody>
+          <a:bodyPr wrap="square" lIns="0" tIns="0" rIns="0" bIns="0" rtlCol="0" anchor="ctr"/>
+          <a:lstStyle/>
+          <a:p>
+            <a:pPr indent="0" marL="0">
+              <a:buNone/>
+            </a:pPr>
+            <a:r>
+              <a:rPr lang="en-US" sz="2200" b="1" dirty="0">
+                <a:solidFill>
+                  <a:srgbClr val="F59E0B"/>
+                </a:solidFill>
+                <a:latin typeface="Georgia" pitchFamily="34" charset="0"/>
+                <a:ea typeface="Georgia" pitchFamily="34" charset="-122"/>
+                <a:cs typeface="Georgia" pitchFamily="34" charset="-120"/>
+              </a:rPr>
+              <a:t>AI CAB</a:t>
+            </a:r>
+            <a:endParaRPr lang="en-US" sz="2200" dirty="0"/>
+          </a:p>
+        </p:txBody>
+      </p:sp>
+      <p:sp>
+        <p:nvSpPr>
+          <p:cNvPr id="22" name="Text 16"/>
+          <p:cNvSpPr/>
+          <p:nvPr/>
+        </p:nvSpPr>
+        <p:spPr>
+          <a:xfrm>
+            <a:off x="6918808" y="3108960"/>
+            <a:ext cx="4358488" cy="320040"/>
+          </a:xfrm>
+          <a:prstGeom prst="rect">
+            <a:avLst/>
+          </a:prstGeom>
+          <a:noFill/>
+          <a:ln/>
+        </p:spPr>
+        <p:txBody>
+          <a:bodyPr wrap="square" lIns="0" tIns="0" rIns="0" bIns="0" rtlCol="0" anchor="ctr"/>
+          <a:lstStyle/>
+          <a:p>
+            <a:pPr indent="0" marL="0">
+              <a:buNone/>
+            </a:pPr>
+            <a:r>
+              <a:rPr lang="en-US" sz="1300" i="1" dirty="0">
+                <a:solidFill>
+                  <a:srgbClr val="CBD5E1"/>
+                </a:solidFill>
+                <a:latin typeface="Calibri" pitchFamily="34" charset="0"/>
+                <a:ea typeface="Calibri" pitchFamily="34" charset="-122"/>
+                <a:cs typeface="Calibri" pitchFamily="34" charset="-120"/>
+              </a:rPr>
+              <a:t>the adjudicators</a:t>
+            </a:r>
+            <a:endParaRPr lang="en-US" sz="1300" dirty="0"/>
+          </a:p>
+        </p:txBody>
+      </p:sp>
+      <p:sp>
+        <p:nvSpPr>
+          <p:cNvPr id="23" name="Shape 17"/>
+          <p:cNvSpPr/>
+          <p:nvPr/>
+        </p:nvSpPr>
+        <p:spPr>
+          <a:xfrm>
+            <a:off x="6964528" y="3776472"/>
+            <a:ext cx="137160" cy="137160"/>
+          </a:xfrm>
+          <a:prstGeom prst="ellipse">
+            <a:avLst/>
+          </a:prstGeom>
+          <a:solidFill>
+            <a:srgbClr val="F59E0B"/>
+          </a:solidFill>
+          <a:ln w="12700">
+            <a:solidFill>
+              <a:srgbClr val="F59E0B"/>
+            </a:solidFill>
+            <a:prstDash val="solid"/>
+          </a:ln>
+        </p:spPr>
+      </p:sp>
+      <p:sp>
+        <p:nvSpPr>
+          <p:cNvPr id="24" name="Text 18"/>
+          <p:cNvSpPr/>
+          <p:nvPr/>
+        </p:nvSpPr>
+        <p:spPr>
+          <a:xfrm>
+            <a:off x="7284568" y="3611880"/>
+            <a:ext cx="2286000" cy="457200"/>
+          </a:xfrm>
+          <a:prstGeom prst="rect">
+            <a:avLst/>
+          </a:prstGeom>
+          <a:noFill/>
+          <a:ln/>
+        </p:spPr>
+        <p:txBody>
+          <a:bodyPr wrap="square" lIns="0" tIns="0" rIns="0" bIns="0" rtlCol="0" anchor="ctr"/>
+          <a:lstStyle/>
+          <a:p>
+            <a:pPr indent="0" marL="0">
+              <a:buNone/>
+            </a:pPr>
+            <a:r>
+              <a:rPr lang="en-US" sz="1500" b="1" dirty="0">
+                <a:solidFill>
+                  <a:srgbClr val="FFFFFF"/>
+                </a:solidFill>
+                <a:latin typeface="Georgia" pitchFamily="34" charset="0"/>
+                <a:ea typeface="Georgia" pitchFamily="34" charset="-122"/>
+                <a:cs typeface="Georgia" pitchFamily="34" charset="-120"/>
+              </a:rPr>
+              <a:t>Blast Radius</a:t>
+            </a:r>
+            <a:endParaRPr lang="en-US" sz="1500" dirty="0"/>
+          </a:p>
+        </p:txBody>
+      </p:sp>
+      <p:sp>
+        <p:nvSpPr>
+          <p:cNvPr id="25" name="Text 19"/>
+          <p:cNvSpPr/>
+          <p:nvPr/>
+        </p:nvSpPr>
+        <p:spPr>
+          <a:xfrm>
+            <a:off x="9387688" y="3611880"/>
+            <a:ext cx="1889608" cy="457200"/>
+          </a:xfrm>
+          <a:prstGeom prst="rect">
+            <a:avLst/>
+          </a:prstGeom>
+          <a:noFill/>
+          <a:ln/>
+        </p:spPr>
+        <p:txBody>
+          <a:bodyPr wrap="square" lIns="0" tIns="0" rIns="0" bIns="0" rtlCol="0" anchor="ctr"/>
+          <a:lstStyle/>
+          <a:p>
+            <a:pPr indent="0" marL="0">
+              <a:buNone/>
+            </a:pPr>
+            <a:r>
+              <a:rPr lang="en-US" sz="1200" dirty="0">
+                <a:solidFill>
+                  <a:srgbClr val="CBD5E1"/>
+                </a:solidFill>
+                <a:latin typeface="Calibri" pitchFamily="34" charset="0"/>
+                <a:ea typeface="Calibri" pitchFamily="34" charset="-122"/>
+                <a:cs typeface="Calibri" pitchFamily="34" charset="-120"/>
+              </a:rPr>
+              <a:t>Downstream impact</a:t>
+            </a:r>
+            <a:endParaRPr lang="en-US" sz="1200" dirty="0"/>
+          </a:p>
+        </p:txBody>
+      </p:sp>
+      <p:sp>
+        <p:nvSpPr>
+          <p:cNvPr id="26" name="Shape 20"/>
+          <p:cNvSpPr/>
+          <p:nvPr/>
+        </p:nvSpPr>
+        <p:spPr>
+          <a:xfrm>
+            <a:off x="6964528" y="4325112"/>
+            <a:ext cx="137160" cy="137160"/>
+          </a:xfrm>
+          <a:prstGeom prst="ellipse">
+            <a:avLst/>
+          </a:prstGeom>
+          <a:solidFill>
+            <a:srgbClr val="F59E0B"/>
+          </a:solidFill>
+          <a:ln w="12700">
+            <a:solidFill>
+              <a:srgbClr val="F59E0B"/>
+            </a:solidFill>
+            <a:prstDash val="solid"/>
+          </a:ln>
+        </p:spPr>
+      </p:sp>
+      <p:sp>
+        <p:nvSpPr>
+          <p:cNvPr id="27" name="Text 21"/>
+          <p:cNvSpPr/>
+          <p:nvPr/>
+        </p:nvSpPr>
+        <p:spPr>
+          <a:xfrm>
+            <a:off x="7284568" y="4160520"/>
+            <a:ext cx="2286000" cy="457200"/>
+          </a:xfrm>
+          <a:prstGeom prst="rect">
+            <a:avLst/>
+          </a:prstGeom>
+          <a:noFill/>
+          <a:ln/>
+        </p:spPr>
+        <p:txBody>
+          <a:bodyPr wrap="square" lIns="0" tIns="0" rIns="0" bIns="0" rtlCol="0" anchor="ctr"/>
+          <a:lstStyle/>
+          <a:p>
+            <a:pPr indent="0" marL="0">
+              <a:buNone/>
+            </a:pPr>
+            <a:r>
+              <a:rPr lang="en-US" sz="1500" b="1" dirty="0">
+                <a:solidFill>
+                  <a:srgbClr val="FFFFFF"/>
+                </a:solidFill>
+                <a:latin typeface="Georgia" pitchFamily="34" charset="0"/>
+                <a:ea typeface="Georgia" pitchFamily="34" charset="-122"/>
+                <a:cs typeface="Georgia" pitchFamily="34" charset="-120"/>
+              </a:rPr>
+              <a:t>Policy</a:t>
+            </a:r>
+            <a:endParaRPr lang="en-US" sz="1500" dirty="0"/>
+          </a:p>
+        </p:txBody>
+      </p:sp>
+      <p:sp>
+        <p:nvSpPr>
+          <p:cNvPr id="28" name="Text 22"/>
+          <p:cNvSpPr/>
+          <p:nvPr/>
+        </p:nvSpPr>
+        <p:spPr>
+          <a:xfrm>
+            <a:off x="9387688" y="4160520"/>
+            <a:ext cx="1889608" cy="457200"/>
+          </a:xfrm>
+          <a:prstGeom prst="rect">
+            <a:avLst/>
+          </a:prstGeom>
+          <a:noFill/>
+          <a:ln/>
+        </p:spPr>
+        <p:txBody>
+          <a:bodyPr wrap="square" lIns="0" tIns="0" rIns="0" bIns="0" rtlCol="0" anchor="ctr"/>
+          <a:lstStyle/>
+          <a:p>
+            <a:pPr indent="0" marL="0">
+              <a:buNone/>
+            </a:pPr>
+            <a:r>
+              <a:rPr lang="en-US" sz="1200" dirty="0">
+                <a:solidFill>
+                  <a:srgbClr val="CBD5E1"/>
+                </a:solidFill>
+                <a:latin typeface="Calibri" pitchFamily="34" charset="0"/>
+                <a:ea typeface="Calibri" pitchFamily="34" charset="-122"/>
+                <a:cs typeface="Calibri" pitchFamily="34" charset="-120"/>
+              </a:rPr>
+              <a:t>Governance compliance</a:t>
+            </a:r>
+            <a:endParaRPr lang="en-US" sz="1200" dirty="0"/>
+          </a:p>
+        </p:txBody>
+      </p:sp>
+      <p:sp>
+        <p:nvSpPr>
+          <p:cNvPr id="29" name="Shape 23"/>
+          <p:cNvSpPr/>
+          <p:nvPr/>
+        </p:nvSpPr>
+        <p:spPr>
+          <a:xfrm>
+            <a:off x="6964528" y="4873752"/>
+            <a:ext cx="137160" cy="137160"/>
+          </a:xfrm>
+          <a:prstGeom prst="ellipse">
+            <a:avLst/>
+          </a:prstGeom>
+          <a:solidFill>
+            <a:srgbClr val="F59E0B"/>
+          </a:solidFill>
+          <a:ln w="12700">
+            <a:solidFill>
+              <a:srgbClr val="F59E0B"/>
+            </a:solidFill>
+            <a:prstDash val="solid"/>
+          </a:ln>
+        </p:spPr>
+      </p:sp>
+      <p:sp>
+        <p:nvSpPr>
+          <p:cNvPr id="30" name="Text 24"/>
+          <p:cNvSpPr/>
+          <p:nvPr/>
+        </p:nvSpPr>
+        <p:spPr>
+          <a:xfrm>
+            <a:off x="7284568" y="4709160"/>
+            <a:ext cx="2286000" cy="457200"/>
+          </a:xfrm>
+          <a:prstGeom prst="rect">
+            <a:avLst/>
+          </a:prstGeom>
+          <a:noFill/>
+          <a:ln/>
+        </p:spPr>
+        <p:txBody>
+          <a:bodyPr wrap="square" lIns="0" tIns="0" rIns="0" bIns="0" rtlCol="0" anchor="ctr"/>
+          <a:lstStyle/>
+          <a:p>
+            <a:pPr indent="0" marL="0">
+              <a:buNone/>
+            </a:pPr>
+            <a:r>
+              <a:rPr lang="en-US" sz="1500" b="1" dirty="0">
+                <a:solidFill>
+                  <a:srgbClr val="FFFFFF"/>
+                </a:solidFill>
+                <a:latin typeface="Georgia" pitchFamily="34" charset="0"/>
+                <a:ea typeface="Georgia" pitchFamily="34" charset="-122"/>
+                <a:cs typeface="Georgia" pitchFamily="34" charset="-120"/>
+              </a:rPr>
+              <a:t>Historical</a:t>
+            </a:r>
+            <a:endParaRPr lang="en-US" sz="1500" dirty="0"/>
+          </a:p>
+        </p:txBody>
+      </p:sp>
+      <p:sp>
+        <p:nvSpPr>
+          <p:cNvPr id="31" name="Text 25"/>
+          <p:cNvSpPr/>
+          <p:nvPr/>
+        </p:nvSpPr>
+        <p:spPr>
+          <a:xfrm>
+            <a:off x="9387688" y="4709160"/>
+            <a:ext cx="1889608" cy="457200"/>
+          </a:xfrm>
+          <a:prstGeom prst="rect">
+            <a:avLst/>
+          </a:prstGeom>
+          <a:noFill/>
+          <a:ln/>
+        </p:spPr>
+        <p:txBody>
+          <a:bodyPr wrap="square" lIns="0" tIns="0" rIns="0" bIns="0" rtlCol="0" anchor="ctr"/>
+          <a:lstStyle/>
+          <a:p>
+            <a:pPr indent="0" marL="0">
+              <a:buNone/>
+            </a:pPr>
+            <a:r>
+              <a:rPr lang="en-US" sz="1200" dirty="0">
+                <a:solidFill>
+                  <a:srgbClr val="CBD5E1"/>
+                </a:solidFill>
+                <a:latin typeface="Calibri" pitchFamily="34" charset="0"/>
+                <a:ea typeface="Calibri" pitchFamily="34" charset="-122"/>
+                <a:cs typeface="Calibri" pitchFamily="34" charset="-120"/>
+              </a:rPr>
+              <a:t>Incident precedent</a:t>
+            </a:r>
+            <a:endParaRPr lang="en-US" sz="1200" dirty="0"/>
+          </a:p>
+        </p:txBody>
+      </p:sp>
+      <p:sp>
+        <p:nvSpPr>
+          <p:cNvPr id="32" name="Shape 26"/>
+          <p:cNvSpPr/>
+          <p:nvPr/>
+        </p:nvSpPr>
+        <p:spPr>
+          <a:xfrm>
+            <a:off x="6964528" y="5422392"/>
+            <a:ext cx="137160" cy="137160"/>
+          </a:xfrm>
+          <a:prstGeom prst="ellipse">
+            <a:avLst/>
+          </a:prstGeom>
+          <a:solidFill>
+            <a:srgbClr val="F59E0B"/>
+          </a:solidFill>
+          <a:ln w="12700">
+            <a:solidFill>
+              <a:srgbClr val="F59E0B"/>
+            </a:solidFill>
+            <a:prstDash val="solid"/>
+          </a:ln>
+        </p:spPr>
+      </p:sp>
+      <p:sp>
+        <p:nvSpPr>
+          <p:cNvPr id="33" name="Text 27"/>
+          <p:cNvSpPr/>
+          <p:nvPr/>
+        </p:nvSpPr>
+        <p:spPr>
+          <a:xfrm>
+            <a:off x="7284568" y="5257800"/>
+            <a:ext cx="2286000" cy="457200"/>
+          </a:xfrm>
+          <a:prstGeom prst="rect">
+            <a:avLst/>
+          </a:prstGeom>
+          <a:noFill/>
+          <a:ln/>
+        </p:spPr>
+        <p:txBody>
+          <a:bodyPr wrap="square" lIns="0" tIns="0" rIns="0" bIns="0" rtlCol="0" anchor="ctr"/>
+          <a:lstStyle/>
+          <a:p>
+            <a:pPr indent="0" marL="0">
+              <a:buNone/>
+            </a:pPr>
+            <a:r>
+              <a:rPr lang="en-US" sz="1500" b="1" dirty="0">
+                <a:solidFill>
+                  <a:srgbClr val="FFFFFF"/>
+                </a:solidFill>
+                <a:latin typeface="Georgia" pitchFamily="34" charset="0"/>
+                <a:ea typeface="Georgia" pitchFamily="34" charset="-122"/>
+                <a:cs typeface="Georgia" pitchFamily="34" charset="-120"/>
+              </a:rPr>
+              <a:t>Financial</a:t>
+            </a:r>
+            <a:endParaRPr lang="en-US" sz="1500" dirty="0"/>
+          </a:p>
+        </p:txBody>
+      </p:sp>
+      <p:sp>
+        <p:nvSpPr>
+          <p:cNvPr id="34" name="Text 28"/>
+          <p:cNvSpPr/>
+          <p:nvPr/>
+        </p:nvSpPr>
+        <p:spPr>
+          <a:xfrm>
+            <a:off x="9387688" y="5257800"/>
+            <a:ext cx="1889608" cy="457200"/>
+          </a:xfrm>
+          <a:prstGeom prst="rect">
+            <a:avLst/>
+          </a:prstGeom>
+          <a:noFill/>
+          <a:ln/>
+        </p:spPr>
+        <p:txBody>
+          <a:bodyPr wrap="square" lIns="0" tIns="0" rIns="0" bIns="0" rtlCol="0" anchor="ctr"/>
+          <a:lstStyle/>
+          <a:p>
+            <a:pPr indent="0" marL="0">
+              <a:buNone/>
+            </a:pPr>
+            <a:r>
+              <a:rPr lang="en-US" sz="1200" dirty="0">
+                <a:solidFill>
+                  <a:srgbClr val="CBD5E1"/>
+                </a:solidFill>
+                <a:latin typeface="Calibri" pitchFamily="34" charset="0"/>
+                <a:ea typeface="Calibri" pitchFamily="34" charset="-122"/>
+                <a:cs typeface="Calibri" pitchFamily="34" charset="-120"/>
+              </a:rPr>
+              <a:t>Cost volatility</a:t>
+            </a:r>
+            <a:endParaRPr lang="en-US" sz="1200" dirty="0"/>
+          </a:p>
+        </p:txBody>
+      </p:sp>
+    </p:spTree>
+  </p:cSld>
+  <p:clrMapOvr>
+    <a:masterClrMapping/>
+  </p:clrMapOvr>
+</p:sld>
+</file>
+
+<file path=ppt/slides/slide8.xml><?xml version="1.0" encoding="utf-8"?>
+<p:sld xmlns:a="http://schemas.openxmlformats.org/drawingml/2006/main" xmlns:r="http://schemas.openxmlformats.org/officeDocument/2006/relationships" xmlns:p="http://schemas.openxmlformats.org/presentationml/2006/main">
+  <p:cSld name="Slide 8">
+    <p:bg>
+      <p:bgPr>
+        <a:solidFill>
+          <a:srgbClr val="F7F7F5"/>
+        </a:solidFill>
+      </p:bgPr>
+    </p:bg>
+    <p:spTree>
+      <p:nvGrpSpPr>
+        <p:cNvPr id="1" name=""/>
+        <p:cNvGrpSpPr/>
+        <p:nvPr/>
+      </p:nvGrpSpPr>
+      <p:grpSpPr>
+        <a:xfrm>
+          <a:off x="0" y="0"/>
+          <a:ext cx="0" cy="0"/>
+          <a:chOff x="0" y="0"/>
+          <a:chExt cx="0" cy="0"/>
+        </a:xfrm>
+      </p:grpSpPr>
+      <p:sp>
+        <p:nvSpPr>
+          <p:cNvPr id="2" name="Shape 0"/>
+          <p:cNvSpPr/>
+          <p:nvPr/>
+        </p:nvSpPr>
+        <p:spPr>
+          <a:xfrm>
+            <a:off x="548640" y="576072"/>
+            <a:ext cx="100584" cy="676656"/>
+          </a:xfrm>
+          <a:prstGeom prst="rect">
+            <a:avLst/>
+          </a:prstGeom>
+          <a:solidFill>
+            <a:srgbClr val="2F3E46"/>
+          </a:solidFill>
+          <a:ln w="12700">
+            <a:solidFill>
+              <a:srgbClr val="2F3E46"/>
+            </a:solidFill>
+            <a:prstDash val="solid"/>
+          </a:ln>
+        </p:spPr>
+      </p:sp>
+      <p:sp>
+        <p:nvSpPr>
+          <p:cNvPr id="3" name="Text 1"/>
+          <p:cNvSpPr/>
+          <p:nvPr/>
+        </p:nvSpPr>
+        <p:spPr>
+          <a:xfrm>
+            <a:off x="822960" y="502920"/>
+            <a:ext cx="10820095" cy="822960"/>
+          </a:xfrm>
+          <a:prstGeom prst="rect">
+            <a:avLst/>
+          </a:prstGeom>
+          <a:noFill/>
+          <a:ln/>
+        </p:spPr>
+        <p:txBody>
+          <a:bodyPr wrap="square" lIns="0" tIns="0" rIns="0" bIns="0" rtlCol="0" anchor="ctr"/>
+          <a:lstStyle/>
+          <a:p>
+            <a:pPr algn="l" indent="0" marL="0">
+              <a:buNone/>
+            </a:pPr>
+            <a:r>
+              <a:rPr lang="en-US" sz="3600" b="1" dirty="0">
+                <a:solidFill>
+                  <a:srgbClr val="1F2937"/>
+                </a:solidFill>
+                <a:latin typeface="Georgia" pitchFamily="34" charset="0"/>
+                <a:ea typeface="Georgia" pitchFamily="34" charset="-122"/>
+                <a:cs typeface="Georgia" pitchFamily="34" charset="-120"/>
+              </a:rPr>
+              <a:t>The SRI™ framework</a:t>
+            </a:r>
+            <a:endParaRPr lang="en-US" sz="3600" dirty="0"/>
+          </a:p>
+        </p:txBody>
+      </p:sp>
+      <p:sp>
+        <p:nvSpPr>
+          <p:cNvPr id="4" name="Text 2"/>
+          <p:cNvSpPr/>
+          <p:nvPr/>
+        </p:nvSpPr>
+        <p:spPr>
+          <a:xfrm>
+            <a:off x="548640" y="6446520"/>
+            <a:ext cx="4572000" cy="228600"/>
+          </a:xfrm>
+          <a:prstGeom prst="rect">
+            <a:avLst/>
+          </a:prstGeom>
+          <a:noFill/>
+          <a:ln/>
+        </p:spPr>
+        <p:txBody>
+          <a:bodyPr wrap="square" rtlCol="0" anchor="ctr"/>
+          <a:lstStyle/>
+          <a:p>
+            <a:pPr algn="l" indent="0" marL="0">
+              <a:buNone/>
+            </a:pPr>
+            <a:r>
+              <a:rPr lang="en-US" sz="1000" dirty="0">
+                <a:solidFill>
+                  <a:srgbClr val="64748B"/>
+                </a:solidFill>
+                <a:latin typeface="Calibri" pitchFamily="34" charset="0"/>
+                <a:ea typeface="Calibri" pitchFamily="34" charset="-122"/>
+                <a:cs typeface="Calibri" pitchFamily="34" charset="-120"/>
+              </a:rPr>
+              <a:t>RuriSkry · Confidential</a:t>
+            </a:r>
+            <a:endParaRPr lang="en-US" sz="1000" dirty="0"/>
+          </a:p>
+        </p:txBody>
+      </p:sp>
+      <p:sp>
+        <p:nvSpPr>
+          <p:cNvPr id="5" name="Text 3"/>
+          <p:cNvSpPr/>
+          <p:nvPr/>
+        </p:nvSpPr>
+        <p:spPr>
+          <a:xfrm>
+            <a:off x="11185855" y="6446520"/>
+            <a:ext cx="457200" cy="228600"/>
+          </a:xfrm>
+          <a:prstGeom prst="rect">
+            <a:avLst/>
+          </a:prstGeom>
+          <a:noFill/>
+          <a:ln/>
+        </p:spPr>
+        <p:txBody>
+          <a:bodyPr wrap="square" rtlCol="0" anchor="ctr"/>
+          <a:lstStyle/>
+          <a:p>
+            <a:pPr algn="r" indent="0" marL="0">
+              <a:buNone/>
+            </a:pPr>
+            <a:r>
+              <a:rPr lang="en-US" sz="1000" b="1" dirty="0">
+                <a:solidFill>
+                  <a:srgbClr val="F59E0B"/>
+                </a:solidFill>
+                <a:latin typeface="Calibri" pitchFamily="34" charset="0"/>
+                <a:ea typeface="Calibri" pitchFamily="34" charset="-122"/>
+                <a:cs typeface="Calibri" pitchFamily="34" charset="-120"/>
+              </a:rPr>
+              <a:t>8</a:t>
+            </a:r>
+            <a:endParaRPr lang="en-US" sz="1000" dirty="0"/>
+          </a:p>
+        </p:txBody>
+      </p:sp>
+      <p:sp>
+        <p:nvSpPr>
+          <p:cNvPr id="6" name="Text 4"/>
+          <p:cNvSpPr/>
+          <p:nvPr/>
+        </p:nvSpPr>
+        <p:spPr>
+          <a:xfrm>
+            <a:off x="548640" y="1600200"/>
+            <a:ext cx="11094415" cy="457200"/>
+          </a:xfrm>
+          <a:prstGeom prst="rect">
+            <a:avLst/>
+          </a:prstGeom>
+          <a:noFill/>
+          <a:ln/>
+        </p:spPr>
+        <p:txBody>
+          <a:bodyPr wrap="square" lIns="0" tIns="0" rIns="0" bIns="0" rtlCol="0" anchor="ctr"/>
+          <a:lstStyle/>
+          <a:p>
+            <a:pPr indent="0" marL="0">
+              <a:buNone/>
+            </a:pPr>
+            <a:r>
+              <a:rPr lang="en-US" sz="1600" i="1" dirty="0">
+                <a:solidFill>
+                  <a:srgbClr val="1F2937"/>
+                </a:solidFill>
+                <a:latin typeface="Calibri" pitchFamily="34" charset="0"/>
+                <a:ea typeface="Calibri" pitchFamily="34" charset="-122"/>
+                <a:cs typeface="Calibri" pitchFamily="34" charset="-120"/>
+              </a:rPr>
               <a:t>Four independent dimensions. One weighted composite. One defensible verdict.</a:t>
             </a:r>
             <a:endParaRPr lang="en-US" sz="1600" dirty="0"/>
@@ -10069,7 +11161,7 @@
       </p:sp>
       <p:graphicFrame>
         <p:nvGraphicFramePr>
-          <p:cNvPr id="8" name="Table 0"/>
+          <p:cNvPr id="9" name="Table 0"/>
           <p:cNvGraphicFramePr>
             <a:graphicFrameLocks noGrp="1"/>
           </p:cNvGraphicFramePr>
@@ -10815,831 +11907,6 @@
 </p:sld>
 </file>
 
-<file path=ppt/slides/slide8.xml><?xml version="1.0" encoding="utf-8"?>
-<p:sld xmlns:a="http://schemas.openxmlformats.org/drawingml/2006/main" xmlns:r="http://schemas.openxmlformats.org/officeDocument/2006/relationships" xmlns:p="http://schemas.openxmlformats.org/presentationml/2006/main">
-  <p:cSld name="Slide 8">
-    <p:bg>
-      <p:bgPr>
-        <a:solidFill>
-          <a:srgbClr val="F7F7F5"/>
-        </a:solidFill>
-      </p:bgPr>
-    </p:bg>
-    <p:spTree>
-      <p:nvGrpSpPr>
-        <p:cNvPr id="1" name=""/>
-        <p:cNvGrpSpPr/>
-        <p:nvPr/>
-      </p:nvGrpSpPr>
-      <p:grpSpPr>
-        <a:xfrm>
-          <a:off x="0" y="0"/>
-          <a:ext cx="0" cy="0"/>
-          <a:chOff x="0" y="0"/>
-          <a:chExt cx="0" cy="0"/>
-        </a:xfrm>
-      </p:grpSpPr>
-      <p:sp>
-        <p:nvSpPr>
-          <p:cNvPr id="2" name="Shape 0"/>
-          <p:cNvSpPr/>
-          <p:nvPr/>
-        </p:nvSpPr>
-        <p:spPr>
-          <a:xfrm>
-            <a:off x="548640" y="576072"/>
-            <a:ext cx="100584" cy="676656"/>
-          </a:xfrm>
-          <a:prstGeom prst="rect">
-            <a:avLst/>
-          </a:prstGeom>
-          <a:solidFill>
-            <a:srgbClr val="2F3E46"/>
-          </a:solidFill>
-          <a:ln w="12700">
-            <a:solidFill>
-              <a:srgbClr val="2F3E46"/>
-            </a:solidFill>
-            <a:prstDash val="solid"/>
-          </a:ln>
-        </p:spPr>
-      </p:sp>
-      <p:sp>
-        <p:nvSpPr>
-          <p:cNvPr id="3" name="Text 1"/>
-          <p:cNvSpPr/>
-          <p:nvPr/>
-        </p:nvSpPr>
-        <p:spPr>
-          <a:xfrm>
-            <a:off x="822960" y="502920"/>
-            <a:ext cx="10820095" cy="822960"/>
-          </a:xfrm>
-          <a:prstGeom prst="rect">
-            <a:avLst/>
-          </a:prstGeom>
-          <a:noFill/>
-          <a:ln/>
-        </p:spPr>
-        <p:txBody>
-          <a:bodyPr wrap="square" lIns="0" tIns="0" rIns="0" bIns="0" rtlCol="0" anchor="ctr"/>
-          <a:lstStyle/>
-          <a:p>
-            <a:pPr algn="l" indent="0" marL="0">
-              <a:buNone/>
-            </a:pPr>
-            <a:r>
-              <a:rPr lang="en-US" sz="3600" b="1" dirty="0">
-                <a:solidFill>
-                  <a:srgbClr val="1F2937"/>
-                </a:solidFill>
-                <a:latin typeface="Georgia" pitchFamily="34" charset="0"/>
-                <a:ea typeface="Georgia" pitchFamily="34" charset="-122"/>
-                <a:cs typeface="Georgia" pitchFamily="34" charset="-120"/>
-              </a:rPr>
-              <a:t>The decision surface</a:t>
-            </a:r>
-            <a:endParaRPr lang="en-US" sz="3600" dirty="0"/>
-          </a:p>
-        </p:txBody>
-      </p:sp>
-      <p:sp>
-        <p:nvSpPr>
-          <p:cNvPr id="4" name="Text 2"/>
-          <p:cNvSpPr/>
-          <p:nvPr/>
-        </p:nvSpPr>
-        <p:spPr>
-          <a:xfrm>
-            <a:off x="548640" y="6446520"/>
-            <a:ext cx="4572000" cy="228600"/>
-          </a:xfrm>
-          <a:prstGeom prst="rect">
-            <a:avLst/>
-          </a:prstGeom>
-          <a:noFill/>
-          <a:ln/>
-        </p:spPr>
-        <p:txBody>
-          <a:bodyPr wrap="square" rtlCol="0" anchor="ctr"/>
-          <a:lstStyle/>
-          <a:p>
-            <a:pPr algn="l" indent="0" marL="0">
-              <a:buNone/>
-            </a:pPr>
-            <a:r>
-              <a:rPr lang="en-US" sz="1000" dirty="0">
-                <a:solidFill>
-                  <a:srgbClr val="64748B"/>
-                </a:solidFill>
-                <a:latin typeface="Calibri" pitchFamily="34" charset="0"/>
-                <a:ea typeface="Calibri" pitchFamily="34" charset="-122"/>
-                <a:cs typeface="Calibri" pitchFamily="34" charset="-120"/>
-              </a:rPr>
-              <a:t>RuriSkry · Confidential</a:t>
-            </a:r>
-            <a:endParaRPr lang="en-US" sz="1000" dirty="0"/>
-          </a:p>
-        </p:txBody>
-      </p:sp>
-      <p:sp>
-        <p:nvSpPr>
-          <p:cNvPr id="5" name="Text 3"/>
-          <p:cNvSpPr/>
-          <p:nvPr/>
-        </p:nvSpPr>
-        <p:spPr>
-          <a:xfrm>
-            <a:off x="11185855" y="6446520"/>
-            <a:ext cx="457200" cy="228600"/>
-          </a:xfrm>
-          <a:prstGeom prst="rect">
-            <a:avLst/>
-          </a:prstGeom>
-          <a:noFill/>
-          <a:ln/>
-        </p:spPr>
-        <p:txBody>
-          <a:bodyPr wrap="square" rtlCol="0" anchor="ctr"/>
-          <a:lstStyle/>
-          <a:p>
-            <a:pPr algn="r" indent="0" marL="0">
-              <a:buNone/>
-            </a:pPr>
-            <a:r>
-              <a:rPr lang="en-US" sz="1000" b="1" dirty="0">
-                <a:solidFill>
-                  <a:srgbClr val="F59E0B"/>
-                </a:solidFill>
-                <a:latin typeface="Calibri" pitchFamily="34" charset="0"/>
-                <a:ea typeface="Calibri" pitchFamily="34" charset="-122"/>
-                <a:cs typeface="Calibri" pitchFamily="34" charset="-120"/>
-              </a:rPr>
-              <a:t>8</a:t>
-            </a:r>
-            <a:endParaRPr lang="en-US" sz="1000" dirty="0"/>
-          </a:p>
-        </p:txBody>
-      </p:sp>
-      <p:sp>
-        <p:nvSpPr>
-          <p:cNvPr id="6" name="Text 4"/>
-          <p:cNvSpPr/>
-          <p:nvPr/>
-        </p:nvSpPr>
-        <p:spPr>
-          <a:xfrm>
-            <a:off x="548640" y="1600200"/>
-            <a:ext cx="11094415" cy="548640"/>
-          </a:xfrm>
-          <a:prstGeom prst="rect">
-            <a:avLst/>
-          </a:prstGeom>
-          <a:noFill/>
-          <a:ln/>
-        </p:spPr>
-        <p:txBody>
-          <a:bodyPr wrap="square" lIns="0" tIns="0" rIns="0" bIns="0" rtlCol="0" anchor="ctr"/>
-          <a:lstStyle/>
-          <a:p>
-            <a:pPr indent="0" marL="0">
-              <a:buNone/>
-            </a:pPr>
-            <a:r>
-              <a:rPr lang="en-US" sz="1500" dirty="0">
-                <a:solidFill>
-                  <a:srgbClr val="1F2937"/>
-                </a:solidFill>
-                <a:latin typeface="Calibri" pitchFamily="34" charset="0"/>
-                <a:ea typeface="Calibri" pitchFamily="34" charset="-122"/>
-                <a:cs typeface="Calibri" pitchFamily="34" charset="-120"/>
-              </a:rPr>
-              <a:t>Deterministic rules first. The LLM adjusts within a bounded ±30 range — with a guardrail that prevents model drift from ever dominating the verdict.</a:t>
-            </a:r>
-            <a:endParaRPr lang="en-US" sz="1500" dirty="0"/>
-          </a:p>
-        </p:txBody>
-      </p:sp>
-      <p:sp>
-        <p:nvSpPr>
-          <p:cNvPr id="7" name="Shape 5"/>
-          <p:cNvSpPr/>
-          <p:nvPr/>
-        </p:nvSpPr>
-        <p:spPr>
-          <a:xfrm>
-            <a:off x="548640" y="2514600"/>
-            <a:ext cx="11094415" cy="1051560"/>
-          </a:xfrm>
-          <a:prstGeom prst="rect">
-            <a:avLst/>
-          </a:prstGeom>
-          <a:solidFill>
-            <a:srgbClr val="E9E9E4"/>
-          </a:solidFill>
-          <a:ln w="12700">
-            <a:solidFill>
-              <a:srgbClr val="E9E9E4"/>
-            </a:solidFill>
-            <a:prstDash val="solid"/>
-          </a:ln>
-        </p:spPr>
-      </p:sp>
-      <p:sp>
-        <p:nvSpPr>
-          <p:cNvPr id="8" name="Shape 6"/>
-          <p:cNvSpPr/>
-          <p:nvPr/>
-        </p:nvSpPr>
-        <p:spPr>
-          <a:xfrm>
-            <a:off x="548640" y="2514600"/>
-            <a:ext cx="137160" cy="1051560"/>
-          </a:xfrm>
-          <a:prstGeom prst="rect">
-            <a:avLst/>
-          </a:prstGeom>
-          <a:solidFill>
-            <a:srgbClr val="3F6B4E"/>
-          </a:solidFill>
-          <a:ln w="12700">
-            <a:solidFill>
-              <a:srgbClr val="3F6B4E"/>
-            </a:solidFill>
-            <a:prstDash val="solid"/>
-          </a:ln>
-        </p:spPr>
-      </p:sp>
-      <p:pic>
-        <p:nvPicPr>
-          <p:cNvPr id="9" name="Image 0" descr="preencoded.png">    </p:cNvPr>
-          <p:cNvPicPr>
-            <a:picLocks noChangeAspect="1"/>
-          </p:cNvPicPr>
-          <p:nvPr/>
-        </p:nvPicPr>
-        <p:blipFill>
-          <a:blip r:embed="rId1"/>
-          <a:stretch>
-            <a:fillRect/>
-          </a:stretch>
-        </p:blipFill>
-        <p:spPr>
-          <a:xfrm>
-            <a:off x="960120" y="2788920"/>
-            <a:ext cx="502920" cy="502920"/>
-          </a:xfrm>
-          <a:prstGeom prst="rect">
-            <a:avLst/>
-          </a:prstGeom>
-        </p:spPr>
-      </p:pic>
-      <p:sp>
-        <p:nvSpPr>
-          <p:cNvPr id="10" name="Text 7"/>
-          <p:cNvSpPr/>
-          <p:nvPr/>
-        </p:nvSpPr>
-        <p:spPr>
-          <a:xfrm>
-            <a:off x="1645920" y="2651760"/>
-            <a:ext cx="2194560" cy="411480"/>
-          </a:xfrm>
-          <a:prstGeom prst="rect">
-            <a:avLst/>
-          </a:prstGeom>
-          <a:noFill/>
-          <a:ln/>
-        </p:spPr>
-        <p:txBody>
-          <a:bodyPr wrap="square" lIns="0" tIns="0" rIns="0" bIns="0" rtlCol="0" anchor="ctr"/>
-          <a:lstStyle/>
-          <a:p>
-            <a:pPr algn="l" indent="0" marL="0">
-              <a:buNone/>
-            </a:pPr>
-            <a:r>
-              <a:rPr lang="en-US" sz="2000" b="1" dirty="0">
-                <a:solidFill>
-                  <a:srgbClr val="3F6B4E"/>
-                </a:solidFill>
-                <a:latin typeface="Georgia" pitchFamily="34" charset="0"/>
-                <a:ea typeface="Georgia" pitchFamily="34" charset="-122"/>
-                <a:cs typeface="Georgia" pitchFamily="34" charset="-120"/>
-              </a:rPr>
-              <a:t>APPROVED</a:t>
-            </a:r>
-            <a:endParaRPr lang="en-US" sz="2000" dirty="0"/>
-          </a:p>
-        </p:txBody>
-      </p:sp>
-      <p:sp>
-        <p:nvSpPr>
-          <p:cNvPr id="11" name="Text 8"/>
-          <p:cNvSpPr/>
-          <p:nvPr/>
-        </p:nvSpPr>
-        <p:spPr>
-          <a:xfrm>
-            <a:off x="1645920" y="3063240"/>
-            <a:ext cx="2194560" cy="365760"/>
-          </a:xfrm>
-          <a:prstGeom prst="rect">
-            <a:avLst/>
-          </a:prstGeom>
-          <a:noFill/>
-          <a:ln/>
-        </p:spPr>
-        <p:txBody>
-          <a:bodyPr wrap="square" lIns="0" tIns="0" rIns="0" bIns="0" rtlCol="0" anchor="t"/>
-          <a:lstStyle/>
-          <a:p>
-            <a:pPr algn="l" indent="0" marL="0">
-              <a:buNone/>
-            </a:pPr>
-            <a:r>
-              <a:rPr lang="en-US" sz="1300" i="1" dirty="0">
-                <a:solidFill>
-                  <a:srgbClr val="64748B"/>
-                </a:solidFill>
-                <a:latin typeface="Calibri" pitchFamily="34" charset="0"/>
-                <a:ea typeface="Calibri" pitchFamily="34" charset="-122"/>
-                <a:cs typeface="Calibri" pitchFamily="34" charset="-120"/>
-              </a:rPr>
-              <a:t>SRI ≤ 25</a:t>
-            </a:r>
-            <a:endParaRPr lang="en-US" sz="1300" dirty="0"/>
-          </a:p>
-        </p:txBody>
-      </p:sp>
-      <p:sp>
-        <p:nvSpPr>
-          <p:cNvPr id="12" name="Text 9"/>
-          <p:cNvSpPr/>
-          <p:nvPr/>
-        </p:nvSpPr>
-        <p:spPr>
-          <a:xfrm>
-            <a:off x="4023360" y="2514600"/>
-            <a:ext cx="7436815" cy="1051560"/>
-          </a:xfrm>
-          <a:prstGeom prst="rect">
-            <a:avLst/>
-          </a:prstGeom>
-          <a:noFill/>
-          <a:ln/>
-        </p:spPr>
-        <p:txBody>
-          <a:bodyPr wrap="square" lIns="0" tIns="0" rIns="0" bIns="0" rtlCol="0" anchor="ctr"/>
-          <a:lstStyle/>
-          <a:p>
-            <a:pPr algn="l" indent="0" marL="0">
-              <a:buNone/>
-            </a:pPr>
-            <a:r>
-              <a:rPr lang="en-US" sz="1400" dirty="0">
-                <a:solidFill>
-                  <a:srgbClr val="1F2937"/>
-                </a:solidFill>
-                <a:latin typeface="Calibri" pitchFamily="34" charset="0"/>
-                <a:ea typeface="Calibri" pitchFamily="34" charset="-122"/>
-                <a:cs typeface="Calibri" pitchFamily="34" charset="-120"/>
-              </a:rPr>
-              <a:t>No HIGH / CRITICAL violation · Cleared for execution</a:t>
-            </a:r>
-            <a:endParaRPr lang="en-US" sz="1400" dirty="0"/>
-          </a:p>
-        </p:txBody>
-      </p:sp>
-      <p:sp>
-        <p:nvSpPr>
-          <p:cNvPr id="13" name="Shape 10"/>
-          <p:cNvSpPr/>
-          <p:nvPr/>
-        </p:nvSpPr>
-        <p:spPr>
-          <a:xfrm>
-            <a:off x="548640" y="3703320"/>
-            <a:ext cx="11094415" cy="1051560"/>
-          </a:xfrm>
-          <a:prstGeom prst="rect">
-            <a:avLst/>
-          </a:prstGeom>
-          <a:solidFill>
-            <a:srgbClr val="E9E9E4"/>
-          </a:solidFill>
-          <a:ln w="12700">
-            <a:solidFill>
-              <a:srgbClr val="E9E9E4"/>
-            </a:solidFill>
-            <a:prstDash val="solid"/>
-          </a:ln>
-        </p:spPr>
-      </p:sp>
-      <p:sp>
-        <p:nvSpPr>
-          <p:cNvPr id="14" name="Shape 11"/>
-          <p:cNvSpPr/>
-          <p:nvPr/>
-        </p:nvSpPr>
-        <p:spPr>
-          <a:xfrm>
-            <a:off x="548640" y="3703320"/>
-            <a:ext cx="137160" cy="1051560"/>
-          </a:xfrm>
-          <a:prstGeom prst="rect">
-            <a:avLst/>
-          </a:prstGeom>
-          <a:solidFill>
-            <a:srgbClr val="B88A2E"/>
-          </a:solidFill>
-          <a:ln w="12700">
-            <a:solidFill>
-              <a:srgbClr val="B88A2E"/>
-            </a:solidFill>
-            <a:prstDash val="solid"/>
-          </a:ln>
-        </p:spPr>
-      </p:sp>
-      <p:pic>
-        <p:nvPicPr>
-          <p:cNvPr id="15" name="Image 1" descr="preencoded.png">    </p:cNvPr>
-          <p:cNvPicPr>
-            <a:picLocks noChangeAspect="1"/>
-          </p:cNvPicPr>
-          <p:nvPr/>
-        </p:nvPicPr>
-        <p:blipFill>
-          <a:blip r:embed="rId2"/>
-          <a:stretch>
-            <a:fillRect/>
-          </a:stretch>
-        </p:blipFill>
-        <p:spPr>
-          <a:xfrm>
-            <a:off x="960120" y="3977640"/>
-            <a:ext cx="502920" cy="502920"/>
-          </a:xfrm>
-          <a:prstGeom prst="rect">
-            <a:avLst/>
-          </a:prstGeom>
-        </p:spPr>
-      </p:pic>
-      <p:sp>
-        <p:nvSpPr>
-          <p:cNvPr id="16" name="Text 12"/>
-          <p:cNvSpPr/>
-          <p:nvPr/>
-        </p:nvSpPr>
-        <p:spPr>
-          <a:xfrm>
-            <a:off x="1645920" y="3840480"/>
-            <a:ext cx="2194560" cy="411480"/>
-          </a:xfrm>
-          <a:prstGeom prst="rect">
-            <a:avLst/>
-          </a:prstGeom>
-          <a:noFill/>
-          <a:ln/>
-        </p:spPr>
-        <p:txBody>
-          <a:bodyPr wrap="square" lIns="0" tIns="0" rIns="0" bIns="0" rtlCol="0" anchor="ctr"/>
-          <a:lstStyle/>
-          <a:p>
-            <a:pPr algn="l" indent="0" marL="0">
-              <a:buNone/>
-            </a:pPr>
-            <a:r>
-              <a:rPr lang="en-US" sz="2000" b="1" dirty="0">
-                <a:solidFill>
-                  <a:srgbClr val="B88A2E"/>
-                </a:solidFill>
-                <a:latin typeface="Georgia" pitchFamily="34" charset="0"/>
-                <a:ea typeface="Georgia" pitchFamily="34" charset="-122"/>
-                <a:cs typeface="Georgia" pitchFamily="34" charset="-120"/>
-              </a:rPr>
-              <a:t>ESCALATED</a:t>
-            </a:r>
-            <a:endParaRPr lang="en-US" sz="2000" dirty="0"/>
-          </a:p>
-        </p:txBody>
-      </p:sp>
-      <p:sp>
-        <p:nvSpPr>
-          <p:cNvPr id="17" name="Text 13"/>
-          <p:cNvSpPr/>
-          <p:nvPr/>
-        </p:nvSpPr>
-        <p:spPr>
-          <a:xfrm>
-            <a:off x="1645920" y="4251960"/>
-            <a:ext cx="2194560" cy="365760"/>
-          </a:xfrm>
-          <a:prstGeom prst="rect">
-            <a:avLst/>
-          </a:prstGeom>
-          <a:noFill/>
-          <a:ln/>
-        </p:spPr>
-        <p:txBody>
-          <a:bodyPr wrap="square" lIns="0" tIns="0" rIns="0" bIns="0" rtlCol="0" anchor="t"/>
-          <a:lstStyle/>
-          <a:p>
-            <a:pPr algn="l" indent="0" marL="0">
-              <a:buNone/>
-            </a:pPr>
-            <a:r>
-              <a:rPr lang="en-US" sz="1300" i="1" dirty="0">
-                <a:solidFill>
-                  <a:srgbClr val="64748B"/>
-                </a:solidFill>
-                <a:latin typeface="Calibri" pitchFamily="34" charset="0"/>
-                <a:ea typeface="Calibri" pitchFamily="34" charset="-122"/>
-                <a:cs typeface="Calibri" pitchFamily="34" charset="-120"/>
-              </a:rPr>
-              <a:t>SRI 26 – 60</a:t>
-            </a:r>
-            <a:endParaRPr lang="en-US" sz="1300" dirty="0"/>
-          </a:p>
-        </p:txBody>
-      </p:sp>
-      <p:sp>
-        <p:nvSpPr>
-          <p:cNvPr id="18" name="Text 14"/>
-          <p:cNvSpPr/>
-          <p:nvPr/>
-        </p:nvSpPr>
-        <p:spPr>
-          <a:xfrm>
-            <a:off x="4023360" y="3703320"/>
-            <a:ext cx="7436815" cy="1051560"/>
-          </a:xfrm>
-          <a:prstGeom prst="rect">
-            <a:avLst/>
-          </a:prstGeom>
-          <a:noFill/>
-          <a:ln/>
-        </p:spPr>
-        <p:txBody>
-          <a:bodyPr wrap="square" lIns="0" tIns="0" rIns="0" bIns="0" rtlCol="0" anchor="ctr"/>
-          <a:lstStyle/>
-          <a:p>
-            <a:pPr algn="l" indent="0" marL="0">
-              <a:buNone/>
-            </a:pPr>
-            <a:r>
-              <a:rPr lang="en-US" sz="1400" dirty="0">
-                <a:solidFill>
-                  <a:srgbClr val="1F2937"/>
-                </a:solidFill>
-                <a:latin typeface="Calibri" pitchFamily="34" charset="0"/>
-                <a:ea typeface="Calibri" pitchFamily="34" charset="-122"/>
-                <a:cs typeface="Calibri" pitchFamily="34" charset="-120"/>
-              </a:rPr>
-              <a:t>…or any HIGH violation · Human review required</a:t>
-            </a:r>
-            <a:endParaRPr lang="en-US" sz="1400" dirty="0"/>
-          </a:p>
-        </p:txBody>
-      </p:sp>
-      <p:sp>
-        <p:nvSpPr>
-          <p:cNvPr id="19" name="Shape 15"/>
-          <p:cNvSpPr/>
-          <p:nvPr/>
-        </p:nvSpPr>
-        <p:spPr>
-          <a:xfrm>
-            <a:off x="548640" y="4892040"/>
-            <a:ext cx="11094415" cy="1051560"/>
-          </a:xfrm>
-          <a:prstGeom prst="rect">
-            <a:avLst/>
-          </a:prstGeom>
-          <a:solidFill>
-            <a:srgbClr val="E9E9E4"/>
-          </a:solidFill>
-          <a:ln w="12700">
-            <a:solidFill>
-              <a:srgbClr val="E9E9E4"/>
-            </a:solidFill>
-            <a:prstDash val="solid"/>
-          </a:ln>
-        </p:spPr>
-      </p:sp>
-      <p:sp>
-        <p:nvSpPr>
-          <p:cNvPr id="20" name="Shape 16"/>
-          <p:cNvSpPr/>
-          <p:nvPr/>
-        </p:nvSpPr>
-        <p:spPr>
-          <a:xfrm>
-            <a:off x="548640" y="4892040"/>
-            <a:ext cx="137160" cy="1051560"/>
-          </a:xfrm>
-          <a:prstGeom prst="rect">
-            <a:avLst/>
-          </a:prstGeom>
-          <a:solidFill>
-            <a:srgbClr val="8B2635"/>
-          </a:solidFill>
-          <a:ln w="12700">
-            <a:solidFill>
-              <a:srgbClr val="8B2635"/>
-            </a:solidFill>
-            <a:prstDash val="solid"/>
-          </a:ln>
-        </p:spPr>
-      </p:sp>
-      <p:pic>
-        <p:nvPicPr>
-          <p:cNvPr id="21" name="Image 2" descr="preencoded.png">    </p:cNvPr>
-          <p:cNvPicPr>
-            <a:picLocks noChangeAspect="1"/>
-          </p:cNvPicPr>
-          <p:nvPr/>
-        </p:nvPicPr>
-        <p:blipFill>
-          <a:blip r:embed="rId3"/>
-          <a:stretch>
-            <a:fillRect/>
-          </a:stretch>
-        </p:blipFill>
-        <p:spPr>
-          <a:xfrm>
-            <a:off x="960120" y="5166360"/>
-            <a:ext cx="502920" cy="502920"/>
-          </a:xfrm>
-          <a:prstGeom prst="rect">
-            <a:avLst/>
-          </a:prstGeom>
-        </p:spPr>
-      </p:pic>
-      <p:sp>
-        <p:nvSpPr>
-          <p:cNvPr id="22" name="Text 17"/>
-          <p:cNvSpPr/>
-          <p:nvPr/>
-        </p:nvSpPr>
-        <p:spPr>
-          <a:xfrm>
-            <a:off x="1645920" y="5029200"/>
-            <a:ext cx="2194560" cy="411480"/>
-          </a:xfrm>
-          <a:prstGeom prst="rect">
-            <a:avLst/>
-          </a:prstGeom>
-          <a:noFill/>
-          <a:ln/>
-        </p:spPr>
-        <p:txBody>
-          <a:bodyPr wrap="square" lIns="0" tIns="0" rIns="0" bIns="0" rtlCol="0" anchor="ctr"/>
-          <a:lstStyle/>
-          <a:p>
-            <a:pPr algn="l" indent="0" marL="0">
-              <a:buNone/>
-            </a:pPr>
-            <a:r>
-              <a:rPr lang="en-US" sz="2000" b="1" dirty="0">
-                <a:solidFill>
-                  <a:srgbClr val="8B2635"/>
-                </a:solidFill>
-                <a:latin typeface="Georgia" pitchFamily="34" charset="0"/>
-                <a:ea typeface="Georgia" pitchFamily="34" charset="-122"/>
-                <a:cs typeface="Georgia" pitchFamily="34" charset="-120"/>
-              </a:rPr>
-              <a:t>DENIED</a:t>
-            </a:r>
-            <a:endParaRPr lang="en-US" sz="2000" dirty="0"/>
-          </a:p>
-        </p:txBody>
-      </p:sp>
-      <p:sp>
-        <p:nvSpPr>
-          <p:cNvPr id="23" name="Text 18"/>
-          <p:cNvSpPr/>
-          <p:nvPr/>
-        </p:nvSpPr>
-        <p:spPr>
-          <a:xfrm>
-            <a:off x="1645920" y="5440680"/>
-            <a:ext cx="2194560" cy="365760"/>
-          </a:xfrm>
-          <a:prstGeom prst="rect">
-            <a:avLst/>
-          </a:prstGeom>
-          <a:noFill/>
-          <a:ln/>
-        </p:spPr>
-        <p:txBody>
-          <a:bodyPr wrap="square" lIns="0" tIns="0" rIns="0" bIns="0" rtlCol="0" anchor="t"/>
-          <a:lstStyle/>
-          <a:p>
-            <a:pPr algn="l" indent="0" marL="0">
-              <a:buNone/>
-            </a:pPr>
-            <a:r>
-              <a:rPr lang="en-US" sz="1300" i="1" dirty="0">
-                <a:solidFill>
-                  <a:srgbClr val="64748B"/>
-                </a:solidFill>
-                <a:latin typeface="Calibri" pitchFamily="34" charset="0"/>
-                <a:ea typeface="Calibri" pitchFamily="34" charset="-122"/>
-                <a:cs typeface="Calibri" pitchFamily="34" charset="-120"/>
-              </a:rPr>
-              <a:t>SRI &gt; 60</a:t>
-            </a:r>
-            <a:endParaRPr lang="en-US" sz="1300" dirty="0"/>
-          </a:p>
-        </p:txBody>
-      </p:sp>
-      <p:sp>
-        <p:nvSpPr>
-          <p:cNvPr id="24" name="Text 19"/>
-          <p:cNvSpPr/>
-          <p:nvPr/>
-        </p:nvSpPr>
-        <p:spPr>
-          <a:xfrm>
-            <a:off x="4023360" y="4892040"/>
-            <a:ext cx="7436815" cy="1051560"/>
-          </a:xfrm>
-          <a:prstGeom prst="rect">
-            <a:avLst/>
-          </a:prstGeom>
-          <a:noFill/>
-          <a:ln/>
-        </p:spPr>
-        <p:txBody>
-          <a:bodyPr wrap="square" lIns="0" tIns="0" rIns="0" bIns="0" rtlCol="0" anchor="ctr"/>
-          <a:lstStyle/>
-          <a:p>
-            <a:pPr algn="l" indent="0" marL="0">
-              <a:buNone/>
-            </a:pPr>
-            <a:r>
-              <a:rPr lang="en-US" sz="1400" dirty="0">
-                <a:solidFill>
-                  <a:srgbClr val="1F2937"/>
-                </a:solidFill>
-                <a:latin typeface="Calibri" pitchFamily="34" charset="0"/>
-                <a:ea typeface="Calibri" pitchFamily="34" charset="-122"/>
-                <a:cs typeface="Calibri" pitchFamily="34" charset="-120"/>
-              </a:rPr>
-              <a:t>…or any CRITICAL violation · Action blocked</a:t>
-            </a:r>
-            <a:endParaRPr lang="en-US" sz="1400" dirty="0"/>
-          </a:p>
-        </p:txBody>
-      </p:sp>
-      <p:sp>
-        <p:nvSpPr>
-          <p:cNvPr id="25" name="Text 20"/>
-          <p:cNvSpPr/>
-          <p:nvPr/>
-        </p:nvSpPr>
-        <p:spPr>
-          <a:xfrm>
-            <a:off x="548640" y="6035040"/>
-            <a:ext cx="11094415" cy="320040"/>
-          </a:xfrm>
-          <a:prstGeom prst="rect">
-            <a:avLst/>
-          </a:prstGeom>
-          <a:noFill/>
-          <a:ln/>
-        </p:spPr>
-        <p:txBody>
-          <a:bodyPr wrap="square" lIns="0" tIns="0" rIns="0" bIns="0" rtlCol="0" anchor="ctr"/>
-          <a:lstStyle/>
-          <a:p>
-            <a:pPr algn="ctr" indent="0" marL="0">
-              <a:buNone/>
-            </a:pPr>
-            <a:r>
-              <a:rPr lang="en-US" sz="1500" i="1" dirty="0">
-                <a:solidFill>
-                  <a:srgbClr val="2F3E46"/>
-                </a:solidFill>
-                <a:latin typeface="Georgia" pitchFamily="34" charset="0"/>
-                <a:ea typeface="Georgia" pitchFamily="34" charset="-122"/>
-                <a:cs typeface="Georgia" pitchFamily="34" charset="-120"/>
-              </a:rPr>
-              <a:t>Critical-severity policies always require human approval. The LLM cannot override them.</a:t>
-            </a:r>
-            <a:endParaRPr lang="en-US" sz="1500" dirty="0"/>
-          </a:p>
-        </p:txBody>
-      </p:sp>
-    </p:spTree>
-  </p:cSld>
-  <p:clrMapOvr>
-    <a:masterClrMapping/>
-  </p:clrMapOvr>
-</p:sld>
-</file>
-
 <file path=ppt/slides/slide9.xml><?xml version="1.0" encoding="utf-8"?>
 <p:sld xmlns:a="http://schemas.openxmlformats.org/drawingml/2006/main" xmlns:r="http://schemas.openxmlformats.org/officeDocument/2006/relationships" xmlns:p="http://schemas.openxmlformats.org/presentationml/2006/main">
   <p:cSld name="Slide 9">
@@ -11722,7 +11989,7 @@
                 <a:ea typeface="Georgia" pitchFamily="34" charset="-122"/>
                 <a:cs typeface="Georgia" pitchFamily="34" charset="-120"/>
               </a:rPr>
-              <a:t>Architecturally different</a:t>
+              <a:t>The decision surface</a:t>
             </a:r>
             <a:endParaRPr lang="en-US" sz="3600" dirty="0"/>
           </a:p>
@@ -11808,14 +12075,53 @@
       </p:sp>
       <p:sp>
         <p:nvSpPr>
-          <p:cNvPr id="6" name="Shape 4"/>
-          <p:cNvSpPr/>
-          <p:nvPr/>
-        </p:nvSpPr>
-        <p:spPr>
-          <a:xfrm>
-            <a:off x="548640" y="1828800"/>
-            <a:ext cx="3515258" cy="4114800"/>
+          <p:cNvPr id="6" name="Text 4"/>
+          <p:cNvSpPr/>
+          <p:nvPr/>
+        </p:nvSpPr>
+        <p:spPr>
+          <a:xfrm>
+            <a:off x="548640" y="1600200"/>
+            <a:ext cx="11094415" cy="548640"/>
+          </a:xfrm>
+          <a:prstGeom prst="rect">
+            <a:avLst/>
+          </a:prstGeom>
+          <a:noFill/>
+          <a:ln/>
+        </p:spPr>
+        <p:txBody>
+          <a:bodyPr wrap="square" lIns="0" tIns="0" rIns="0" bIns="0" rtlCol="0" anchor="ctr"/>
+          <a:lstStyle/>
+          <a:p>
+            <a:pPr indent="0" marL="0">
+              <a:buNone/>
+            </a:pPr>
+            <a:r>
+              <a:rPr lang="en-US" sz="1500" dirty="0">
+                <a:solidFill>
+                  <a:srgbClr val="1F2937"/>
+                </a:solidFill>
+                <a:latin typeface="Calibri" pitchFamily="34" charset="0"/>
+                <a:ea typeface="Calibri" pitchFamily="34" charset="-122"/>
+                <a:cs typeface="Calibri" pitchFamily="34" charset="-120"/>
+              </a:rPr>
+              <a:t>Deterministic rules first. The LLM adjusts within a bounded ±30 range — with a guardrail that prevents model drift from ever dominating the verdict.</a:t>
+            </a:r>
+            <a:endParaRPr lang="en-US" sz="1500" dirty="0"/>
+          </a:p>
+        </p:txBody>
+      </p:sp>
+      <p:sp>
+        <p:nvSpPr>
+          <p:cNvPr id="7" name="Shape 5"/>
+          <p:cNvSpPr/>
+          <p:nvPr/>
+        </p:nvSpPr>
+        <p:spPr>
+          <a:xfrm>
+            <a:off x="548640" y="2514600"/>
+            <a:ext cx="11094415" cy="1051560"/>
           </a:xfrm>
           <a:prstGeom prst="rect">
             <a:avLst/>
@@ -11833,24 +12139,24 @@
       </p:sp>
       <p:sp>
         <p:nvSpPr>
-          <p:cNvPr id="7" name="Shape 5"/>
-          <p:cNvSpPr/>
-          <p:nvPr/>
-        </p:nvSpPr>
-        <p:spPr>
-          <a:xfrm>
-            <a:off x="548640" y="1828800"/>
-            <a:ext cx="3515258" cy="91440"/>
+          <p:cNvPr id="8" name="Shape 6"/>
+          <p:cNvSpPr/>
+          <p:nvPr/>
+        </p:nvSpPr>
+        <p:spPr>
+          <a:xfrm>
+            <a:off x="548640" y="2514600"/>
+            <a:ext cx="137160" cy="1051560"/>
           </a:xfrm>
           <a:prstGeom prst="rect">
             <a:avLst/>
           </a:prstGeom>
           <a:solidFill>
-            <a:srgbClr val="F59E0B"/>
+            <a:srgbClr val="3F6B4E"/>
           </a:solidFill>
           <a:ln w="12700">
             <a:solidFill>
-              <a:srgbClr val="F59E0B"/>
+              <a:srgbClr val="3F6B4E"/>
             </a:solidFill>
             <a:prstDash val="solid"/>
           </a:ln>
@@ -11858,7 +12164,7 @@
       </p:sp>
       <p:pic>
         <p:nvPicPr>
-          <p:cNvPr id="8" name="Image 0" descr="preencoded.png">    </p:cNvPr>
+          <p:cNvPr id="9" name="Image 0" descr="preencoded.png">    </p:cNvPr>
           <p:cNvPicPr>
             <a:picLocks noChangeAspect="1"/>
           </p:cNvPicPr>
@@ -11872,8 +12178,8 @@
         </p:blipFill>
         <p:spPr>
           <a:xfrm>
-            <a:off x="914400" y="2240280"/>
-            <a:ext cx="640080" cy="640080"/>
+            <a:off x="960120" y="2788920"/>
+            <a:ext cx="502920" cy="502920"/>
           </a:xfrm>
           <a:prstGeom prst="rect">
             <a:avLst/>
@@ -11882,23 +12188,23 @@
       </p:pic>
       <p:sp>
         <p:nvSpPr>
-          <p:cNvPr id="9" name="Text 6"/>
-          <p:cNvSpPr/>
-          <p:nvPr/>
-        </p:nvSpPr>
-        <p:spPr>
-          <a:xfrm>
-            <a:off x="914400" y="3017520"/>
-            <a:ext cx="2783738" cy="822960"/>
-          </a:xfrm>
-          <a:prstGeom prst="rect">
-            <a:avLst/>
-          </a:prstGeom>
-          <a:noFill/>
-          <a:ln/>
-        </p:spPr>
-        <p:txBody>
-          <a:bodyPr wrap="square" lIns="0" tIns="0" rIns="0" bIns="0" rtlCol="0" anchor="t"/>
+          <p:cNvPr id="10" name="Text 7"/>
+          <p:cNvSpPr/>
+          <p:nvPr/>
+        </p:nvSpPr>
+        <p:spPr>
+          <a:xfrm>
+            <a:off x="1645920" y="2651760"/>
+            <a:ext cx="2194560" cy="411480"/>
+          </a:xfrm>
+          <a:prstGeom prst="rect">
+            <a:avLst/>
+          </a:prstGeom>
+          <a:noFill/>
+          <a:ln/>
+        </p:spPr>
+        <p:txBody>
+          <a:bodyPr wrap="square" lIns="0" tIns="0" rIns="0" bIns="0" rtlCol="0" anchor="ctr"/>
           <a:lstStyle/>
           <a:p>
             <a:pPr algn="l" indent="0" marL="0">
@@ -11907,13 +12213,13 @@
             <a:r>
               <a:rPr lang="en-US" sz="2000" b="1" dirty="0">
                 <a:solidFill>
-                  <a:srgbClr val="2F3E46"/>
+                  <a:srgbClr val="3F6B4E"/>
                 </a:solidFill>
                 <a:latin typeface="Georgia" pitchFamily="34" charset="0"/>
                 <a:ea typeface="Georgia" pitchFamily="34" charset="-122"/>
                 <a:cs typeface="Georgia" pitchFamily="34" charset="-120"/>
               </a:rPr>
-              <a:t>LLM as decision-maker</a:t>
+              <a:t>APPROVED</a:t>
             </a:r>
             <a:endParaRPr lang="en-US" sz="2000" dirty="0"/>
           </a:p>
@@ -11921,14 +12227,14 @@
       </p:sp>
       <p:sp>
         <p:nvSpPr>
-          <p:cNvPr id="10" name="Text 7"/>
-          <p:cNvSpPr/>
-          <p:nvPr/>
-        </p:nvSpPr>
-        <p:spPr>
-          <a:xfrm>
-            <a:off x="914400" y="3886200"/>
-            <a:ext cx="2783738" cy="1920240"/>
+          <p:cNvPr id="11" name="Text 8"/>
+          <p:cNvSpPr/>
+          <p:nvPr/>
+        </p:nvSpPr>
+        <p:spPr>
+          <a:xfrm>
+            <a:off x="1645920" y="3063240"/>
+            <a:ext cx="2194560" cy="365760"/>
           </a:xfrm>
           <a:prstGeom prst="rect">
             <a:avLst/>
@@ -11944,15 +12250,54 @@
               <a:buNone/>
             </a:pPr>
             <a:r>
-              <a:rPr lang="en-US" sz="1400" dirty="0">
-                <a:solidFill>
-                  <a:srgbClr val="1F2937"/>
+              <a:rPr lang="en-US" sz="1300" i="1" dirty="0">
+                <a:solidFill>
+                  <a:srgbClr val="64748B"/>
                 </a:solidFill>
                 <a:latin typeface="Calibri" pitchFamily="34" charset="0"/>
                 <a:ea typeface="Calibri" pitchFamily="34" charset="-122"/>
                 <a:cs typeface="Calibri" pitchFamily="34" charset="-120"/>
               </a:rPr>
-              <a:t>Most tools use the LLM to explain a rule-based verdict. RuriSkry lets the LLM adjust the verdict within a bounded range — with a hard clamp that prevents hallucination from dominating.</a:t>
+              <a:t>SRI ≤ 25</a:t>
+            </a:r>
+            <a:endParaRPr lang="en-US" sz="1300" dirty="0"/>
+          </a:p>
+        </p:txBody>
+      </p:sp>
+      <p:sp>
+        <p:nvSpPr>
+          <p:cNvPr id="12" name="Text 9"/>
+          <p:cNvSpPr/>
+          <p:nvPr/>
+        </p:nvSpPr>
+        <p:spPr>
+          <a:xfrm>
+            <a:off x="4023360" y="2514600"/>
+            <a:ext cx="7436815" cy="1051560"/>
+          </a:xfrm>
+          <a:prstGeom prst="rect">
+            <a:avLst/>
+          </a:prstGeom>
+          <a:noFill/>
+          <a:ln/>
+        </p:spPr>
+        <p:txBody>
+          <a:bodyPr wrap="square" lIns="0" tIns="0" rIns="0" bIns="0" rtlCol="0" anchor="ctr"/>
+          <a:lstStyle/>
+          <a:p>
+            <a:pPr algn="l" indent="0" marL="0">
+              <a:buNone/>
+            </a:pPr>
+            <a:r>
+              <a:rPr lang="en-US" sz="1400" dirty="0">
+                <a:solidFill>
+                  <a:srgbClr val="1F2937"/>
+                </a:solidFill>
+                <a:latin typeface="Calibri" pitchFamily="34" charset="0"/>
+                <a:ea typeface="Calibri" pitchFamily="34" charset="-122"/>
+                <a:cs typeface="Calibri" pitchFamily="34" charset="-120"/>
+              </a:rPr>
+              <a:t>No HIGH / CRITICAL violation · Cleared for execution</a:t>
             </a:r>
             <a:endParaRPr lang="en-US" sz="1400" dirty="0"/>
           </a:p>
@@ -11960,14 +12305,14 @@
       </p:sp>
       <p:sp>
         <p:nvSpPr>
-          <p:cNvPr id="11" name="Shape 8"/>
-          <p:cNvSpPr/>
-          <p:nvPr/>
-        </p:nvSpPr>
-        <p:spPr>
-          <a:xfrm>
-            <a:off x="4338218" y="1828800"/>
-            <a:ext cx="3515258" cy="4114800"/>
+          <p:cNvPr id="13" name="Shape 10"/>
+          <p:cNvSpPr/>
+          <p:nvPr/>
+        </p:nvSpPr>
+        <p:spPr>
+          <a:xfrm>
+            <a:off x="548640" y="3703320"/>
+            <a:ext cx="11094415" cy="1051560"/>
           </a:xfrm>
           <a:prstGeom prst="rect">
             <a:avLst/>
@@ -11985,24 +12330,24 @@
       </p:sp>
       <p:sp>
         <p:nvSpPr>
-          <p:cNvPr id="12" name="Shape 9"/>
-          <p:cNvSpPr/>
-          <p:nvPr/>
-        </p:nvSpPr>
-        <p:spPr>
-          <a:xfrm>
-            <a:off x="4338218" y="1828800"/>
-            <a:ext cx="3515258" cy="91440"/>
+          <p:cNvPr id="14" name="Shape 11"/>
+          <p:cNvSpPr/>
+          <p:nvPr/>
+        </p:nvSpPr>
+        <p:spPr>
+          <a:xfrm>
+            <a:off x="548640" y="3703320"/>
+            <a:ext cx="137160" cy="1051560"/>
           </a:xfrm>
           <a:prstGeom prst="rect">
             <a:avLst/>
           </a:prstGeom>
           <a:solidFill>
-            <a:srgbClr val="F59E0B"/>
+            <a:srgbClr val="B88A2E"/>
           </a:solidFill>
           <a:ln w="12700">
             <a:solidFill>
-              <a:srgbClr val="F59E0B"/>
+              <a:srgbClr val="B88A2E"/>
             </a:solidFill>
             <a:prstDash val="solid"/>
           </a:ln>
@@ -12010,7 +12355,7 @@
       </p:sp>
       <p:pic>
         <p:nvPicPr>
-          <p:cNvPr id="13" name="Image 1" descr="preencoded.png">    </p:cNvPr>
+          <p:cNvPr id="15" name="Image 1" descr="preencoded.png">    </p:cNvPr>
           <p:cNvPicPr>
             <a:picLocks noChangeAspect="1"/>
           </p:cNvPicPr>
@@ -12024,8 +12369,8 @@
         </p:blipFill>
         <p:spPr>
           <a:xfrm>
-            <a:off x="4703978" y="2240280"/>
-            <a:ext cx="640080" cy="640080"/>
+            <a:off x="960120" y="3977640"/>
+            <a:ext cx="502920" cy="502920"/>
           </a:xfrm>
           <a:prstGeom prst="rect">
             <a:avLst/>
@@ -12034,23 +12379,23 @@
       </p:pic>
       <p:sp>
         <p:nvSpPr>
-          <p:cNvPr id="14" name="Text 10"/>
-          <p:cNvSpPr/>
-          <p:nvPr/>
-        </p:nvSpPr>
-        <p:spPr>
-          <a:xfrm>
-            <a:off x="4703978" y="3017520"/>
-            <a:ext cx="2783738" cy="822960"/>
-          </a:xfrm>
-          <a:prstGeom prst="rect">
-            <a:avLst/>
-          </a:prstGeom>
-          <a:noFill/>
-          <a:ln/>
-        </p:spPr>
-        <p:txBody>
-          <a:bodyPr wrap="square" lIns="0" tIns="0" rIns="0" bIns="0" rtlCol="0" anchor="t"/>
+          <p:cNvPr id="16" name="Text 12"/>
+          <p:cNvSpPr/>
+          <p:nvPr/>
+        </p:nvSpPr>
+        <p:spPr>
+          <a:xfrm>
+            <a:off x="1645920" y="3840480"/>
+            <a:ext cx="2194560" cy="411480"/>
+          </a:xfrm>
+          <a:prstGeom prst="rect">
+            <a:avLst/>
+          </a:prstGeom>
+          <a:noFill/>
+          <a:ln/>
+        </p:spPr>
+        <p:txBody>
+          <a:bodyPr wrap="square" lIns="0" tIns="0" rIns="0" bIns="0" rtlCol="0" anchor="ctr"/>
           <a:lstStyle/>
           <a:p>
             <a:pPr algn="l" indent="0" marL="0">
@@ -12059,13 +12404,13 @@
             <a:r>
               <a:rPr lang="en-US" sz="2000" b="1" dirty="0">
                 <a:solidFill>
-                  <a:srgbClr val="2F3E46"/>
+                  <a:srgbClr val="B88A2E"/>
                 </a:solidFill>
                 <a:latin typeface="Georgia" pitchFamily="34" charset="0"/>
                 <a:ea typeface="Georgia" pitchFamily="34" charset="-122"/>
                 <a:cs typeface="Georgia" pitchFamily="34" charset="-120"/>
               </a:rPr>
-              <a:t>IaC-safe execution</a:t>
+              <a:t>ESCALATED</a:t>
             </a:r>
             <a:endParaRPr lang="en-US" sz="2000" dirty="0"/>
           </a:p>
@@ -12073,14 +12418,14 @@
       </p:sp>
       <p:sp>
         <p:nvSpPr>
-          <p:cNvPr id="15" name="Text 11"/>
-          <p:cNvSpPr/>
-          <p:nvPr/>
-        </p:nvSpPr>
-        <p:spPr>
-          <a:xfrm>
-            <a:off x="4703978" y="3886200"/>
-            <a:ext cx="2783738" cy="1920240"/>
+          <p:cNvPr id="17" name="Text 13"/>
+          <p:cNvSpPr/>
+          <p:nvPr/>
+        </p:nvSpPr>
+        <p:spPr>
+          <a:xfrm>
+            <a:off x="1645920" y="4251960"/>
+            <a:ext cx="2194560" cy="365760"/>
           </a:xfrm>
           <a:prstGeom prst="rect">
             <a:avLst/>
@@ -12096,15 +12441,54 @@
               <a:buNone/>
             </a:pPr>
             <a:r>
-              <a:rPr lang="en-US" sz="1400" dirty="0">
-                <a:solidFill>
-                  <a:srgbClr val="1F2937"/>
+              <a:rPr lang="en-US" sz="1300" i="1" dirty="0">
+                <a:solidFill>
+                  <a:srgbClr val="64748B"/>
                 </a:solidFill>
                 <a:latin typeface="Calibri" pitchFamily="34" charset="0"/>
                 <a:ea typeface="Calibri" pitchFamily="34" charset="-122"/>
                 <a:cs typeface="Calibri" pitchFamily="34" charset="-120"/>
               </a:rPr>
-              <a:t>Approved changes do not execute directly on Azure — Terraform would revert them. They open a pull request against the IaC repo. Governance decides; Terraform executes; humans merge.</a:t>
+              <a:t>SRI 26 – 60</a:t>
+            </a:r>
+            <a:endParaRPr lang="en-US" sz="1300" dirty="0"/>
+          </a:p>
+        </p:txBody>
+      </p:sp>
+      <p:sp>
+        <p:nvSpPr>
+          <p:cNvPr id="18" name="Text 14"/>
+          <p:cNvSpPr/>
+          <p:nvPr/>
+        </p:nvSpPr>
+        <p:spPr>
+          <a:xfrm>
+            <a:off x="4023360" y="3703320"/>
+            <a:ext cx="7436815" cy="1051560"/>
+          </a:xfrm>
+          <a:prstGeom prst="rect">
+            <a:avLst/>
+          </a:prstGeom>
+          <a:noFill/>
+          <a:ln/>
+        </p:spPr>
+        <p:txBody>
+          <a:bodyPr wrap="square" lIns="0" tIns="0" rIns="0" bIns="0" rtlCol="0" anchor="ctr"/>
+          <a:lstStyle/>
+          <a:p>
+            <a:pPr algn="l" indent="0" marL="0">
+              <a:buNone/>
+            </a:pPr>
+            <a:r>
+              <a:rPr lang="en-US" sz="1400" dirty="0">
+                <a:solidFill>
+                  <a:srgbClr val="1F2937"/>
+                </a:solidFill>
+                <a:latin typeface="Calibri" pitchFamily="34" charset="0"/>
+                <a:ea typeface="Calibri" pitchFamily="34" charset="-122"/>
+                <a:cs typeface="Calibri" pitchFamily="34" charset="-120"/>
+              </a:rPr>
+              <a:t>…or any HIGH violation · Human review required</a:t>
             </a:r>
             <a:endParaRPr lang="en-US" sz="1400" dirty="0"/>
           </a:p>
@@ -12112,14 +12496,14 @@
       </p:sp>
       <p:sp>
         <p:nvSpPr>
-          <p:cNvPr id="16" name="Shape 12"/>
-          <p:cNvSpPr/>
-          <p:nvPr/>
-        </p:nvSpPr>
-        <p:spPr>
-          <a:xfrm>
-            <a:off x="8127797" y="1828800"/>
-            <a:ext cx="3515258" cy="4114800"/>
+          <p:cNvPr id="19" name="Shape 15"/>
+          <p:cNvSpPr/>
+          <p:nvPr/>
+        </p:nvSpPr>
+        <p:spPr>
+          <a:xfrm>
+            <a:off x="548640" y="4892040"/>
+            <a:ext cx="11094415" cy="1051560"/>
           </a:xfrm>
           <a:prstGeom prst="rect">
             <a:avLst/>
@@ -12137,24 +12521,24 @@
       </p:sp>
       <p:sp>
         <p:nvSpPr>
-          <p:cNvPr id="17" name="Shape 13"/>
-          <p:cNvSpPr/>
-          <p:nvPr/>
-        </p:nvSpPr>
-        <p:spPr>
-          <a:xfrm>
-            <a:off x="8127797" y="1828800"/>
-            <a:ext cx="3515258" cy="91440"/>
+          <p:cNvPr id="20" name="Shape 16"/>
+          <p:cNvSpPr/>
+          <p:nvPr/>
+        </p:nvSpPr>
+        <p:spPr>
+          <a:xfrm>
+            <a:off x="548640" y="4892040"/>
+            <a:ext cx="137160" cy="1051560"/>
           </a:xfrm>
           <a:prstGeom prst="rect">
             <a:avLst/>
           </a:prstGeom>
           <a:solidFill>
-            <a:srgbClr val="F59E0B"/>
+            <a:srgbClr val="8B2635"/>
           </a:solidFill>
           <a:ln w="12700">
             <a:solidFill>
-              <a:srgbClr val="F59E0B"/>
+              <a:srgbClr val="8B2635"/>
             </a:solidFill>
             <a:prstDash val="solid"/>
           </a:ln>
@@ -12162,7 +12546,7 @@
       </p:sp>
       <p:pic>
         <p:nvPicPr>
-          <p:cNvPr id="18" name="Image 2" descr="preencoded.png">    </p:cNvPr>
+          <p:cNvPr id="21" name="Image 2" descr="preencoded.png">    </p:cNvPr>
           <p:cNvPicPr>
             <a:picLocks noChangeAspect="1"/>
           </p:cNvPicPr>
@@ -12176,8 +12560,8 @@
         </p:blipFill>
         <p:spPr>
           <a:xfrm>
-            <a:off x="8493557" y="2240280"/>
-            <a:ext cx="640080" cy="640080"/>
+            <a:off x="960120" y="5166360"/>
+            <a:ext cx="502920" cy="502920"/>
           </a:xfrm>
           <a:prstGeom prst="rect">
             <a:avLst/>
@@ -12186,23 +12570,23 @@
       </p:pic>
       <p:sp>
         <p:nvSpPr>
-          <p:cNvPr id="19" name="Text 14"/>
-          <p:cNvSpPr/>
-          <p:nvPr/>
-        </p:nvSpPr>
-        <p:spPr>
-          <a:xfrm>
-            <a:off x="8493557" y="3017520"/>
-            <a:ext cx="2783738" cy="822960"/>
-          </a:xfrm>
-          <a:prstGeom prst="rect">
-            <a:avLst/>
-          </a:prstGeom>
-          <a:noFill/>
-          <a:ln/>
-        </p:spPr>
-        <p:txBody>
-          <a:bodyPr wrap="square" lIns="0" tIns="0" rIns="0" bIns="0" rtlCol="0" anchor="t"/>
+          <p:cNvPr id="22" name="Text 17"/>
+          <p:cNvSpPr/>
+          <p:nvPr/>
+        </p:nvSpPr>
+        <p:spPr>
+          <a:xfrm>
+            <a:off x="1645920" y="5029200"/>
+            <a:ext cx="2194560" cy="411480"/>
+          </a:xfrm>
+          <a:prstGeom prst="rect">
+            <a:avLst/>
+          </a:prstGeom>
+          <a:noFill/>
+          <a:ln/>
+        </p:spPr>
+        <p:txBody>
+          <a:bodyPr wrap="square" lIns="0" tIns="0" rIns="0" bIns="0" rtlCol="0" anchor="ctr"/>
           <a:lstStyle/>
           <a:p>
             <a:pPr algn="l" indent="0" marL="0">
@@ -12211,13 +12595,13 @@
             <a:r>
               <a:rPr lang="en-US" sz="2000" b="1" dirty="0">
                 <a:solidFill>
-                  <a:srgbClr val="2F3E46"/>
+                  <a:srgbClr val="8B2635"/>
                 </a:solidFill>
                 <a:latin typeface="Georgia" pitchFamily="34" charset="0"/>
                 <a:ea typeface="Georgia" pitchFamily="34" charset="-122"/>
                 <a:cs typeface="Georgia" pitchFamily="34" charset="-120"/>
               </a:rPr>
-              <a:t>Audit by default</a:t>
+              <a:t>DENIED</a:t>
             </a:r>
             <a:endParaRPr lang="en-US" sz="2000" dirty="0"/>
           </a:p>
@@ -12225,14 +12609,14 @@
       </p:sp>
       <p:sp>
         <p:nvSpPr>
-          <p:cNvPr id="20" name="Text 15"/>
-          <p:cNvSpPr/>
-          <p:nvPr/>
-        </p:nvSpPr>
-        <p:spPr>
-          <a:xfrm>
-            <a:off x="8493557" y="3886200"/>
-            <a:ext cx="2783738" cy="1920240"/>
+          <p:cNvPr id="23" name="Text 18"/>
+          <p:cNvSpPr/>
+          <p:nvPr/>
+        </p:nvSpPr>
+        <p:spPr>
+          <a:xfrm>
+            <a:off x="1645920" y="5440680"/>
+            <a:ext cx="2194560" cy="365760"/>
           </a:xfrm>
           <a:prstGeom prst="rect">
             <a:avLst/>
@@ -12248,17 +12632,95 @@
               <a:buNone/>
             </a:pPr>
             <a:r>
-              <a:rPr lang="en-US" sz="1400" dirty="0">
-                <a:solidFill>
-                  <a:srgbClr val="1F2937"/>
+              <a:rPr lang="en-US" sz="1300" i="1" dirty="0">
+                <a:solidFill>
+                  <a:srgbClr val="64748B"/>
                 </a:solidFill>
                 <a:latin typeface="Calibri" pitchFamily="34" charset="0"/>
                 <a:ea typeface="Calibri" pitchFamily="34" charset="-122"/>
                 <a:cs typeface="Calibri" pitchFamily="34" charset="-120"/>
               </a:rPr>
-              <a:t>Every verdict, every score adjustment, every human approval — persisted to Cosmos DB. Counterfactual analysis on every decision: what would change this outcome?</a:t>
+              <a:t>SRI &gt; 60</a:t>
+            </a:r>
+            <a:endParaRPr lang="en-US" sz="1300" dirty="0"/>
+          </a:p>
+        </p:txBody>
+      </p:sp>
+      <p:sp>
+        <p:nvSpPr>
+          <p:cNvPr id="24" name="Text 19"/>
+          <p:cNvSpPr/>
+          <p:nvPr/>
+        </p:nvSpPr>
+        <p:spPr>
+          <a:xfrm>
+            <a:off x="4023360" y="4892040"/>
+            <a:ext cx="7436815" cy="1051560"/>
+          </a:xfrm>
+          <a:prstGeom prst="rect">
+            <a:avLst/>
+          </a:prstGeom>
+          <a:noFill/>
+          <a:ln/>
+        </p:spPr>
+        <p:txBody>
+          <a:bodyPr wrap="square" lIns="0" tIns="0" rIns="0" bIns="0" rtlCol="0" anchor="ctr"/>
+          <a:lstStyle/>
+          <a:p>
+            <a:pPr algn="l" indent="0" marL="0">
+              <a:buNone/>
+            </a:pPr>
+            <a:r>
+              <a:rPr lang="en-US" sz="1400" dirty="0">
+                <a:solidFill>
+                  <a:srgbClr val="1F2937"/>
+                </a:solidFill>
+                <a:latin typeface="Calibri" pitchFamily="34" charset="0"/>
+                <a:ea typeface="Calibri" pitchFamily="34" charset="-122"/>
+                <a:cs typeface="Calibri" pitchFamily="34" charset="-120"/>
+              </a:rPr>
+              <a:t>…or any CRITICAL violation · Action blocked</a:t>
             </a:r>
             <a:endParaRPr lang="en-US" sz="1400" dirty="0"/>
+          </a:p>
+        </p:txBody>
+      </p:sp>
+      <p:sp>
+        <p:nvSpPr>
+          <p:cNvPr id="25" name="Text 20"/>
+          <p:cNvSpPr/>
+          <p:nvPr/>
+        </p:nvSpPr>
+        <p:spPr>
+          <a:xfrm>
+            <a:off x="548640" y="6035040"/>
+            <a:ext cx="11094415" cy="320040"/>
+          </a:xfrm>
+          <a:prstGeom prst="rect">
+            <a:avLst/>
+          </a:prstGeom>
+          <a:noFill/>
+          <a:ln/>
+        </p:spPr>
+        <p:txBody>
+          <a:bodyPr wrap="square" lIns="0" tIns="0" rIns="0" bIns="0" rtlCol="0" anchor="ctr"/>
+          <a:lstStyle/>
+          <a:p>
+            <a:pPr algn="ctr" indent="0" marL="0">
+              <a:buNone/>
+            </a:pPr>
+            <a:r>
+              <a:rPr lang="en-US" sz="1500" i="1" dirty="0">
+                <a:solidFill>
+                  <a:srgbClr val="2F3E46"/>
+                </a:solidFill>
+                <a:latin typeface="Georgia" pitchFamily="34" charset="0"/>
+                <a:ea typeface="Georgia" pitchFamily="34" charset="-122"/>
+                <a:cs typeface="Georgia" pitchFamily="34" charset="-120"/>
+              </a:rPr>
+              <a:t>Critical-severity policies always require human approval. The LLM cannot override them.</a:t>
+            </a:r>
+            <a:endParaRPr lang="en-US" sz="1500" dirty="0"/>
           </a:p>
         </p:txBody>
       </p:sp>

--- a/docs/RuriSkry-Exec-Deck.pptx
+++ b/docs/RuriSkry-Exec-Deck.pptx
@@ -2137,8 +2137,8 @@
         </p:blipFill>
         <p:spPr>
           <a:xfrm>
-            <a:off x="5638648" y="1645920"/>
-            <a:ext cx="914400" cy="914400"/>
+            <a:off x="5684368" y="1234440"/>
+            <a:ext cx="822960" cy="822960"/>
           </a:xfrm>
           <a:prstGeom prst="rect">
             <a:avLst/>
@@ -2153,7 +2153,7 @@
         </p:nvSpPr>
         <p:spPr>
           <a:xfrm>
-            <a:off x="0" y="2743200"/>
+            <a:off x="0" y="2240280"/>
             <a:ext cx="12191695" cy="914400"/>
           </a:xfrm>
           <a:prstGeom prst="rect">
@@ -2170,7 +2170,7 @@
               <a:buNone/>
             </a:pPr>
             <a:r>
-              <a:rPr lang="en-US" sz="7200" b="1" i="1" dirty="0">
+              <a:rPr lang="en-US" sz="6800" b="1" i="1" dirty="0">
                 <a:solidFill>
                   <a:srgbClr val="FFFFFF"/>
                 </a:solidFill>
@@ -2180,7 +2180,7 @@
               </a:rPr>
               <a:t>RuriSkry</a:t>
             </a:r>
-            <a:endParaRPr lang="en-US" sz="7200" dirty="0"/>
+            <a:endParaRPr lang="en-US" sz="6800" dirty="0"/>
           </a:p>
         </p:txBody>
       </p:sp>
@@ -2192,8 +2192,8 @@
         </p:nvSpPr>
         <p:spPr>
           <a:xfrm>
-            <a:off x="0" y="3840480"/>
-            <a:ext cx="12191695" cy="1097280"/>
+            <a:off x="0" y="3337560"/>
+            <a:ext cx="12191695" cy="1280160"/>
           </a:xfrm>
           <a:prstGeom prst="rect">
             <a:avLst/>
@@ -2217,7 +2217,7 @@
                 <a:ea typeface="Georgia" pitchFamily="34" charset="-122"/>
                 <a:cs typeface="Georgia" pitchFamily="34" charset="-120"/>
               </a:rPr>
-              <a:t>An AI Change Advisory Board</a:t>
+              <a:t>Azure AI Cloud Ops Agents,</a:t>
             </a:r>
             <a:endParaRPr lang="en-US" sz="2600" dirty="0"/>
           </a:p>
@@ -2234,7 +2234,7 @@
                 <a:ea typeface="Georgia" pitchFamily="34" charset="-122"/>
                 <a:cs typeface="Georgia" pitchFamily="34" charset="-120"/>
               </a:rPr>
-              <a:t>for Autonomous Cloud Agents</a:t>
+              <a:t>Governed by an AI Change Advisory Board</a:t>
             </a:r>
             <a:endParaRPr lang="en-US" sz="2600" dirty="0"/>
           </a:p>
@@ -2248,7 +2248,71 @@
         </p:nvSpPr>
         <p:spPr>
           <a:xfrm>
-            <a:off x="0" y="5669280"/>
+            <a:off x="0" y="4800600"/>
+            <a:ext cx="12191695" cy="457200"/>
+          </a:xfrm>
+          <a:prstGeom prst="rect">
+            <a:avLst/>
+          </a:prstGeom>
+          <a:noFill/>
+          <a:ln/>
+        </p:spPr>
+        <p:txBody>
+          <a:bodyPr wrap="square" rtlCol="0" anchor="ctr"/>
+          <a:lstStyle/>
+          <a:p>
+            <a:pPr algn="ctr" indent="0" marL="0">
+              <a:buNone/>
+            </a:pPr>
+            <a:r>
+              <a:rPr lang="en-US" sz="1700" i="1" dirty="0">
+                <a:solidFill>
+                  <a:srgbClr val="CBD5E1"/>
+                </a:solidFill>
+                <a:latin typeface="Georgia" pitchFamily="34" charset="0"/>
+                <a:ea typeface="Georgia" pitchFamily="34" charset="-122"/>
+                <a:cs typeface="Georgia" pitchFamily="34" charset="-120"/>
+              </a:rPr>
+              <a:t>AI agents propose the fix. An AI Change Advisory Board decides if it ships.</a:t>
+            </a:r>
+            <a:endParaRPr lang="en-US" sz="1700" dirty="0"/>
+          </a:p>
+        </p:txBody>
+      </p:sp>
+      <p:sp>
+        <p:nvSpPr>
+          <p:cNvPr id="6" name="Shape 3"/>
+          <p:cNvSpPr/>
+          <p:nvPr/>
+        </p:nvSpPr>
+        <p:spPr>
+          <a:xfrm>
+            <a:off x="6031840" y="5486400"/>
+            <a:ext cx="128016" cy="128016"/>
+          </a:xfrm>
+          <a:prstGeom prst="ellipse">
+            <a:avLst/>
+          </a:prstGeom>
+          <a:solidFill>
+            <a:srgbClr val="F59E0B"/>
+          </a:solidFill>
+          <a:ln w="12700">
+            <a:solidFill>
+              <a:srgbClr val="F59E0B"/>
+            </a:solidFill>
+            <a:prstDash val="solid"/>
+          </a:ln>
+        </p:spPr>
+      </p:sp>
+      <p:sp>
+        <p:nvSpPr>
+          <p:cNvPr id="7" name="Text 4"/>
+          <p:cNvSpPr/>
+          <p:nvPr/>
+        </p:nvSpPr>
+        <p:spPr>
+          <a:xfrm>
+            <a:off x="0" y="5806440"/>
             <a:ext cx="12191695" cy="274320"/>
           </a:xfrm>
           <a:prstGeom prst="rect">
@@ -2265,17 +2329,17 @@
               <a:buNone/>
             </a:pPr>
             <a:r>
-              <a:rPr lang="en-US" sz="1400" i="1" dirty="0">
-                <a:solidFill>
-                  <a:srgbClr val="CBD5E1"/>
+              <a:rPr lang="en-US" sz="1300" i="1" dirty="0">
+                <a:solidFill>
+                  <a:srgbClr val="94A3B8"/>
                 </a:solidFill>
                 <a:latin typeface="Calibri" pitchFamily="34" charset="0"/>
                 <a:ea typeface="Calibri" pitchFamily="34" charset="-122"/>
                 <a:cs typeface="Calibri" pitchFamily="34" charset="-120"/>
               </a:rPr>
-              <a:t>Azure-native · Open source · Production-grade</a:t>
-            </a:r>
-            <a:endParaRPr lang="en-US" sz="1400" dirty="0"/>
+              <a:t>Azure-native · Open source · Hackathon-born, production-architected</a:t>
+            </a:r>
+            <a:endParaRPr lang="en-US" sz="1300" dirty="0"/>
           </a:p>
         </p:txBody>
       </p:sp>
@@ -6343,8 +6407,8 @@
         </p:nvSpPr>
         <p:spPr>
           <a:xfrm>
-            <a:off x="0" y="1188720"/>
-            <a:ext cx="12191695" cy="914400"/>
+            <a:off x="0" y="1097280"/>
+            <a:ext cx="12191695" cy="548640"/>
           </a:xfrm>
           <a:prstGeom prst="rect">
             <a:avLst/>
@@ -6360,9 +6424,9 @@
               <a:buNone/>
             </a:pPr>
             <a:r>
-              <a:rPr lang="en-US" sz="4800" i="1" dirty="0">
-                <a:solidFill>
-                  <a:srgbClr val="FFFFFF"/>
+              <a:rPr lang="en-US" sz="2600" i="1" dirty="0">
+                <a:solidFill>
+                  <a:srgbClr val="CBD5E1"/>
                 </a:solidFill>
                 <a:latin typeface="Georgia" pitchFamily="34" charset="0"/>
                 <a:ea typeface="Georgia" pitchFamily="34" charset="-122"/>
@@ -6370,7 +6434,7 @@
               </a:rPr>
               <a:t>Thank you</a:t>
             </a:r>
-            <a:endParaRPr lang="en-US" sz="4800" dirty="0"/>
+            <a:endParaRPr lang="en-US" sz="2600" dirty="0"/>
           </a:p>
         </p:txBody>
       </p:sp>
@@ -6382,8 +6446,8 @@
         </p:nvSpPr>
         <p:spPr>
           <a:xfrm>
-            <a:off x="0" y="2377440"/>
-            <a:ext cx="12191695" cy="457200"/>
+            <a:off x="0" y="2103120"/>
+            <a:ext cx="12191695" cy="914400"/>
           </a:xfrm>
           <a:prstGeom prst="rect">
             <a:avLst/>
@@ -6399,17 +6463,17 @@
               <a:buNone/>
             </a:pPr>
             <a:r>
-              <a:rPr lang="en-US" sz="2000" dirty="0">
-                <a:solidFill>
-                  <a:srgbClr val="F59E0B"/>
+              <a:rPr lang="en-US" sz="5000" b="1" dirty="0">
+                <a:solidFill>
+                  <a:srgbClr val="FFFFFF"/>
                 </a:solidFill>
                 <a:latin typeface="Georgia" pitchFamily="34" charset="0"/>
                 <a:ea typeface="Georgia" pitchFamily="34" charset="-122"/>
                 <a:cs typeface="Georgia" pitchFamily="34" charset="-120"/>
               </a:rPr>
-              <a:t>Questions I would like to explore</a:t>
-            </a:r>
-            <a:endParaRPr lang="en-US" sz="2000" dirty="0"/>
+              <a:t>AI agents propose the fix.</a:t>
+            </a:r>
+            <a:endParaRPr lang="en-US" sz="5000" dirty="0"/>
           </a:p>
         </p:txBody>
       </p:sp>
@@ -6421,24 +6485,24 @@
         </p:nvSpPr>
         <p:spPr>
           <a:xfrm>
-            <a:off x="1371600" y="3108960"/>
-            <a:ext cx="9448495" cy="548640"/>
-          </a:xfrm>
-          <a:prstGeom prst="rect">
-            <a:avLst/>
-          </a:prstGeom>
-          <a:noFill/>
-          <a:ln/>
-        </p:spPr>
-        <p:txBody>
-          <a:bodyPr wrap="square" lIns="0" tIns="0" rIns="0" bIns="0" rtlCol="0" anchor="ctr"/>
+            <a:off x="0" y="3154680"/>
+            <a:ext cx="12191695" cy="914400"/>
+          </a:xfrm>
+          <a:prstGeom prst="rect">
+            <a:avLst/>
+          </a:prstGeom>
+          <a:noFill/>
+          <a:ln/>
+        </p:spPr>
+        <p:txBody>
+          <a:bodyPr wrap="square" rtlCol="0" anchor="ctr"/>
           <a:lstStyle/>
           <a:p>
             <a:pPr algn="ctr" indent="0" marL="0">
               <a:buNone/>
             </a:pPr>
             <a:r>
-              <a:rPr lang="en-US" sz="1700" i="1" dirty="0">
+              <a:rPr lang="en-US" sz="3800" dirty="0">
                 <a:solidFill>
                   <a:srgbClr val="FFFFFF"/>
                 </a:solidFill>
@@ -6446,100 +6510,22 @@
                 <a:ea typeface="Georgia" pitchFamily="34" charset="-122"/>
                 <a:cs typeface="Georgia" pitchFamily="34" charset="-120"/>
               </a:rPr>
-              <a:t>“Where does this fit against what we are doing with AI agents internally?”</a:t>
-            </a:r>
-            <a:endParaRPr lang="en-US" sz="1700" dirty="0"/>
-          </a:p>
-        </p:txBody>
-      </p:sp>
-      <p:sp>
-        <p:nvSpPr>
-          <p:cNvPr id="5" name="Text 3"/>
-          <p:cNvSpPr/>
-          <p:nvPr/>
-        </p:nvSpPr>
-        <p:spPr>
-          <a:xfrm>
-            <a:off x="1371600" y="3703320"/>
-            <a:ext cx="9448495" cy="548640"/>
-          </a:xfrm>
-          <a:prstGeom prst="rect">
-            <a:avLst/>
-          </a:prstGeom>
-          <a:noFill/>
-          <a:ln/>
-        </p:spPr>
-        <p:txBody>
-          <a:bodyPr wrap="square" lIns="0" tIns="0" rIns="0" bIns="0" rtlCol="0" anchor="ctr"/>
-          <a:lstStyle/>
-          <a:p>
-            <a:pPr algn="ctr" indent="0" marL="0">
-              <a:buNone/>
-            </a:pPr>
-            <a:r>
-              <a:rPr lang="en-US" sz="1700" i="1" dirty="0">
-                <a:solidFill>
-                  <a:srgbClr val="FFFFFF"/>
-                </a:solidFill>
-                <a:latin typeface="Georgia" pitchFamily="34" charset="0"/>
-                <a:ea typeface="Georgia" pitchFamily="34" charset="-122"/>
-                <a:cs typeface="Georgia" pitchFamily="34" charset="-120"/>
-              </a:rPr>
-              <a:t>“Is the CAB pattern something we should productise further?”</a:t>
-            </a:r>
-            <a:endParaRPr lang="en-US" sz="1700" dirty="0"/>
-          </a:p>
-        </p:txBody>
-      </p:sp>
-      <p:sp>
-        <p:nvSpPr>
-          <p:cNvPr id="6" name="Text 4"/>
-          <p:cNvSpPr/>
-          <p:nvPr/>
-        </p:nvSpPr>
-        <p:spPr>
-          <a:xfrm>
-            <a:off x="1371600" y="4297680"/>
-            <a:ext cx="9448495" cy="548640"/>
-          </a:xfrm>
-          <a:prstGeom prst="rect">
-            <a:avLst/>
-          </a:prstGeom>
-          <a:noFill/>
-          <a:ln/>
-        </p:spPr>
-        <p:txBody>
-          <a:bodyPr wrap="square" lIns="0" tIns="0" rIns="0" bIns="0" rtlCol="0" anchor="ctr"/>
-          <a:lstStyle/>
-          <a:p>
-            <a:pPr algn="ctr" indent="0" marL="0">
-              <a:buNone/>
-            </a:pPr>
-            <a:r>
-              <a:rPr lang="en-US" sz="1700" i="1" dirty="0">
-                <a:solidFill>
-                  <a:srgbClr val="FFFFFF"/>
-                </a:solidFill>
-                <a:latin typeface="Georgia" pitchFamily="34" charset="0"/>
-                <a:ea typeface="Georgia" pitchFamily="34" charset="-122"/>
-                <a:cs typeface="Georgia" pitchFamily="34" charset="-120"/>
-              </a:rPr>
-              <a:t>“Is there a fit with customers starting to deploy AI agents?”</a:t>
-            </a:r>
-            <a:endParaRPr lang="en-US" sz="1700" dirty="0"/>
-          </a:p>
-        </p:txBody>
-      </p:sp>
-      <p:sp>
-        <p:nvSpPr>
-          <p:cNvPr id="7" name="Shape 5"/>
-          <p:cNvSpPr/>
-          <p:nvPr/>
-        </p:nvSpPr>
-        <p:spPr>
-          <a:xfrm>
-            <a:off x="5638648" y="5166360"/>
-            <a:ext cx="914400" cy="36576"/>
+              <a:t>An AI Change Advisory Board decides if it ships.</a:t>
+            </a:r>
+            <a:endParaRPr lang="en-US" sz="3800" dirty="0"/>
+          </a:p>
+        </p:txBody>
+      </p:sp>
+      <p:sp>
+        <p:nvSpPr>
+          <p:cNvPr id="5" name="Shape 3"/>
+          <p:cNvSpPr/>
+          <p:nvPr/>
+        </p:nvSpPr>
+        <p:spPr>
+          <a:xfrm>
+            <a:off x="5547208" y="4480560"/>
+            <a:ext cx="1097280" cy="45720"/>
           </a:xfrm>
           <a:prstGeom prst="rect">
             <a:avLst/>
@@ -6557,26 +6543,29 @@
       </p:sp>
       <p:sp>
         <p:nvSpPr>
-          <p:cNvPr id="8" name="Text 6"/>
-          <p:cNvSpPr/>
-          <p:nvPr/>
-        </p:nvSpPr>
-        <p:spPr>
-          <a:xfrm>
-            <a:off x="0" y="5486400"/>
-            <a:ext cx="12191695" cy="457200"/>
-          </a:xfrm>
-          <a:prstGeom prst="rect">
-            <a:avLst/>
-          </a:prstGeom>
-          <a:noFill/>
-          <a:ln/>
-        </p:spPr>
-        <p:txBody>
-          <a:bodyPr wrap="square" rtlCol="0" anchor="ctr"/>
+          <p:cNvPr id="6" name="Text 4"/>
+          <p:cNvSpPr/>
+          <p:nvPr/>
+        </p:nvSpPr>
+        <p:spPr>
+          <a:xfrm>
+            <a:off x="0" y="4892040"/>
+            <a:ext cx="12191695" cy="1463040"/>
+          </a:xfrm>
+          <a:prstGeom prst="rect">
+            <a:avLst/>
+          </a:prstGeom>
+          <a:noFill/>
+          <a:ln/>
+        </p:spPr>
+        <p:txBody>
+          <a:bodyPr wrap="square" lIns="0" tIns="0" rIns="0" bIns="0" rtlCol="0" anchor="t"/>
           <a:lstStyle/>
           <a:p>
             <a:pPr algn="ctr" indent="0" marL="0">
+              <a:spcAft>
+                <a:spcPts val="200"/>
+              </a:spcAft>
               <a:buNone/>
             </a:pPr>
             <a:r>
@@ -6588,7 +6577,138 @@
                 <a:ea typeface="Calibri" pitchFamily="34" charset="-122"/>
                 <a:cs typeface="Calibri" pitchFamily="34" charset="-120"/>
               </a:rPr>
-              <a:t>github.com/psc0des/ruriskry</a:t>
+              <a:t>Try it</a:t>
+            </a:r>
+            <a:pPr algn="ctr" indent="0" marL="0">
+              <a:spcAft>
+                <a:spcPts val="200"/>
+              </a:spcAft>
+              <a:buNone/>
+            </a:pPr>
+            <a:r>
+              <a:rPr lang="en-US" sz="1600" dirty="0">
+                <a:solidFill>
+                  <a:srgbClr val="FFFFFF"/>
+                </a:solidFill>
+                <a:latin typeface="Calibri" pitchFamily="34" charset="0"/>
+                <a:ea typeface="Calibri" pitchFamily="34" charset="-122"/>
+                <a:cs typeface="Calibri" pitchFamily="34" charset="-120"/>
+              </a:rPr>
+              <a:t>   →   github.com/psc0des/ruriskry</a:t>
+            </a:r>
+            <a:endParaRPr lang="en-US" sz="1600" dirty="0"/>
+          </a:p>
+          <a:p>
+            <a:pPr algn="ctr" indent="0" marL="0">
+              <a:spcAft>
+                <a:spcPts val="200"/>
+              </a:spcAft>
+              <a:buNone/>
+            </a:pPr>
+            <a:r>
+              <a:rPr lang="en-US" sz="600" dirty="0">
+                <a:solidFill>
+                  <a:srgbClr val="000000"/>
+                </a:solidFill>
+                <a:latin typeface="Calibri" pitchFamily="34" charset="0"/>
+                <a:ea typeface="Calibri" pitchFamily="34" charset="-122"/>
+                <a:cs typeface="Calibri" pitchFamily="34" charset="-120"/>
+              </a:rPr>
+              <a:t> </a:t>
+            </a:r>
+            <a:endParaRPr lang="en-US" sz="1600" dirty="0"/>
+          </a:p>
+          <a:p>
+            <a:pPr algn="ctr" indent="0" marL="0">
+              <a:spcAft>
+                <a:spcPts val="200"/>
+              </a:spcAft>
+              <a:buNone/>
+            </a:pPr>
+            <a:r>
+              <a:rPr lang="en-US" sz="1600" b="1" dirty="0">
+                <a:solidFill>
+                  <a:srgbClr val="F59E0B"/>
+                </a:solidFill>
+                <a:latin typeface="Calibri" pitchFamily="34" charset="0"/>
+                <a:ea typeface="Calibri" pitchFamily="34" charset="-122"/>
+                <a:cs typeface="Calibri" pitchFamily="34" charset="-120"/>
+              </a:rPr>
+              <a:t>Dig into the scoring</a:t>
+            </a:r>
+            <a:pPr algn="ctr" indent="0" marL="0">
+              <a:spcAft>
+                <a:spcPts val="200"/>
+              </a:spcAft>
+              <a:buNone/>
+            </a:pPr>
+            <a:r>
+              <a:rPr lang="en-US" sz="1600" dirty="0">
+                <a:solidFill>
+                  <a:srgbClr val="FFFFFF"/>
+                </a:solidFill>
+                <a:latin typeface="Calibri" pitchFamily="34" charset="0"/>
+                <a:ea typeface="Calibri" pitchFamily="34" charset="-122"/>
+                <a:cs typeface="Calibri" pitchFamily="34" charset="-120"/>
+              </a:rPr>
+              <a:t>   →   src/core/governance_engine.py</a:t>
+            </a:r>
+            <a:endParaRPr lang="en-US" sz="1600" dirty="0"/>
+          </a:p>
+          <a:p>
+            <a:pPr algn="ctr" indent="0" marL="0">
+              <a:spcAft>
+                <a:spcPts val="200"/>
+              </a:spcAft>
+              <a:buNone/>
+            </a:pPr>
+            <a:r>
+              <a:rPr lang="en-US" sz="600" dirty="0">
+                <a:solidFill>
+                  <a:srgbClr val="000000"/>
+                </a:solidFill>
+                <a:latin typeface="Calibri" pitchFamily="34" charset="0"/>
+                <a:ea typeface="Calibri" pitchFamily="34" charset="-122"/>
+                <a:cs typeface="Calibri" pitchFamily="34" charset="-120"/>
+              </a:rPr>
+              <a:t> </a:t>
+            </a:r>
+            <a:endParaRPr lang="en-US" sz="1600" dirty="0"/>
+          </a:p>
+          <a:p>
+            <a:pPr algn="ctr" indent="0" marL="0">
+              <a:spcAft>
+                <a:spcPts val="200"/>
+              </a:spcAft>
+              <a:buNone/>
+            </a:pPr>
+            <a:r>
+              <a:rPr lang="en-US" sz="1600" b="1" dirty="0">
+                <a:solidFill>
+                  <a:srgbClr val="F59E0B"/>
+                </a:solidFill>
+                <a:latin typeface="Calibri" pitchFamily="34" charset="0"/>
+                <a:ea typeface="Calibri" pitchFamily="34" charset="-122"/>
+                <a:cs typeface="Calibri" pitchFamily="34" charset="-120"/>
+              </a:rPr>
+              <a:t>Push back</a:t>
+            </a:r>
+            <a:pPr algn="ctr" indent="0" marL="0">
+              <a:spcAft>
+                <a:spcPts val="200"/>
+              </a:spcAft>
+              <a:buNone/>
+            </a:pPr>
+            <a:r>
+              <a:rPr lang="en-US" sz="1600" dirty="0">
+                <a:solidFill>
+                  <a:srgbClr val="FFFFFF"/>
+                </a:solidFill>
+                <a:latin typeface="Calibri" pitchFamily="34" charset="0"/>
+                <a:ea typeface="Calibri" pitchFamily="34" charset="-122"/>
+                <a:cs typeface="Calibri" pitchFamily="34" charset="-120"/>
+              </a:rPr>
+              <a:t>   →   open an issue on GitHub</a:t>
             </a:r>
             <a:endParaRPr lang="en-US" sz="1600" dirty="0"/>
           </a:p>

--- a/docs/RuriSkry-Exec-Deck.pptx
+++ b/docs/RuriSkry-Exec-Deck.pptx
@@ -8837,8 +8837,8 @@
         </p:nvSpPr>
         <p:spPr>
           <a:xfrm>
-            <a:off x="0" y="1645920"/>
-            <a:ext cx="12191695" cy="822960"/>
+            <a:off x="0" y="1463040"/>
+            <a:ext cx="12191695" cy="914400"/>
           </a:xfrm>
           <a:prstGeom prst="rect">
             <a:avLst/>
@@ -8854,17 +8854,17 @@
               <a:buNone/>
             </a:pPr>
             <a:r>
-              <a:rPr lang="en-US" sz="4400" i="1" dirty="0">
-                <a:solidFill>
-                  <a:srgbClr val="F59E0B"/>
+              <a:rPr lang="en-US" sz="6000" b="1" i="1" dirty="0">
+                <a:solidFill>
+                  <a:srgbClr val="FFFFFF"/>
                 </a:solidFill>
                 <a:latin typeface="Georgia" pitchFamily="34" charset="0"/>
                 <a:ea typeface="Georgia" pitchFamily="34" charset="-122"/>
                 <a:cs typeface="Georgia" pitchFamily="34" charset="-120"/>
               </a:rPr>
-              <a:t>RuriSkry</a:t>
-            </a:r>
-            <a:endParaRPr lang="en-US" sz="4400" dirty="0"/>
+              <a:t>Meet RuriSkry.</a:t>
+            </a:r>
+            <a:endParaRPr lang="en-US" sz="6000" dirty="0"/>
           </a:p>
         </p:txBody>
       </p:sp>
@@ -8876,8 +8876,8 @@
         </p:nvSpPr>
         <p:spPr>
           <a:xfrm>
-            <a:off x="0" y="2834640"/>
-            <a:ext cx="12191695" cy="914400"/>
+            <a:off x="0" y="2697480"/>
+            <a:ext cx="12191695" cy="822960"/>
           </a:xfrm>
           <a:prstGeom prst="rect">
             <a:avLst/>
@@ -8893,71 +8893,32 @@
               <a:buNone/>
             </a:pPr>
             <a:r>
-              <a:rPr lang="en-US" sz="5400" b="1" dirty="0">
-                <a:solidFill>
-                  <a:srgbClr val="FFFFFF"/>
+              <a:rPr lang="en-US" sz="2800" i="1" dirty="0">
+                <a:solidFill>
+                  <a:srgbClr val="F59E0B"/>
                 </a:solidFill>
                 <a:latin typeface="Georgia" pitchFamily="34" charset="0"/>
                 <a:ea typeface="Georgia" pitchFamily="34" charset="-122"/>
                 <a:cs typeface="Georgia" pitchFamily="34" charset="-120"/>
               </a:rPr>
-              <a:t>AI agents propose the fix.</a:t>
-            </a:r>
-            <a:endParaRPr lang="en-US" sz="5400" dirty="0"/>
-          </a:p>
-        </p:txBody>
-      </p:sp>
-      <p:sp>
-        <p:nvSpPr>
-          <p:cNvPr id="4" name="Text 2"/>
-          <p:cNvSpPr/>
-          <p:nvPr/>
-        </p:nvSpPr>
-        <p:spPr>
-          <a:xfrm>
-            <a:off x="0" y="3886200"/>
-            <a:ext cx="12191695" cy="914400"/>
-          </a:xfrm>
-          <a:prstGeom prst="rect">
-            <a:avLst/>
-          </a:prstGeom>
-          <a:noFill/>
-          <a:ln/>
-        </p:spPr>
-        <p:txBody>
-          <a:bodyPr wrap="square" rtlCol="0" anchor="ctr"/>
-          <a:lstStyle/>
-          <a:p>
-            <a:pPr algn="ctr" indent="0" marL="0">
-              <a:buNone/>
-            </a:pPr>
-            <a:r>
-              <a:rPr lang="en-US" sz="4000" dirty="0">
-                <a:solidFill>
-                  <a:srgbClr val="FFFFFF"/>
-                </a:solidFill>
-                <a:latin typeface="Georgia" pitchFamily="34" charset="0"/>
-                <a:ea typeface="Georgia" pitchFamily="34" charset="-122"/>
-                <a:cs typeface="Georgia" pitchFamily="34" charset="-120"/>
-              </a:rPr>
-              <a:t>An AI Change Advisory Board decides if it ships.</a:t>
-            </a:r>
-            <a:endParaRPr lang="en-US" sz="4000" dirty="0"/>
-          </a:p>
-        </p:txBody>
-      </p:sp>
-      <p:sp>
-        <p:nvSpPr>
-          <p:cNvPr id="5" name="Shape 3"/>
-          <p:cNvSpPr/>
-          <p:nvPr/>
-        </p:nvSpPr>
-        <p:spPr>
-          <a:xfrm>
-            <a:off x="6022696" y="5212080"/>
-            <a:ext cx="146304" cy="146304"/>
-          </a:xfrm>
-          <a:prstGeom prst="ellipse">
+              <a:t>A judgment layer between your AI agents and Azure.</a:t>
+            </a:r>
+            <a:endParaRPr lang="en-US" sz="2800" dirty="0"/>
+          </a:p>
+        </p:txBody>
+      </p:sp>
+      <p:sp>
+        <p:nvSpPr>
+          <p:cNvPr id="4" name="Shape 2"/>
+          <p:cNvSpPr/>
+          <p:nvPr/>
+        </p:nvSpPr>
+        <p:spPr>
+          <a:xfrm>
+            <a:off x="5547208" y="3886200"/>
+            <a:ext cx="1097280" cy="45720"/>
+          </a:xfrm>
+          <a:prstGeom prst="rect">
             <a:avLst/>
           </a:prstGeom>
           <a:solidFill>
@@ -8970,6 +8931,154 @@
             <a:prstDash val="solid"/>
           </a:ln>
         </p:spPr>
+      </p:sp>
+      <p:sp>
+        <p:nvSpPr>
+          <p:cNvPr id="5" name="Text 3"/>
+          <p:cNvSpPr/>
+          <p:nvPr/>
+        </p:nvSpPr>
+        <p:spPr>
+          <a:xfrm>
+            <a:off x="1097280" y="4160520"/>
+            <a:ext cx="9997135" cy="1005840"/>
+          </a:xfrm>
+          <a:prstGeom prst="rect">
+            <a:avLst/>
+          </a:prstGeom>
+          <a:noFill/>
+          <a:ln/>
+        </p:spPr>
+        <p:txBody>
+          <a:bodyPr wrap="square" lIns="0" tIns="0" rIns="0" bIns="0" rtlCol="0" anchor="t"/>
+          <a:lstStyle/>
+          <a:p>
+            <a:pPr algn="ctr" indent="0" marL="0">
+              <a:buNone/>
+            </a:pPr>
+            <a:r>
+              <a:rPr lang="en-US" sz="2000" b="1" dirty="0">
+                <a:solidFill>
+                  <a:srgbClr val="FFFFFF"/>
+                </a:solidFill>
+                <a:latin typeface="Calibri" pitchFamily="34" charset="0"/>
+                <a:ea typeface="Calibri" pitchFamily="34" charset="-122"/>
+                <a:cs typeface="Calibri" pitchFamily="34" charset="-120"/>
+              </a:rPr>
+              <a:t>Four agents </a:t>
+            </a:r>
+            <a:pPr algn="ctr" indent="0" marL="0">
+              <a:buNone/>
+            </a:pPr>
+            <a:r>
+              <a:rPr lang="en-US" sz="2000" dirty="0">
+                <a:solidFill>
+                  <a:srgbClr val="CBD5E1"/>
+                </a:solidFill>
+                <a:latin typeface="Calibri" pitchFamily="34" charset="0"/>
+                <a:ea typeface="Calibri" pitchFamily="34" charset="-122"/>
+                <a:cs typeface="Calibri" pitchFamily="34" charset="-120"/>
+              </a:rPr>
+              <a:t>score every proposed action. </a:t>
+            </a:r>
+            <a:pPr algn="ctr" indent="0" marL="0">
+              <a:buNone/>
+            </a:pPr>
+            <a:r>
+              <a:rPr lang="en-US" sz="2000" b="1" dirty="0">
+                <a:solidFill>
+                  <a:srgbClr val="FFFFFF"/>
+                </a:solidFill>
+                <a:latin typeface="Calibri" pitchFamily="34" charset="0"/>
+                <a:ea typeface="Calibri" pitchFamily="34" charset="-122"/>
+                <a:cs typeface="Calibri" pitchFamily="34" charset="-120"/>
+              </a:rPr>
+              <a:t>One verdict </a:t>
+            </a:r>
+            <a:pPr algn="ctr" indent="0" marL="0">
+              <a:buNone/>
+            </a:pPr>
+            <a:r>
+              <a:rPr lang="en-US" sz="2000" dirty="0">
+                <a:solidFill>
+                  <a:srgbClr val="CBD5E1"/>
+                </a:solidFill>
+                <a:latin typeface="Calibri" pitchFamily="34" charset="0"/>
+                <a:ea typeface="Calibri" pitchFamily="34" charset="-122"/>
+                <a:cs typeface="Calibri" pitchFamily="34" charset="-120"/>
+              </a:rPr>
+              <a:t>the execution pipeline enforces. </a:t>
+            </a:r>
+            <a:pPr algn="ctr" indent="0" marL="0">
+              <a:buNone/>
+            </a:pPr>
+            <a:r>
+              <a:rPr lang="en-US" sz="2000" b="1" dirty="0">
+                <a:solidFill>
+                  <a:srgbClr val="FFFFFF"/>
+                </a:solidFill>
+                <a:latin typeface="Calibri" pitchFamily="34" charset="0"/>
+                <a:ea typeface="Calibri" pitchFamily="34" charset="-122"/>
+                <a:cs typeface="Calibri" pitchFamily="34" charset="-120"/>
+              </a:rPr>
+              <a:t>Full audit trail </a:t>
+            </a:r>
+            <a:pPr algn="ctr" indent="0" marL="0">
+              <a:buNone/>
+            </a:pPr>
+            <a:r>
+              <a:rPr lang="en-US" sz="2000" dirty="0">
+                <a:solidFill>
+                  <a:srgbClr val="CBD5E1"/>
+                </a:solidFill>
+                <a:latin typeface="Calibri" pitchFamily="34" charset="0"/>
+                <a:ea typeface="Calibri" pitchFamily="34" charset="-122"/>
+                <a:cs typeface="Calibri" pitchFamily="34" charset="-120"/>
+              </a:rPr>
+              <a:t>for every decision.</a:t>
+            </a:r>
+            <a:endParaRPr lang="en-US" sz="2000" dirty="0"/>
+          </a:p>
+        </p:txBody>
+      </p:sp>
+      <p:sp>
+        <p:nvSpPr>
+          <p:cNvPr id="6" name="Text 4"/>
+          <p:cNvSpPr/>
+          <p:nvPr/>
+        </p:nvSpPr>
+        <p:spPr>
+          <a:xfrm>
+            <a:off x="0" y="5532120"/>
+            <a:ext cx="12191695" cy="457200"/>
+          </a:xfrm>
+          <a:prstGeom prst="rect">
+            <a:avLst/>
+          </a:prstGeom>
+          <a:noFill/>
+          <a:ln/>
+        </p:spPr>
+        <p:txBody>
+          <a:bodyPr wrap="square" rtlCol="0" anchor="ctr"/>
+          <a:lstStyle/>
+          <a:p>
+            <a:pPr algn="ctr" indent="0" marL="0">
+              <a:buNone/>
+            </a:pPr>
+            <a:r>
+              <a:rPr lang="en-US" sz="1700" i="1" dirty="0">
+                <a:solidFill>
+                  <a:srgbClr val="94A3B8"/>
+                </a:solidFill>
+                <a:latin typeface="Georgia" pitchFamily="34" charset="0"/>
+                <a:ea typeface="Georgia" pitchFamily="34" charset="-122"/>
+                <a:cs typeface="Georgia" pitchFamily="34" charset="-120"/>
+              </a:rPr>
+              <a:t>No new process. No new IAM. Just the judgment layer that was missing.</a:t>
+            </a:r>
+            <a:endParaRPr lang="en-US" sz="1700" dirty="0"/>
+          </a:p>
+        </p:txBody>
       </p:sp>
     </p:spTree>
   </p:cSld>
